--- a/downloads/presentations/modules/lesson-52-ai-use-case-intake-and-triage-basics.pptx
+++ b/downloads/presentations/modules/lesson-52-ai-use-case-intake-and-triage-basics.pptx
@@ -3090,6 +3090,45 @@
           </a:p>
         </p:txBody>
       </p:sp>
+      <p:sp>
+        <p:nvSpPr>
+          <p:cNvPr id="8" name="Text 5"/>
+          <p:cNvSpPr/>
+          <p:nvPr/>
+        </p:nvSpPr>
+        <p:spPr>
+          <a:xfrm>
+            <a:off x="11137392" y="6510528"/>
+            <a:ext cx="411480" cy="201168"/>
+          </a:xfrm>
+          <a:prstGeom prst="rect">
+            <a:avLst/>
+          </a:prstGeom>
+          <a:noFill/>
+          <a:ln/>
+        </p:spPr>
+        <p:txBody>
+          <a:bodyPr wrap="square" lIns="0" tIns="0" rIns="0" bIns="0" rtlCol="0" anchor="ctr"/>
+          <a:lstStyle/>
+          <a:p>
+            <a:pPr algn="r" indent="0" marL="0">
+              <a:buNone/>
+            </a:pPr>
+            <a:r>
+              <a:rPr lang="en-US" sz="900" dirty="0">
+                <a:solidFill>
+                  <a:srgbClr val="5F7181"/>
+                </a:solidFill>
+                <a:latin typeface="Aptos" pitchFamily="34" charset="0"/>
+                <a:ea typeface="Aptos" pitchFamily="34" charset="-122"/>
+                <a:cs typeface="Aptos" pitchFamily="34" charset="-120"/>
+              </a:rPr>
+              <a:t>1</a:t>
+            </a:r>
+            <a:endParaRPr lang="en-US" sz="900" dirty="0"/>
+          </a:p>
+        </p:txBody>
+      </p:sp>
     </p:spTree>
   </p:cSld>
   <p:clrMapOvr>
@@ -3283,7 +3322,7 @@
                 <a:ea typeface="Aptos" pitchFamily="34" charset="-122"/>
                 <a:cs typeface="Aptos" pitchFamily="34" charset="-120"/>
               </a:rPr>
-              <a:t>© Paula Soper</a:t>
+              <a:t>Â© Paula Soper</a:t>
             </a:r>
             <a:endParaRPr lang="en-US" sz="800" dirty="0"/>
           </a:p>
@@ -3297,8 +3336,47 @@
         </p:nvSpPr>
         <p:spPr>
           <a:xfrm>
+            <a:off x="11137392" y="6510528"/>
+            <a:ext cx="411480" cy="201168"/>
+          </a:xfrm>
+          <a:prstGeom prst="rect">
+            <a:avLst/>
+          </a:prstGeom>
+          <a:noFill/>
+          <a:ln/>
+        </p:spPr>
+        <p:txBody>
+          <a:bodyPr wrap="square" lIns="0" tIns="0" rIns="0" bIns="0" rtlCol="0" anchor="ctr"/>
+          <a:lstStyle/>
+          <a:p>
+            <a:pPr algn="r" indent="0" marL="0">
+              <a:buNone/>
+            </a:pPr>
+            <a:r>
+              <a:rPr lang="en-US" sz="900" dirty="0">
+                <a:solidFill>
+                  <a:srgbClr val="5F7181"/>
+                </a:solidFill>
+                <a:latin typeface="Aptos" pitchFamily="34" charset="0"/>
+                <a:ea typeface="Aptos" pitchFamily="34" charset="-122"/>
+                <a:cs typeface="Aptos" pitchFamily="34" charset="-120"/>
+              </a:rPr>
+              <a:t>10</a:t>
+            </a:r>
+            <a:endParaRPr lang="en-US" sz="900" dirty="0"/>
+          </a:p>
+        </p:txBody>
+      </p:sp>
+      <p:sp>
+        <p:nvSpPr>
+          <p:cNvPr id="8" name="Text 6"/>
+          <p:cNvSpPr/>
+          <p:nvPr/>
+        </p:nvSpPr>
+        <p:spPr>
+          <a:xfrm>
             <a:off x="640080" y="658368"/>
-            <a:ext cx="10881360" cy="566928"/>
+            <a:ext cx="10881360" cy="713232"/>
           </a:xfrm>
           <a:prstGeom prst="rect">
             <a:avLst/>
@@ -3316,7 +3394,7 @@
               <a:buNone/>
             </a:pPr>
             <a:r>
-              <a:rPr lang="en-US" sz="2700" b="1" dirty="0">
+              <a:rPr lang="en-US" sz="3400" b="1" dirty="0">
                 <a:solidFill>
                   <a:srgbClr val="003A63"/>
                 </a:solidFill>
@@ -3326,20 +3404,20 @@
               </a:rPr>
               <a:t>Topic Deep Dive Continued</a:t>
             </a:r>
-            <a:endParaRPr lang="en-US" sz="2700" dirty="0"/>
-          </a:p>
-        </p:txBody>
-      </p:sp>
-      <p:sp>
-        <p:nvSpPr>
-          <p:cNvPr id="8" name="Text 6"/>
-          <p:cNvSpPr/>
-          <p:nvPr/>
-        </p:nvSpPr>
-        <p:spPr>
-          <a:xfrm>
-            <a:off x="868680" y="1417320"/>
-            <a:ext cx="6675120" cy="4434840"/>
+            <a:endParaRPr lang="en-US" sz="3400" dirty="0"/>
+          </a:p>
+        </p:txBody>
+      </p:sp>
+      <p:sp>
+        <p:nvSpPr>
+          <p:cNvPr id="9" name="Text 7"/>
+          <p:cNvSpPr/>
+          <p:nvPr/>
+        </p:nvSpPr>
+        <p:spPr>
+          <a:xfrm>
+            <a:off x="868680" y="1508760"/>
+            <a:ext cx="6537960" cy="4160520"/>
           </a:xfrm>
           <a:prstGeom prst="rect">
             <a:avLst/>
@@ -3354,7 +3432,7 @@
           <a:lstStyle/>
           <a:p>
             <a:r>
-              <a:rPr lang="en-US" sz="1700" dirty="0">
+              <a:rPr lang="en-US" sz="2100" dirty="0">
                 <a:solidFill>
                   <a:srgbClr val="17364A"/>
                 </a:solidFill>
@@ -3364,11 +3442,11 @@
               </a:rPr>
               <a:t>Use case intake also supports portfolio management.</a:t>
             </a:r>
-            <a:endParaRPr lang="en-US" sz="1700" dirty="0"/>
-          </a:p>
-          <a:p>
-            <a:r>
-              <a:rPr lang="en-US" sz="1700" dirty="0">
+            <a:endParaRPr lang="en-US" sz="2100" dirty="0"/>
+          </a:p>
+          <a:p>
+            <a:r>
+              <a:rPr lang="en-US" sz="2100" dirty="0">
                 <a:solidFill>
                   <a:srgbClr val="17364A"/>
                 </a:solidFill>
@@ -3376,13 +3454,13 @@
                 <a:ea typeface="Aptos" pitchFamily="34" charset="-122"/>
                 <a:cs typeface="Aptos" pitchFamily="34" charset="-120"/>
               </a:rPr>
-              <a:t>When agencies collect use cases in a consistent format, leaders can compare proposals across programs, identify common.</a:t>
-            </a:r>
-            <a:endParaRPr lang="en-US" sz="1700" dirty="0"/>
-          </a:p>
-          <a:p>
-            <a:r>
-              <a:rPr lang="en-US" sz="1700" dirty="0">
+              <a:t>When agencies collect use cases in a consistent format, leaders can compare proposals across programs,.</a:t>
+            </a:r>
+            <a:endParaRPr lang="en-US" sz="2100" dirty="0"/>
+          </a:p>
+          <a:p>
+            <a:r>
+              <a:rPr lang="en-US" sz="2100" dirty="0">
                 <a:solidFill>
                   <a:srgbClr val="17364A"/>
                 </a:solidFill>
@@ -3392,13 +3470,13 @@
               </a:rPr>
               <a:t>The intake record becomes the first governance artifact in the AI lifecycle.</a:t>
             </a:r>
-            <a:endParaRPr lang="en-US" sz="1700" dirty="0"/>
-          </a:p>
-        </p:txBody>
-      </p:sp>
-      <p:sp>
-        <p:nvSpPr>
-          <p:cNvPr id="9" name="Shape 7"/>
+            <a:endParaRPr lang="en-US" sz="2100" dirty="0"/>
+          </a:p>
+        </p:txBody>
+      </p:sp>
+      <p:sp>
+        <p:nvSpPr>
+          <p:cNvPr id="10" name="Shape 8"/>
           <p:cNvSpPr/>
           <p:nvPr/>
         </p:nvSpPr>
@@ -3425,14 +3503,14 @@
       </p:sp>
       <p:sp>
         <p:nvSpPr>
-          <p:cNvPr id="10" name="Text 8"/>
+          <p:cNvPr id="11" name="Text 9"/>
           <p:cNvSpPr/>
           <p:nvPr/>
         </p:nvSpPr>
         <p:spPr>
           <a:xfrm>
             <a:off x="8074152" y="1563624"/>
-            <a:ext cx="2825496" cy="201168"/>
+            <a:ext cx="2825496" cy="256032"/>
           </a:xfrm>
           <a:prstGeom prst="rect">
             <a:avLst/>
@@ -3448,7 +3526,7 @@
               <a:buNone/>
             </a:pPr>
             <a:r>
-              <a:rPr lang="en-US" sz="950" b="1" dirty="0">
+              <a:rPr lang="en-US" sz="1300" b="1" dirty="0">
                 <a:solidFill>
                   <a:srgbClr val="0068B7"/>
                 </a:solidFill>
@@ -3458,20 +3536,20 @@
               </a:rPr>
               <a:t>Key idea</a:t>
             </a:r>
-            <a:endParaRPr lang="en-US" sz="950" dirty="0"/>
-          </a:p>
-        </p:txBody>
-      </p:sp>
-      <p:sp>
-        <p:nvSpPr>
-          <p:cNvPr id="11" name="Text 9"/>
-          <p:cNvSpPr/>
-          <p:nvPr/>
-        </p:nvSpPr>
-        <p:spPr>
-          <a:xfrm>
-            <a:off x="8074152" y="1856232"/>
-            <a:ext cx="2825496" cy="1261872"/>
+            <a:endParaRPr lang="en-US" sz="1300" dirty="0"/>
+          </a:p>
+        </p:txBody>
+      </p:sp>
+      <p:sp>
+        <p:nvSpPr>
+          <p:cNvPr id="12" name="Text 10"/>
+          <p:cNvSpPr/>
+          <p:nvPr/>
+        </p:nvSpPr>
+        <p:spPr>
+          <a:xfrm>
+            <a:off x="8074152" y="1920240"/>
+            <a:ext cx="2825496" cy="1188720"/>
           </a:xfrm>
           <a:prstGeom prst="rect">
             <a:avLst/>
@@ -3489,7 +3567,7 @@
               <a:buNone/>
             </a:pPr>
             <a:r>
-              <a:rPr lang="en-US" sz="1250" dirty="0">
+              <a:rPr lang="en-US" sz="1550" dirty="0">
                 <a:solidFill>
                   <a:srgbClr val="17364A"/>
                 </a:solidFill>
@@ -3499,13 +3577,13 @@
               </a:rPr>
               <a:t>Use case intake also supports portfolio management.</a:t>
             </a:r>
-            <a:endParaRPr lang="en-US" sz="1250" dirty="0"/>
-          </a:p>
-        </p:txBody>
-      </p:sp>
-      <p:sp>
-        <p:nvSpPr>
-          <p:cNvPr id="12" name="Shape 10"/>
+            <a:endParaRPr lang="en-US" sz="1550" dirty="0"/>
+          </a:p>
+        </p:txBody>
+      </p:sp>
+      <p:sp>
+        <p:nvSpPr>
+          <p:cNvPr id="13" name="Shape 11"/>
           <p:cNvSpPr/>
           <p:nvPr/>
         </p:nvSpPr>
@@ -3532,14 +3610,14 @@
       </p:sp>
       <p:sp>
         <p:nvSpPr>
-          <p:cNvPr id="13" name="Text 11"/>
+          <p:cNvPr id="14" name="Text 12"/>
           <p:cNvSpPr/>
           <p:nvPr/>
         </p:nvSpPr>
         <p:spPr>
           <a:xfrm>
             <a:off x="8074152" y="3666744"/>
-            <a:ext cx="2825496" cy="201168"/>
+            <a:ext cx="2825496" cy="256032"/>
           </a:xfrm>
           <a:prstGeom prst="rect">
             <a:avLst/>
@@ -3555,7 +3633,7 @@
               <a:buNone/>
             </a:pPr>
             <a:r>
-              <a:rPr lang="en-US" sz="950" b="1" dirty="0">
+              <a:rPr lang="en-US" sz="1300" b="1" dirty="0">
                 <a:solidFill>
                   <a:srgbClr val="0068B7"/>
                 </a:solidFill>
@@ -3565,20 +3643,20 @@
               </a:rPr>
               <a:t>Use this for</a:t>
             </a:r>
-            <a:endParaRPr lang="en-US" sz="950" dirty="0"/>
-          </a:p>
-        </p:txBody>
-      </p:sp>
-      <p:sp>
-        <p:nvSpPr>
-          <p:cNvPr id="14" name="Text 12"/>
-          <p:cNvSpPr/>
-          <p:nvPr/>
-        </p:nvSpPr>
-        <p:spPr>
-          <a:xfrm>
-            <a:off x="8074152" y="3959352"/>
-            <a:ext cx="2825496" cy="1170432"/>
+            <a:endParaRPr lang="en-US" sz="1300" dirty="0"/>
+          </a:p>
+        </p:txBody>
+      </p:sp>
+      <p:sp>
+        <p:nvSpPr>
+          <p:cNvPr id="15" name="Text 13"/>
+          <p:cNvSpPr/>
+          <p:nvPr/>
+        </p:nvSpPr>
+        <p:spPr>
+          <a:xfrm>
+            <a:off x="8074152" y="4023360"/>
+            <a:ext cx="2825496" cy="1097280"/>
           </a:xfrm>
           <a:prstGeom prst="rect">
             <a:avLst/>
@@ -3596,7 +3674,7 @@
               <a:buNone/>
             </a:pPr>
             <a:r>
-              <a:rPr lang="en-US" sz="1250" dirty="0">
+              <a:rPr lang="en-US" sz="1550" dirty="0">
                 <a:solidFill>
                   <a:srgbClr val="17364A"/>
                 </a:solidFill>
@@ -3606,7 +3684,7 @@
               </a:rPr>
               <a:t>Connect the concept to public health decisions, safeguards, documentation, or implementation work.</a:t>
             </a:r>
-            <a:endParaRPr lang="en-US" sz="1250" dirty="0"/>
+            <a:endParaRPr lang="en-US" sz="1550" dirty="0"/>
           </a:p>
         </p:txBody>
       </p:sp>
@@ -3803,7 +3881,7 @@
                 <a:ea typeface="Aptos" pitchFamily="34" charset="-122"/>
                 <a:cs typeface="Aptos" pitchFamily="34" charset="-120"/>
               </a:rPr>
-              <a:t>© Paula Soper</a:t>
+              <a:t>Â© Paula Soper</a:t>
             </a:r>
             <a:endParaRPr lang="en-US" sz="800" dirty="0"/>
           </a:p>
@@ -3811,7 +3889,46 @@
       </p:sp>
       <p:sp>
         <p:nvSpPr>
-          <p:cNvPr id="7" name="Shape 5"/>
+          <p:cNvPr id="7" name="Text 5"/>
+          <p:cNvSpPr/>
+          <p:nvPr/>
+        </p:nvSpPr>
+        <p:spPr>
+          <a:xfrm>
+            <a:off x="11137392" y="6510528"/>
+            <a:ext cx="411480" cy="201168"/>
+          </a:xfrm>
+          <a:prstGeom prst="rect">
+            <a:avLst/>
+          </a:prstGeom>
+          <a:noFill/>
+          <a:ln/>
+        </p:spPr>
+        <p:txBody>
+          <a:bodyPr wrap="square" lIns="0" tIns="0" rIns="0" bIns="0" rtlCol="0" anchor="ctr"/>
+          <a:lstStyle/>
+          <a:p>
+            <a:pPr algn="r" indent="0" marL="0">
+              <a:buNone/>
+            </a:pPr>
+            <a:r>
+              <a:rPr lang="en-US" sz="900" dirty="0">
+                <a:solidFill>
+                  <a:srgbClr val="5F7181"/>
+                </a:solidFill>
+                <a:latin typeface="Aptos" pitchFamily="34" charset="0"/>
+                <a:ea typeface="Aptos" pitchFamily="34" charset="-122"/>
+                <a:cs typeface="Aptos" pitchFamily="34" charset="-120"/>
+              </a:rPr>
+              <a:t>11</a:t>
+            </a:r>
+            <a:endParaRPr lang="en-US" sz="900" dirty="0"/>
+          </a:p>
+        </p:txBody>
+      </p:sp>
+      <p:sp>
+        <p:nvSpPr>
+          <p:cNvPr id="8" name="Shape 6"/>
           <p:cNvSpPr/>
           <p:nvPr/>
         </p:nvSpPr>
@@ -3836,7 +3953,7 @@
       </p:sp>
       <p:sp>
         <p:nvSpPr>
-          <p:cNvPr id="8" name="Text 6"/>
+          <p:cNvPr id="9" name="Text 7"/>
           <p:cNvSpPr/>
           <p:nvPr/>
         </p:nvSpPr>
@@ -3875,14 +3992,14 @@
       </p:sp>
       <p:sp>
         <p:nvSpPr>
-          <p:cNvPr id="9" name="Text 7"/>
+          <p:cNvPr id="10" name="Text 8"/>
           <p:cNvSpPr/>
           <p:nvPr/>
         </p:nvSpPr>
         <p:spPr>
           <a:xfrm>
             <a:off x="640080" y="621792"/>
-            <a:ext cx="10881360" cy="566928"/>
+            <a:ext cx="10881360" cy="713232"/>
           </a:xfrm>
           <a:prstGeom prst="rect">
             <a:avLst/>
@@ -3900,7 +4017,7 @@
               <a:buNone/>
             </a:pPr>
             <a:r>
-              <a:rPr lang="en-US" sz="2700" b="1" dirty="0">
+              <a:rPr lang="en-US" sz="3400" b="1" dirty="0">
                 <a:solidFill>
                   <a:srgbClr val="003A63"/>
                 </a:solidFill>
@@ -3910,20 +4027,20 @@
               </a:rPr>
               <a:t>Risks, Failure Modes, and Guardrails</a:t>
             </a:r>
-            <a:endParaRPr lang="en-US" sz="2700" dirty="0"/>
-          </a:p>
-        </p:txBody>
-      </p:sp>
-      <p:sp>
-        <p:nvSpPr>
-          <p:cNvPr id="10" name="Text 8"/>
-          <p:cNvSpPr/>
-          <p:nvPr/>
-        </p:nvSpPr>
-        <p:spPr>
-          <a:xfrm>
-            <a:off x="868680" y="1417320"/>
-            <a:ext cx="6675120" cy="4434840"/>
+            <a:endParaRPr lang="en-US" sz="3400" dirty="0"/>
+          </a:p>
+        </p:txBody>
+      </p:sp>
+      <p:sp>
+        <p:nvSpPr>
+          <p:cNvPr id="11" name="Text 9"/>
+          <p:cNvSpPr/>
+          <p:nvPr/>
+        </p:nvSpPr>
+        <p:spPr>
+          <a:xfrm>
+            <a:off x="868680" y="1508760"/>
+            <a:ext cx="6537960" cy="4160520"/>
           </a:xfrm>
           <a:prstGeom prst="rect">
             <a:avLst/>
@@ -3938,7 +4055,7 @@
           <a:lstStyle/>
           <a:p>
             <a:r>
-              <a:rPr lang="en-US" sz="1700" dirty="0">
+              <a:rPr lang="en-US" sz="2100" dirty="0">
                 <a:solidFill>
                   <a:srgbClr val="17364A"/>
                 </a:solidFill>
@@ -3948,11 +4065,11 @@
               </a:rPr>
               <a:t>Risks and failure modes include the following:</a:t>
             </a:r>
-            <a:endParaRPr lang="en-US" sz="1700" dirty="0"/>
-          </a:p>
-          <a:p>
-            <a:r>
-              <a:rPr lang="en-US" sz="1700" dirty="0">
+            <a:endParaRPr lang="en-US" sz="2100" dirty="0"/>
+          </a:p>
+          <a:p>
+            <a:r>
+              <a:rPr lang="en-US" sz="2100" dirty="0">
                 <a:solidFill>
                   <a:srgbClr val="17364A"/>
                 </a:solidFill>
@@ -3962,11 +4079,11 @@
               </a:rPr>
               <a:t>Informal AI experimentation with sensitive or confidential data before review.</a:t>
             </a:r>
-            <a:endParaRPr lang="en-US" sz="1700" dirty="0"/>
-          </a:p>
-          <a:p>
-            <a:r>
-              <a:rPr lang="en-US" sz="1700" dirty="0">
+            <a:endParaRPr lang="en-US" sz="2100" dirty="0"/>
+          </a:p>
+          <a:p>
+            <a:r>
+              <a:rPr lang="en-US" sz="2100" dirty="0">
                 <a:solidFill>
                   <a:srgbClr val="17364A"/>
                 </a:solidFill>
@@ -3976,13 +4093,13 @@
               </a:rPr>
               <a:t>Tool-first proposals that do not solve a real workflow problem.</a:t>
             </a:r>
-            <a:endParaRPr lang="en-US" sz="1700" dirty="0"/>
-          </a:p>
-        </p:txBody>
-      </p:sp>
-      <p:sp>
-        <p:nvSpPr>
-          <p:cNvPr id="11" name="Shape 9"/>
+            <a:endParaRPr lang="en-US" sz="2100" dirty="0"/>
+          </a:p>
+        </p:txBody>
+      </p:sp>
+      <p:sp>
+        <p:nvSpPr>
+          <p:cNvPr id="12" name="Shape 10"/>
           <p:cNvSpPr/>
           <p:nvPr/>
         </p:nvSpPr>
@@ -4009,14 +4126,14 @@
       </p:sp>
       <p:sp>
         <p:nvSpPr>
-          <p:cNvPr id="12" name="Text 10"/>
+          <p:cNvPr id="13" name="Text 11"/>
           <p:cNvSpPr/>
           <p:nvPr/>
         </p:nvSpPr>
         <p:spPr>
           <a:xfrm>
             <a:off x="8074152" y="1563624"/>
-            <a:ext cx="2825496" cy="201168"/>
+            <a:ext cx="2825496" cy="256032"/>
           </a:xfrm>
           <a:prstGeom prst="rect">
             <a:avLst/>
@@ -4032,7 +4149,7 @@
               <a:buNone/>
             </a:pPr>
             <a:r>
-              <a:rPr lang="en-US" sz="950" b="1" dirty="0">
+              <a:rPr lang="en-US" sz="1300" b="1" dirty="0">
                 <a:solidFill>
                   <a:srgbClr val="0068B7"/>
                 </a:solidFill>
@@ -4042,20 +4159,20 @@
               </a:rPr>
               <a:t>Key idea</a:t>
             </a:r>
-            <a:endParaRPr lang="en-US" sz="950" dirty="0"/>
-          </a:p>
-        </p:txBody>
-      </p:sp>
-      <p:sp>
-        <p:nvSpPr>
-          <p:cNvPr id="13" name="Text 11"/>
-          <p:cNvSpPr/>
-          <p:nvPr/>
-        </p:nvSpPr>
-        <p:spPr>
-          <a:xfrm>
-            <a:off x="8074152" y="1856232"/>
-            <a:ext cx="2825496" cy="1261872"/>
+            <a:endParaRPr lang="en-US" sz="1300" dirty="0"/>
+          </a:p>
+        </p:txBody>
+      </p:sp>
+      <p:sp>
+        <p:nvSpPr>
+          <p:cNvPr id="14" name="Text 12"/>
+          <p:cNvSpPr/>
+          <p:nvPr/>
+        </p:nvSpPr>
+        <p:spPr>
+          <a:xfrm>
+            <a:off x="8074152" y="1920240"/>
+            <a:ext cx="2825496" cy="1188720"/>
           </a:xfrm>
           <a:prstGeom prst="rect">
             <a:avLst/>
@@ -4073,7 +4190,7 @@
               <a:buNone/>
             </a:pPr>
             <a:r>
-              <a:rPr lang="en-US" sz="1250" dirty="0">
+              <a:rPr lang="en-US" sz="1550" dirty="0">
                 <a:solidFill>
                   <a:srgbClr val="17364A"/>
                 </a:solidFill>
@@ -4083,13 +4200,13 @@
               </a:rPr>
               <a:t>Risks and failure modes include the following:</a:t>
             </a:r>
-            <a:endParaRPr lang="en-US" sz="1250" dirty="0"/>
-          </a:p>
-        </p:txBody>
-      </p:sp>
-      <p:sp>
-        <p:nvSpPr>
-          <p:cNvPr id="14" name="Shape 12"/>
+            <a:endParaRPr lang="en-US" sz="1550" dirty="0"/>
+          </a:p>
+        </p:txBody>
+      </p:sp>
+      <p:sp>
+        <p:nvSpPr>
+          <p:cNvPr id="15" name="Shape 13"/>
           <p:cNvSpPr/>
           <p:nvPr/>
         </p:nvSpPr>
@@ -4116,14 +4233,14 @@
       </p:sp>
       <p:sp>
         <p:nvSpPr>
-          <p:cNvPr id="15" name="Text 13"/>
+          <p:cNvPr id="16" name="Text 14"/>
           <p:cNvSpPr/>
           <p:nvPr/>
         </p:nvSpPr>
         <p:spPr>
           <a:xfrm>
             <a:off x="8074152" y="3666744"/>
-            <a:ext cx="2825496" cy="201168"/>
+            <a:ext cx="2825496" cy="256032"/>
           </a:xfrm>
           <a:prstGeom prst="rect">
             <a:avLst/>
@@ -4139,7 +4256,7 @@
               <a:buNone/>
             </a:pPr>
             <a:r>
-              <a:rPr lang="en-US" sz="950" b="1" dirty="0">
+              <a:rPr lang="en-US" sz="1300" b="1" dirty="0">
                 <a:solidFill>
                   <a:srgbClr val="0068B7"/>
                 </a:solidFill>
@@ -4149,20 +4266,20 @@
               </a:rPr>
               <a:t>Use this for</a:t>
             </a:r>
-            <a:endParaRPr lang="en-US" sz="950" dirty="0"/>
-          </a:p>
-        </p:txBody>
-      </p:sp>
-      <p:sp>
-        <p:nvSpPr>
-          <p:cNvPr id="16" name="Text 14"/>
-          <p:cNvSpPr/>
-          <p:nvPr/>
-        </p:nvSpPr>
-        <p:spPr>
-          <a:xfrm>
-            <a:off x="8074152" y="3959352"/>
-            <a:ext cx="2825496" cy="1170432"/>
+            <a:endParaRPr lang="en-US" sz="1300" dirty="0"/>
+          </a:p>
+        </p:txBody>
+      </p:sp>
+      <p:sp>
+        <p:nvSpPr>
+          <p:cNvPr id="17" name="Text 15"/>
+          <p:cNvSpPr/>
+          <p:nvPr/>
+        </p:nvSpPr>
+        <p:spPr>
+          <a:xfrm>
+            <a:off x="8074152" y="4023360"/>
+            <a:ext cx="2825496" cy="1097280"/>
           </a:xfrm>
           <a:prstGeom prst="rect">
             <a:avLst/>
@@ -4180,7 +4297,7 @@
               <a:buNone/>
             </a:pPr>
             <a:r>
-              <a:rPr lang="en-US" sz="1250" dirty="0">
+              <a:rPr lang="en-US" sz="1550" dirty="0">
                 <a:solidFill>
                   <a:srgbClr val="17364A"/>
                 </a:solidFill>
@@ -4190,7 +4307,7 @@
               </a:rPr>
               <a:t>Connect the concept to public health decisions, safeguards, documentation, or implementation work.</a:t>
             </a:r>
-            <a:endParaRPr lang="en-US" sz="1250" dirty="0"/>
+            <a:endParaRPr lang="en-US" sz="1550" dirty="0"/>
           </a:p>
         </p:txBody>
       </p:sp>
@@ -4387,7 +4504,7 @@
                 <a:ea typeface="Aptos" pitchFamily="34" charset="-122"/>
                 <a:cs typeface="Aptos" pitchFamily="34" charset="-120"/>
               </a:rPr>
-              <a:t>© Paula Soper</a:t>
+              <a:t>Â© Paula Soper</a:t>
             </a:r>
             <a:endParaRPr lang="en-US" sz="800" dirty="0"/>
           </a:p>
@@ -4401,8 +4518,47 @@
         </p:nvSpPr>
         <p:spPr>
           <a:xfrm>
+            <a:off x="11137392" y="6510528"/>
+            <a:ext cx="411480" cy="201168"/>
+          </a:xfrm>
+          <a:prstGeom prst="rect">
+            <a:avLst/>
+          </a:prstGeom>
+          <a:noFill/>
+          <a:ln/>
+        </p:spPr>
+        <p:txBody>
+          <a:bodyPr wrap="square" lIns="0" tIns="0" rIns="0" bIns="0" rtlCol="0" anchor="ctr"/>
+          <a:lstStyle/>
+          <a:p>
+            <a:pPr algn="r" indent="0" marL="0">
+              <a:buNone/>
+            </a:pPr>
+            <a:r>
+              <a:rPr lang="en-US" sz="900" dirty="0">
+                <a:solidFill>
+                  <a:srgbClr val="5F7181"/>
+                </a:solidFill>
+                <a:latin typeface="Aptos" pitchFamily="34" charset="0"/>
+                <a:ea typeface="Aptos" pitchFamily="34" charset="-122"/>
+                <a:cs typeface="Aptos" pitchFamily="34" charset="-120"/>
+              </a:rPr>
+              <a:t>12</a:t>
+            </a:r>
+            <a:endParaRPr lang="en-US" sz="900" dirty="0"/>
+          </a:p>
+        </p:txBody>
+      </p:sp>
+      <p:sp>
+        <p:nvSpPr>
+          <p:cNvPr id="8" name="Text 6"/>
+          <p:cNvSpPr/>
+          <p:nvPr/>
+        </p:nvSpPr>
+        <p:spPr>
+          <a:xfrm>
             <a:off x="640080" y="658368"/>
-            <a:ext cx="10881360" cy="566928"/>
+            <a:ext cx="10881360" cy="713232"/>
           </a:xfrm>
           <a:prstGeom prst="rect">
             <a:avLst/>
@@ -4420,7 +4576,7 @@
               <a:buNone/>
             </a:pPr>
             <a:r>
-              <a:rPr lang="en-US" sz="2700" b="1" dirty="0">
+              <a:rPr lang="en-US" sz="3400" b="1" dirty="0">
                 <a:solidFill>
                   <a:srgbClr val="003A63"/>
                 </a:solidFill>
@@ -4430,20 +4586,20 @@
               </a:rPr>
               <a:t>Risks, Failure Modes, and Guardrails Continued</a:t>
             </a:r>
-            <a:endParaRPr lang="en-US" sz="2700" dirty="0"/>
-          </a:p>
-        </p:txBody>
-      </p:sp>
-      <p:sp>
-        <p:nvSpPr>
-          <p:cNvPr id="8" name="Text 6"/>
-          <p:cNvSpPr/>
-          <p:nvPr/>
-        </p:nvSpPr>
-        <p:spPr>
-          <a:xfrm>
-            <a:off x="868680" y="1417320"/>
-            <a:ext cx="6675120" cy="4434840"/>
+            <a:endParaRPr lang="en-US" sz="3400" dirty="0"/>
+          </a:p>
+        </p:txBody>
+      </p:sp>
+      <p:sp>
+        <p:nvSpPr>
+          <p:cNvPr id="9" name="Text 7"/>
+          <p:cNvSpPr/>
+          <p:nvPr/>
+        </p:nvSpPr>
+        <p:spPr>
+          <a:xfrm>
+            <a:off x="868680" y="1508760"/>
+            <a:ext cx="6537960" cy="4160520"/>
           </a:xfrm>
           <a:prstGeom prst="rect">
             <a:avLst/>
@@ -4458,7 +4614,7 @@
           <a:lstStyle/>
           <a:p>
             <a:r>
-              <a:rPr lang="en-US" sz="1700" dirty="0">
+              <a:rPr lang="en-US" sz="2100" dirty="0">
                 <a:solidFill>
                   <a:srgbClr val="17364A"/>
                 </a:solidFill>
@@ -4468,11 +4624,11 @@
               </a:rPr>
               <a:t>Use cases moving forward without ownership, validation, or monitoring plans.</a:t>
             </a:r>
-            <a:endParaRPr lang="en-US" sz="1700" dirty="0"/>
-          </a:p>
-          <a:p>
-            <a:r>
-              <a:rPr lang="en-US" sz="1700" dirty="0">
+            <a:endParaRPr lang="en-US" sz="2100" dirty="0"/>
+          </a:p>
+          <a:p>
+            <a:r>
+              <a:rPr lang="en-US" sz="2100" dirty="0">
                 <a:solidFill>
                   <a:srgbClr val="17364A"/>
                 </a:solidFill>
@@ -4482,11 +4638,11 @@
               </a:rPr>
               <a:t>High-risk public-facing or decision-support uses being treated as low-risk productivity tools.</a:t>
             </a:r>
-            <a:endParaRPr lang="en-US" sz="1700" dirty="0"/>
-          </a:p>
-          <a:p>
-            <a:r>
-              <a:rPr lang="en-US" sz="1700" dirty="0">
+            <a:endParaRPr lang="en-US" sz="2100" dirty="0"/>
+          </a:p>
+          <a:p>
+            <a:r>
+              <a:rPr lang="en-US" sz="2100" dirty="0">
                 <a:solidFill>
                   <a:srgbClr val="17364A"/>
                 </a:solidFill>
@@ -4496,13 +4652,13 @@
               </a:rPr>
               <a:t>Equity, accessibility, and community impacts being considered too late.</a:t>
             </a:r>
-            <a:endParaRPr lang="en-US" sz="1700" dirty="0"/>
-          </a:p>
-        </p:txBody>
-      </p:sp>
-      <p:sp>
-        <p:nvSpPr>
-          <p:cNvPr id="9" name="Shape 7"/>
+            <a:endParaRPr lang="en-US" sz="2100" dirty="0"/>
+          </a:p>
+        </p:txBody>
+      </p:sp>
+      <p:sp>
+        <p:nvSpPr>
+          <p:cNvPr id="10" name="Shape 8"/>
           <p:cNvSpPr/>
           <p:nvPr/>
         </p:nvSpPr>
@@ -4529,14 +4685,14 @@
       </p:sp>
       <p:sp>
         <p:nvSpPr>
-          <p:cNvPr id="10" name="Text 8"/>
+          <p:cNvPr id="11" name="Text 9"/>
           <p:cNvSpPr/>
           <p:nvPr/>
         </p:nvSpPr>
         <p:spPr>
           <a:xfrm>
             <a:off x="8074152" y="1563624"/>
-            <a:ext cx="2825496" cy="201168"/>
+            <a:ext cx="2825496" cy="256032"/>
           </a:xfrm>
           <a:prstGeom prst="rect">
             <a:avLst/>
@@ -4552,7 +4708,7 @@
               <a:buNone/>
             </a:pPr>
             <a:r>
-              <a:rPr lang="en-US" sz="950" b="1" dirty="0">
+              <a:rPr lang="en-US" sz="1300" b="1" dirty="0">
                 <a:solidFill>
                   <a:srgbClr val="0068B7"/>
                 </a:solidFill>
@@ -4562,20 +4718,20 @@
               </a:rPr>
               <a:t>Key idea</a:t>
             </a:r>
-            <a:endParaRPr lang="en-US" sz="950" dirty="0"/>
-          </a:p>
-        </p:txBody>
-      </p:sp>
-      <p:sp>
-        <p:nvSpPr>
-          <p:cNvPr id="11" name="Text 9"/>
-          <p:cNvSpPr/>
-          <p:nvPr/>
-        </p:nvSpPr>
-        <p:spPr>
-          <a:xfrm>
-            <a:off x="8074152" y="1856232"/>
-            <a:ext cx="2825496" cy="1261872"/>
+            <a:endParaRPr lang="en-US" sz="1300" dirty="0"/>
+          </a:p>
+        </p:txBody>
+      </p:sp>
+      <p:sp>
+        <p:nvSpPr>
+          <p:cNvPr id="12" name="Text 10"/>
+          <p:cNvSpPr/>
+          <p:nvPr/>
+        </p:nvSpPr>
+        <p:spPr>
+          <a:xfrm>
+            <a:off x="8074152" y="1920240"/>
+            <a:ext cx="2825496" cy="1188720"/>
           </a:xfrm>
           <a:prstGeom prst="rect">
             <a:avLst/>
@@ -4593,7 +4749,7 @@
               <a:buNone/>
             </a:pPr>
             <a:r>
-              <a:rPr lang="en-US" sz="1250" dirty="0">
+              <a:rPr lang="en-US" sz="1550" dirty="0">
                 <a:solidFill>
                   <a:srgbClr val="17364A"/>
                 </a:solidFill>
@@ -4603,13 +4759,13 @@
               </a:rPr>
               <a:t>Use cases moving forward without ownership, validation, or monitoring plans.</a:t>
             </a:r>
-            <a:endParaRPr lang="en-US" sz="1250" dirty="0"/>
-          </a:p>
-        </p:txBody>
-      </p:sp>
-      <p:sp>
-        <p:nvSpPr>
-          <p:cNvPr id="12" name="Shape 10"/>
+            <a:endParaRPr lang="en-US" sz="1550" dirty="0"/>
+          </a:p>
+        </p:txBody>
+      </p:sp>
+      <p:sp>
+        <p:nvSpPr>
+          <p:cNvPr id="13" name="Shape 11"/>
           <p:cNvSpPr/>
           <p:nvPr/>
         </p:nvSpPr>
@@ -4636,14 +4792,14 @@
       </p:sp>
       <p:sp>
         <p:nvSpPr>
-          <p:cNvPr id="13" name="Text 11"/>
+          <p:cNvPr id="14" name="Text 12"/>
           <p:cNvSpPr/>
           <p:nvPr/>
         </p:nvSpPr>
         <p:spPr>
           <a:xfrm>
             <a:off x="8074152" y="3666744"/>
-            <a:ext cx="2825496" cy="201168"/>
+            <a:ext cx="2825496" cy="256032"/>
           </a:xfrm>
           <a:prstGeom prst="rect">
             <a:avLst/>
@@ -4659,7 +4815,7 @@
               <a:buNone/>
             </a:pPr>
             <a:r>
-              <a:rPr lang="en-US" sz="950" b="1" dirty="0">
+              <a:rPr lang="en-US" sz="1300" b="1" dirty="0">
                 <a:solidFill>
                   <a:srgbClr val="0068B7"/>
                 </a:solidFill>
@@ -4669,20 +4825,20 @@
               </a:rPr>
               <a:t>Use this for</a:t>
             </a:r>
-            <a:endParaRPr lang="en-US" sz="950" dirty="0"/>
-          </a:p>
-        </p:txBody>
-      </p:sp>
-      <p:sp>
-        <p:nvSpPr>
-          <p:cNvPr id="14" name="Text 12"/>
-          <p:cNvSpPr/>
-          <p:nvPr/>
-        </p:nvSpPr>
-        <p:spPr>
-          <a:xfrm>
-            <a:off x="8074152" y="3959352"/>
-            <a:ext cx="2825496" cy="1170432"/>
+            <a:endParaRPr lang="en-US" sz="1300" dirty="0"/>
+          </a:p>
+        </p:txBody>
+      </p:sp>
+      <p:sp>
+        <p:nvSpPr>
+          <p:cNvPr id="15" name="Text 13"/>
+          <p:cNvSpPr/>
+          <p:nvPr/>
+        </p:nvSpPr>
+        <p:spPr>
+          <a:xfrm>
+            <a:off x="8074152" y="4023360"/>
+            <a:ext cx="2825496" cy="1097280"/>
           </a:xfrm>
           <a:prstGeom prst="rect">
             <a:avLst/>
@@ -4700,7 +4856,7 @@
               <a:buNone/>
             </a:pPr>
             <a:r>
-              <a:rPr lang="en-US" sz="1250" dirty="0">
+              <a:rPr lang="en-US" sz="1550" dirty="0">
                 <a:solidFill>
                   <a:srgbClr val="17364A"/>
                 </a:solidFill>
@@ -4710,7 +4866,7 @@
               </a:rPr>
               <a:t>Connect the concept to public health decisions, safeguards, documentation, or implementation work.</a:t>
             </a:r>
-            <a:endParaRPr lang="en-US" sz="1250" dirty="0"/>
+            <a:endParaRPr lang="en-US" sz="1550" dirty="0"/>
           </a:p>
         </p:txBody>
       </p:sp>
@@ -4907,7 +5063,7 @@
                 <a:ea typeface="Aptos" pitchFamily="34" charset="-122"/>
                 <a:cs typeface="Aptos" pitchFamily="34" charset="-120"/>
               </a:rPr>
-              <a:t>© Paula Soper</a:t>
+              <a:t>Â© Paula Soper</a:t>
             </a:r>
             <a:endParaRPr lang="en-US" sz="800" dirty="0"/>
           </a:p>
@@ -4921,8 +5077,47 @@
         </p:nvSpPr>
         <p:spPr>
           <a:xfrm>
+            <a:off x="11137392" y="6510528"/>
+            <a:ext cx="411480" cy="201168"/>
+          </a:xfrm>
+          <a:prstGeom prst="rect">
+            <a:avLst/>
+          </a:prstGeom>
+          <a:noFill/>
+          <a:ln/>
+        </p:spPr>
+        <p:txBody>
+          <a:bodyPr wrap="square" lIns="0" tIns="0" rIns="0" bIns="0" rtlCol="0" anchor="ctr"/>
+          <a:lstStyle/>
+          <a:p>
+            <a:pPr algn="r" indent="0" marL="0">
+              <a:buNone/>
+            </a:pPr>
+            <a:r>
+              <a:rPr lang="en-US" sz="900" dirty="0">
+                <a:solidFill>
+                  <a:srgbClr val="5F7181"/>
+                </a:solidFill>
+                <a:latin typeface="Aptos" pitchFamily="34" charset="0"/>
+                <a:ea typeface="Aptos" pitchFamily="34" charset="-122"/>
+                <a:cs typeface="Aptos" pitchFamily="34" charset="-120"/>
+              </a:rPr>
+              <a:t>13</a:t>
+            </a:r>
+            <a:endParaRPr lang="en-US" sz="900" dirty="0"/>
+          </a:p>
+        </p:txBody>
+      </p:sp>
+      <p:sp>
+        <p:nvSpPr>
+          <p:cNvPr id="8" name="Text 6"/>
+          <p:cNvSpPr/>
+          <p:nvPr/>
+        </p:nvSpPr>
+        <p:spPr>
+          <a:xfrm>
             <a:off x="640080" y="658368"/>
-            <a:ext cx="10881360" cy="566928"/>
+            <a:ext cx="10881360" cy="713232"/>
           </a:xfrm>
           <a:prstGeom prst="rect">
             <a:avLst/>
@@ -4940,7 +5135,7 @@
               <a:buNone/>
             </a:pPr>
             <a:r>
-              <a:rPr lang="en-US" sz="2700" b="1" dirty="0">
+              <a:rPr lang="en-US" sz="3400" b="1" dirty="0">
                 <a:solidFill>
                   <a:srgbClr val="003A63"/>
                 </a:solidFill>
@@ -4950,20 +5145,20 @@
               </a:rPr>
               <a:t>Risks, Failure Modes, and Guardrails Continued</a:t>
             </a:r>
-            <a:endParaRPr lang="en-US" sz="2700" dirty="0"/>
-          </a:p>
-        </p:txBody>
-      </p:sp>
-      <p:sp>
-        <p:nvSpPr>
-          <p:cNvPr id="8" name="Text 6"/>
-          <p:cNvSpPr/>
-          <p:nvPr/>
-        </p:nvSpPr>
-        <p:spPr>
-          <a:xfrm>
-            <a:off x="868680" y="1417320"/>
-            <a:ext cx="6675120" cy="4434840"/>
+            <a:endParaRPr lang="en-US" sz="3400" dirty="0"/>
+          </a:p>
+        </p:txBody>
+      </p:sp>
+      <p:sp>
+        <p:nvSpPr>
+          <p:cNvPr id="9" name="Text 7"/>
+          <p:cNvSpPr/>
+          <p:nvPr/>
+        </p:nvSpPr>
+        <p:spPr>
+          <a:xfrm>
+            <a:off x="868680" y="1508760"/>
+            <a:ext cx="6537960" cy="4160520"/>
           </a:xfrm>
           <a:prstGeom prst="rect">
             <a:avLst/>
@@ -4978,7 +5173,7 @@
           <a:lstStyle/>
           <a:p>
             <a:r>
-              <a:rPr lang="en-US" sz="1700" dirty="0">
+              <a:rPr lang="en-US" sz="2100" dirty="0">
                 <a:solidFill>
                   <a:srgbClr val="17364A"/>
                 </a:solidFill>
@@ -4988,11 +5183,11 @@
               </a:rPr>
               <a:t>Recommended guardrails include the following:</a:t>
             </a:r>
-            <a:endParaRPr lang="en-US" sz="1700" dirty="0"/>
-          </a:p>
-          <a:p>
-            <a:r>
-              <a:rPr lang="en-US" sz="1700" dirty="0">
+            <a:endParaRPr lang="en-US" sz="2100" dirty="0"/>
+          </a:p>
+          <a:p>
+            <a:r>
+              <a:rPr lang="en-US" sz="2100" dirty="0">
                 <a:solidFill>
                   <a:srgbClr val="17364A"/>
                 </a:solidFill>
@@ -5002,11 +5197,11 @@
               </a:rPr>
               <a:t>Require a standard intake worksheet before piloting or procuring AI tools.</a:t>
             </a:r>
-            <a:endParaRPr lang="en-US" sz="1700" dirty="0"/>
-          </a:p>
-          <a:p>
-            <a:r>
-              <a:rPr lang="en-US" sz="1700" dirty="0">
+            <a:endParaRPr lang="en-US" sz="2100" dirty="0"/>
+          </a:p>
+          <a:p>
+            <a:r>
+              <a:rPr lang="en-US" sz="2100" dirty="0">
                 <a:solidFill>
                   <a:srgbClr val="17364A"/>
                 </a:solidFill>
@@ -5014,15 +5209,15 @@
                 <a:ea typeface="Aptos" pitchFamily="34" charset="-122"/>
                 <a:cs typeface="Aptos" pitchFamily="34" charset="-120"/>
               </a:rPr>
-              <a:t>Classify proposed uses by data sensitivity, automation level, public-facing impact, and decision consequence.</a:t>
-            </a:r>
-            <a:endParaRPr lang="en-US" sz="1700" dirty="0"/>
-          </a:p>
-        </p:txBody>
-      </p:sp>
-      <p:sp>
-        <p:nvSpPr>
-          <p:cNvPr id="9" name="Shape 7"/>
+              <a:t>Classify proposed uses by data sensitivity, automation level, public-facing impact, and decision.</a:t>
+            </a:r>
+            <a:endParaRPr lang="en-US" sz="2100" dirty="0"/>
+          </a:p>
+        </p:txBody>
+      </p:sp>
+      <p:sp>
+        <p:nvSpPr>
+          <p:cNvPr id="10" name="Shape 8"/>
           <p:cNvSpPr/>
           <p:nvPr/>
         </p:nvSpPr>
@@ -5049,14 +5244,14 @@
       </p:sp>
       <p:sp>
         <p:nvSpPr>
-          <p:cNvPr id="10" name="Text 8"/>
+          <p:cNvPr id="11" name="Text 9"/>
           <p:cNvSpPr/>
           <p:nvPr/>
         </p:nvSpPr>
         <p:spPr>
           <a:xfrm>
             <a:off x="8074152" y="1563624"/>
-            <a:ext cx="2825496" cy="201168"/>
+            <a:ext cx="2825496" cy="256032"/>
           </a:xfrm>
           <a:prstGeom prst="rect">
             <a:avLst/>
@@ -5072,7 +5267,7 @@
               <a:buNone/>
             </a:pPr>
             <a:r>
-              <a:rPr lang="en-US" sz="950" b="1" dirty="0">
+              <a:rPr lang="en-US" sz="1300" b="1" dirty="0">
                 <a:solidFill>
                   <a:srgbClr val="0068B7"/>
                 </a:solidFill>
@@ -5082,20 +5277,20 @@
               </a:rPr>
               <a:t>Key idea</a:t>
             </a:r>
-            <a:endParaRPr lang="en-US" sz="950" dirty="0"/>
-          </a:p>
-        </p:txBody>
-      </p:sp>
-      <p:sp>
-        <p:nvSpPr>
-          <p:cNvPr id="11" name="Text 9"/>
-          <p:cNvSpPr/>
-          <p:nvPr/>
-        </p:nvSpPr>
-        <p:spPr>
-          <a:xfrm>
-            <a:off x="8074152" y="1856232"/>
-            <a:ext cx="2825496" cy="1261872"/>
+            <a:endParaRPr lang="en-US" sz="1300" dirty="0"/>
+          </a:p>
+        </p:txBody>
+      </p:sp>
+      <p:sp>
+        <p:nvSpPr>
+          <p:cNvPr id="12" name="Text 10"/>
+          <p:cNvSpPr/>
+          <p:nvPr/>
+        </p:nvSpPr>
+        <p:spPr>
+          <a:xfrm>
+            <a:off x="8074152" y="1920240"/>
+            <a:ext cx="2825496" cy="1188720"/>
           </a:xfrm>
           <a:prstGeom prst="rect">
             <a:avLst/>
@@ -5113,7 +5308,7 @@
               <a:buNone/>
             </a:pPr>
             <a:r>
-              <a:rPr lang="en-US" sz="1250" dirty="0">
+              <a:rPr lang="en-US" sz="1550" dirty="0">
                 <a:solidFill>
                   <a:srgbClr val="17364A"/>
                 </a:solidFill>
@@ -5123,13 +5318,13 @@
               </a:rPr>
               <a:t>Recommended guardrails include the following:</a:t>
             </a:r>
-            <a:endParaRPr lang="en-US" sz="1250" dirty="0"/>
-          </a:p>
-        </p:txBody>
-      </p:sp>
-      <p:sp>
-        <p:nvSpPr>
-          <p:cNvPr id="12" name="Shape 10"/>
+            <a:endParaRPr lang="en-US" sz="1550" dirty="0"/>
+          </a:p>
+        </p:txBody>
+      </p:sp>
+      <p:sp>
+        <p:nvSpPr>
+          <p:cNvPr id="13" name="Shape 11"/>
           <p:cNvSpPr/>
           <p:nvPr/>
         </p:nvSpPr>
@@ -5156,14 +5351,14 @@
       </p:sp>
       <p:sp>
         <p:nvSpPr>
-          <p:cNvPr id="13" name="Text 11"/>
+          <p:cNvPr id="14" name="Text 12"/>
           <p:cNvSpPr/>
           <p:nvPr/>
         </p:nvSpPr>
         <p:spPr>
           <a:xfrm>
             <a:off x="8074152" y="3666744"/>
-            <a:ext cx="2825496" cy="201168"/>
+            <a:ext cx="2825496" cy="256032"/>
           </a:xfrm>
           <a:prstGeom prst="rect">
             <a:avLst/>
@@ -5179,7 +5374,7 @@
               <a:buNone/>
             </a:pPr>
             <a:r>
-              <a:rPr lang="en-US" sz="950" b="1" dirty="0">
+              <a:rPr lang="en-US" sz="1300" b="1" dirty="0">
                 <a:solidFill>
                   <a:srgbClr val="0068B7"/>
                 </a:solidFill>
@@ -5189,20 +5384,20 @@
               </a:rPr>
               <a:t>Use this for</a:t>
             </a:r>
-            <a:endParaRPr lang="en-US" sz="950" dirty="0"/>
-          </a:p>
-        </p:txBody>
-      </p:sp>
-      <p:sp>
-        <p:nvSpPr>
-          <p:cNvPr id="14" name="Text 12"/>
-          <p:cNvSpPr/>
-          <p:nvPr/>
-        </p:nvSpPr>
-        <p:spPr>
-          <a:xfrm>
-            <a:off x="8074152" y="3959352"/>
-            <a:ext cx="2825496" cy="1170432"/>
+            <a:endParaRPr lang="en-US" sz="1300" dirty="0"/>
+          </a:p>
+        </p:txBody>
+      </p:sp>
+      <p:sp>
+        <p:nvSpPr>
+          <p:cNvPr id="15" name="Text 13"/>
+          <p:cNvSpPr/>
+          <p:nvPr/>
+        </p:nvSpPr>
+        <p:spPr>
+          <a:xfrm>
+            <a:off x="8074152" y="4023360"/>
+            <a:ext cx="2825496" cy="1097280"/>
           </a:xfrm>
           <a:prstGeom prst="rect">
             <a:avLst/>
@@ -5220,7 +5415,7 @@
               <a:buNone/>
             </a:pPr>
             <a:r>
-              <a:rPr lang="en-US" sz="1250" dirty="0">
+              <a:rPr lang="en-US" sz="1550" dirty="0">
                 <a:solidFill>
                   <a:srgbClr val="17364A"/>
                 </a:solidFill>
@@ -5230,7 +5425,7 @@
               </a:rPr>
               <a:t>Connect the concept to public health decisions, safeguards, documentation, or implementation work.</a:t>
             </a:r>
-            <a:endParaRPr lang="en-US" sz="1250" dirty="0"/>
+            <a:endParaRPr lang="en-US" sz="1550" dirty="0"/>
           </a:p>
         </p:txBody>
       </p:sp>
@@ -5427,7 +5622,7 @@
                 <a:ea typeface="Aptos" pitchFamily="34" charset="-122"/>
                 <a:cs typeface="Aptos" pitchFamily="34" charset="-120"/>
               </a:rPr>
-              <a:t>© Paula Soper</a:t>
+              <a:t>Â© Paula Soper</a:t>
             </a:r>
             <a:endParaRPr lang="en-US" sz="800" dirty="0"/>
           </a:p>
@@ -5441,8 +5636,47 @@
         </p:nvSpPr>
         <p:spPr>
           <a:xfrm>
+            <a:off x="11137392" y="6510528"/>
+            <a:ext cx="411480" cy="201168"/>
+          </a:xfrm>
+          <a:prstGeom prst="rect">
+            <a:avLst/>
+          </a:prstGeom>
+          <a:noFill/>
+          <a:ln/>
+        </p:spPr>
+        <p:txBody>
+          <a:bodyPr wrap="square" lIns="0" tIns="0" rIns="0" bIns="0" rtlCol="0" anchor="ctr"/>
+          <a:lstStyle/>
+          <a:p>
+            <a:pPr algn="r" indent="0" marL="0">
+              <a:buNone/>
+            </a:pPr>
+            <a:r>
+              <a:rPr lang="en-US" sz="900" dirty="0">
+                <a:solidFill>
+                  <a:srgbClr val="5F7181"/>
+                </a:solidFill>
+                <a:latin typeface="Aptos" pitchFamily="34" charset="0"/>
+                <a:ea typeface="Aptos" pitchFamily="34" charset="-122"/>
+                <a:cs typeface="Aptos" pitchFamily="34" charset="-120"/>
+              </a:rPr>
+              <a:t>14</a:t>
+            </a:r>
+            <a:endParaRPr lang="en-US" sz="900" dirty="0"/>
+          </a:p>
+        </p:txBody>
+      </p:sp>
+      <p:sp>
+        <p:nvSpPr>
+          <p:cNvPr id="8" name="Text 6"/>
+          <p:cNvSpPr/>
+          <p:nvPr/>
+        </p:nvSpPr>
+        <p:spPr>
+          <a:xfrm>
             <a:off x="640080" y="658368"/>
-            <a:ext cx="10881360" cy="566928"/>
+            <a:ext cx="10881360" cy="713232"/>
           </a:xfrm>
           <a:prstGeom prst="rect">
             <a:avLst/>
@@ -5460,7 +5694,7 @@
               <a:buNone/>
             </a:pPr>
             <a:r>
-              <a:rPr lang="en-US" sz="2700" b="1" dirty="0">
+              <a:rPr lang="en-US" sz="3400" b="1" dirty="0">
                 <a:solidFill>
                   <a:srgbClr val="003A63"/>
                 </a:solidFill>
@@ -5470,20 +5704,20 @@
               </a:rPr>
               <a:t>Risks, Failure Modes, and Guardrails Continued</a:t>
             </a:r>
-            <a:endParaRPr lang="en-US" sz="2700" dirty="0"/>
-          </a:p>
-        </p:txBody>
-      </p:sp>
-      <p:sp>
-        <p:nvSpPr>
-          <p:cNvPr id="8" name="Text 6"/>
-          <p:cNvSpPr/>
-          <p:nvPr/>
-        </p:nvSpPr>
-        <p:spPr>
-          <a:xfrm>
-            <a:off x="868680" y="1417320"/>
-            <a:ext cx="6675120" cy="4434840"/>
+            <a:endParaRPr lang="en-US" sz="3400" dirty="0"/>
+          </a:p>
+        </p:txBody>
+      </p:sp>
+      <p:sp>
+        <p:nvSpPr>
+          <p:cNvPr id="9" name="Text 7"/>
+          <p:cNvSpPr/>
+          <p:nvPr/>
+        </p:nvSpPr>
+        <p:spPr>
+          <a:xfrm>
+            <a:off x="868680" y="1508760"/>
+            <a:ext cx="6537960" cy="4160520"/>
           </a:xfrm>
           <a:prstGeom prst="rect">
             <a:avLst/>
@@ -5498,7 +5732,7 @@
           <a:lstStyle/>
           <a:p>
             <a:r>
-              <a:rPr lang="en-US" sz="1700" dirty="0">
+              <a:rPr lang="en-US" sz="2100" dirty="0">
                 <a:solidFill>
                   <a:srgbClr val="17364A"/>
                 </a:solidFill>
@@ -5508,11 +5742,11 @@
               </a:rPr>
               <a:t>Route use cases to required reviewers before implementation begins.</a:t>
             </a:r>
-            <a:endParaRPr lang="en-US" sz="1700" dirty="0"/>
-          </a:p>
-          <a:p>
-            <a:r>
-              <a:rPr lang="en-US" sz="1700" dirty="0">
+            <a:endParaRPr lang="en-US" sz="2100" dirty="0"/>
+          </a:p>
+          <a:p>
+            <a:r>
+              <a:rPr lang="en-US" sz="2100" dirty="0">
                 <a:solidFill>
                   <a:srgbClr val="17364A"/>
                 </a:solidFill>
@@ -5522,11 +5756,11 @@
               </a:rPr>
               <a:t>Document use cases that are rejected, deferred, or approved with conditions.</a:t>
             </a:r>
-            <a:endParaRPr lang="en-US" sz="1700" dirty="0"/>
-          </a:p>
-          <a:p>
-            <a:r>
-              <a:rPr lang="en-US" sz="1700" dirty="0">
+            <a:endParaRPr lang="en-US" sz="2100" dirty="0"/>
+          </a:p>
+          <a:p>
+            <a:r>
+              <a:rPr lang="en-US" sz="2100" dirty="0">
                 <a:solidFill>
                   <a:srgbClr val="17364A"/>
                 </a:solidFill>
@@ -5536,13 +5770,13 @@
               </a:rPr>
               <a:t>Maintain a portfolio view of approved, active, paused, and retired AI uses.</a:t>
             </a:r>
-            <a:endParaRPr lang="en-US" sz="1700" dirty="0"/>
-          </a:p>
-        </p:txBody>
-      </p:sp>
-      <p:sp>
-        <p:nvSpPr>
-          <p:cNvPr id="9" name="Shape 7"/>
+            <a:endParaRPr lang="en-US" sz="2100" dirty="0"/>
+          </a:p>
+        </p:txBody>
+      </p:sp>
+      <p:sp>
+        <p:nvSpPr>
+          <p:cNvPr id="10" name="Shape 8"/>
           <p:cNvSpPr/>
           <p:nvPr/>
         </p:nvSpPr>
@@ -5569,14 +5803,14 @@
       </p:sp>
       <p:sp>
         <p:nvSpPr>
-          <p:cNvPr id="10" name="Text 8"/>
+          <p:cNvPr id="11" name="Text 9"/>
           <p:cNvSpPr/>
           <p:nvPr/>
         </p:nvSpPr>
         <p:spPr>
           <a:xfrm>
             <a:off x="8074152" y="1563624"/>
-            <a:ext cx="2825496" cy="201168"/>
+            <a:ext cx="2825496" cy="256032"/>
           </a:xfrm>
           <a:prstGeom prst="rect">
             <a:avLst/>
@@ -5592,7 +5826,7 @@
               <a:buNone/>
             </a:pPr>
             <a:r>
-              <a:rPr lang="en-US" sz="950" b="1" dirty="0">
+              <a:rPr lang="en-US" sz="1300" b="1" dirty="0">
                 <a:solidFill>
                   <a:srgbClr val="0068B7"/>
                 </a:solidFill>
@@ -5602,20 +5836,20 @@
               </a:rPr>
               <a:t>Key idea</a:t>
             </a:r>
-            <a:endParaRPr lang="en-US" sz="950" dirty="0"/>
-          </a:p>
-        </p:txBody>
-      </p:sp>
-      <p:sp>
-        <p:nvSpPr>
-          <p:cNvPr id="11" name="Text 9"/>
-          <p:cNvSpPr/>
-          <p:nvPr/>
-        </p:nvSpPr>
-        <p:spPr>
-          <a:xfrm>
-            <a:off x="8074152" y="1856232"/>
-            <a:ext cx="2825496" cy="1261872"/>
+            <a:endParaRPr lang="en-US" sz="1300" dirty="0"/>
+          </a:p>
+        </p:txBody>
+      </p:sp>
+      <p:sp>
+        <p:nvSpPr>
+          <p:cNvPr id="12" name="Text 10"/>
+          <p:cNvSpPr/>
+          <p:nvPr/>
+        </p:nvSpPr>
+        <p:spPr>
+          <a:xfrm>
+            <a:off x="8074152" y="1920240"/>
+            <a:ext cx="2825496" cy="1188720"/>
           </a:xfrm>
           <a:prstGeom prst="rect">
             <a:avLst/>
@@ -5633,7 +5867,7 @@
               <a:buNone/>
             </a:pPr>
             <a:r>
-              <a:rPr lang="en-US" sz="1250" dirty="0">
+              <a:rPr lang="en-US" sz="1550" dirty="0">
                 <a:solidFill>
                   <a:srgbClr val="17364A"/>
                 </a:solidFill>
@@ -5643,13 +5877,13 @@
               </a:rPr>
               <a:t>Route use cases to required reviewers before implementation begins.</a:t>
             </a:r>
-            <a:endParaRPr lang="en-US" sz="1250" dirty="0"/>
-          </a:p>
-        </p:txBody>
-      </p:sp>
-      <p:sp>
-        <p:nvSpPr>
-          <p:cNvPr id="12" name="Shape 10"/>
+            <a:endParaRPr lang="en-US" sz="1550" dirty="0"/>
+          </a:p>
+        </p:txBody>
+      </p:sp>
+      <p:sp>
+        <p:nvSpPr>
+          <p:cNvPr id="13" name="Shape 11"/>
           <p:cNvSpPr/>
           <p:nvPr/>
         </p:nvSpPr>
@@ -5676,14 +5910,14 @@
       </p:sp>
       <p:sp>
         <p:nvSpPr>
-          <p:cNvPr id="13" name="Text 11"/>
+          <p:cNvPr id="14" name="Text 12"/>
           <p:cNvSpPr/>
           <p:nvPr/>
         </p:nvSpPr>
         <p:spPr>
           <a:xfrm>
             <a:off x="8074152" y="3666744"/>
-            <a:ext cx="2825496" cy="201168"/>
+            <a:ext cx="2825496" cy="256032"/>
           </a:xfrm>
           <a:prstGeom prst="rect">
             <a:avLst/>
@@ -5699,7 +5933,7 @@
               <a:buNone/>
             </a:pPr>
             <a:r>
-              <a:rPr lang="en-US" sz="950" b="1" dirty="0">
+              <a:rPr lang="en-US" sz="1300" b="1" dirty="0">
                 <a:solidFill>
                   <a:srgbClr val="0068B7"/>
                 </a:solidFill>
@@ -5709,20 +5943,20 @@
               </a:rPr>
               <a:t>Use this for</a:t>
             </a:r>
-            <a:endParaRPr lang="en-US" sz="950" dirty="0"/>
-          </a:p>
-        </p:txBody>
-      </p:sp>
-      <p:sp>
-        <p:nvSpPr>
-          <p:cNvPr id="14" name="Text 12"/>
-          <p:cNvSpPr/>
-          <p:nvPr/>
-        </p:nvSpPr>
-        <p:spPr>
-          <a:xfrm>
-            <a:off x="8074152" y="3959352"/>
-            <a:ext cx="2825496" cy="1170432"/>
+            <a:endParaRPr lang="en-US" sz="1300" dirty="0"/>
+          </a:p>
+        </p:txBody>
+      </p:sp>
+      <p:sp>
+        <p:nvSpPr>
+          <p:cNvPr id="15" name="Text 13"/>
+          <p:cNvSpPr/>
+          <p:nvPr/>
+        </p:nvSpPr>
+        <p:spPr>
+          <a:xfrm>
+            <a:off x="8074152" y="4023360"/>
+            <a:ext cx="2825496" cy="1097280"/>
           </a:xfrm>
           <a:prstGeom prst="rect">
             <a:avLst/>
@@ -5740,7 +5974,7 @@
               <a:buNone/>
             </a:pPr>
             <a:r>
-              <a:rPr lang="en-US" sz="1250" dirty="0">
+              <a:rPr lang="en-US" sz="1550" dirty="0">
                 <a:solidFill>
                   <a:srgbClr val="17364A"/>
                 </a:solidFill>
@@ -5750,7 +5984,7 @@
               </a:rPr>
               <a:t>Connect the concept to public health decisions, safeguards, documentation, or implementation work.</a:t>
             </a:r>
-            <a:endParaRPr lang="en-US" sz="1250" dirty="0"/>
+            <a:endParaRPr lang="en-US" sz="1550" dirty="0"/>
           </a:p>
         </p:txBody>
       </p:sp>
@@ -5947,7 +6181,7 @@
                 <a:ea typeface="Aptos" pitchFamily="34" charset="-122"/>
                 <a:cs typeface="Aptos" pitchFamily="34" charset="-120"/>
               </a:rPr>
-              <a:t>© Paula Soper</a:t>
+              <a:t>Â© Paula Soper</a:t>
             </a:r>
             <a:endParaRPr lang="en-US" sz="800" dirty="0"/>
           </a:p>
@@ -5955,7 +6189,46 @@
       </p:sp>
       <p:sp>
         <p:nvSpPr>
-          <p:cNvPr id="7" name="Shape 5"/>
+          <p:cNvPr id="7" name="Text 5"/>
+          <p:cNvSpPr/>
+          <p:nvPr/>
+        </p:nvSpPr>
+        <p:spPr>
+          <a:xfrm>
+            <a:off x="11137392" y="6510528"/>
+            <a:ext cx="411480" cy="201168"/>
+          </a:xfrm>
+          <a:prstGeom prst="rect">
+            <a:avLst/>
+          </a:prstGeom>
+          <a:noFill/>
+          <a:ln/>
+        </p:spPr>
+        <p:txBody>
+          <a:bodyPr wrap="square" lIns="0" tIns="0" rIns="0" bIns="0" rtlCol="0" anchor="ctr"/>
+          <a:lstStyle/>
+          <a:p>
+            <a:pPr algn="r" indent="0" marL="0">
+              <a:buNone/>
+            </a:pPr>
+            <a:r>
+              <a:rPr lang="en-US" sz="900" dirty="0">
+                <a:solidFill>
+                  <a:srgbClr val="5F7181"/>
+                </a:solidFill>
+                <a:latin typeface="Aptos" pitchFamily="34" charset="0"/>
+                <a:ea typeface="Aptos" pitchFamily="34" charset="-122"/>
+                <a:cs typeface="Aptos" pitchFamily="34" charset="-120"/>
+              </a:rPr>
+              <a:t>15</a:t>
+            </a:r>
+            <a:endParaRPr lang="en-US" sz="900" dirty="0"/>
+          </a:p>
+        </p:txBody>
+      </p:sp>
+      <p:sp>
+        <p:nvSpPr>
+          <p:cNvPr id="8" name="Shape 6"/>
           <p:cNvSpPr/>
           <p:nvPr/>
         </p:nvSpPr>
@@ -5980,7 +6253,7 @@
       </p:sp>
       <p:sp>
         <p:nvSpPr>
-          <p:cNvPr id="8" name="Text 6"/>
+          <p:cNvPr id="9" name="Text 7"/>
           <p:cNvSpPr/>
           <p:nvPr/>
         </p:nvSpPr>
@@ -6019,14 +6292,14 @@
       </p:sp>
       <p:sp>
         <p:nvSpPr>
-          <p:cNvPr id="9" name="Text 7"/>
+          <p:cNvPr id="10" name="Text 8"/>
           <p:cNvSpPr/>
           <p:nvPr/>
         </p:nvSpPr>
         <p:spPr>
           <a:xfrm>
             <a:off x="640080" y="621792"/>
-            <a:ext cx="10881360" cy="566928"/>
+            <a:ext cx="10881360" cy="713232"/>
           </a:xfrm>
           <a:prstGeom prst="rect">
             <a:avLst/>
@@ -6044,7 +6317,7 @@
               <a:buNone/>
             </a:pPr>
             <a:r>
-              <a:rPr lang="en-US" sz="2700" b="1" dirty="0">
+              <a:rPr lang="en-US" sz="3400" b="1" dirty="0">
                 <a:solidFill>
                   <a:srgbClr val="003A63"/>
                 </a:solidFill>
@@ -6054,20 +6327,20 @@
               </a:rPr>
               <a:t>Reflection Questions</a:t>
             </a:r>
-            <a:endParaRPr lang="en-US" sz="2700" dirty="0"/>
-          </a:p>
-        </p:txBody>
-      </p:sp>
-      <p:sp>
-        <p:nvSpPr>
-          <p:cNvPr id="10" name="Text 8"/>
-          <p:cNvSpPr/>
-          <p:nvPr/>
-        </p:nvSpPr>
-        <p:spPr>
-          <a:xfrm>
-            <a:off x="868680" y="1417320"/>
-            <a:ext cx="6675120" cy="4434840"/>
+            <a:endParaRPr lang="en-US" sz="3400" dirty="0"/>
+          </a:p>
+        </p:txBody>
+      </p:sp>
+      <p:sp>
+        <p:nvSpPr>
+          <p:cNvPr id="11" name="Text 9"/>
+          <p:cNvSpPr/>
+          <p:nvPr/>
+        </p:nvSpPr>
+        <p:spPr>
+          <a:xfrm>
+            <a:off x="868680" y="1508760"/>
+            <a:ext cx="6537960" cy="4160520"/>
           </a:xfrm>
           <a:prstGeom prst="rect">
             <a:avLst/>
@@ -6082,7 +6355,7 @@
           <a:lstStyle/>
           <a:p>
             <a:r>
-              <a:rPr lang="en-US" sz="1700" dirty="0">
+              <a:rPr lang="en-US" sz="2100" dirty="0">
                 <a:solidFill>
                   <a:srgbClr val="17364A"/>
                 </a:solidFill>
@@ -6092,11 +6365,11 @@
               </a:rPr>
               <a:t>Where does this topic appear in your agency, program, or workflow?</a:t>
             </a:r>
-            <a:endParaRPr lang="en-US" sz="1700" dirty="0"/>
-          </a:p>
-          <a:p>
-            <a:r>
-              <a:rPr lang="en-US" sz="1700" dirty="0">
+            <a:endParaRPr lang="en-US" sz="2100" dirty="0"/>
+          </a:p>
+          <a:p>
+            <a:r>
+              <a:rPr lang="en-US" sz="2100" dirty="0">
                 <a:solidFill>
                   <a:srgbClr val="17364A"/>
                 </a:solidFill>
@@ -6106,11 +6379,11 @@
               </a:rPr>
               <a:t>Which staff roles would need to understand or apply this concept before AI use is approved?</a:t>
             </a:r>
-            <a:endParaRPr lang="en-US" sz="1700" dirty="0"/>
-          </a:p>
-          <a:p>
-            <a:r>
-              <a:rPr lang="en-US" sz="1700" dirty="0">
+            <a:endParaRPr lang="en-US" sz="2100" dirty="0"/>
+          </a:p>
+          <a:p>
+            <a:r>
+              <a:rPr lang="en-US" sz="2100" dirty="0">
                 <a:solidFill>
                   <a:srgbClr val="17364A"/>
                 </a:solidFill>
@@ -6120,13 +6393,13 @@
               </a:rPr>
               <a:t>What could go wrong if this topic is not addressed before implementation?</a:t>
             </a:r>
-            <a:endParaRPr lang="en-US" sz="1700" dirty="0"/>
-          </a:p>
-        </p:txBody>
-      </p:sp>
-      <p:sp>
-        <p:nvSpPr>
-          <p:cNvPr id="11" name="Shape 9"/>
+            <a:endParaRPr lang="en-US" sz="2100" dirty="0"/>
+          </a:p>
+        </p:txBody>
+      </p:sp>
+      <p:sp>
+        <p:nvSpPr>
+          <p:cNvPr id="12" name="Shape 10"/>
           <p:cNvSpPr/>
           <p:nvPr/>
         </p:nvSpPr>
@@ -6153,14 +6426,14 @@
       </p:sp>
       <p:sp>
         <p:nvSpPr>
-          <p:cNvPr id="12" name="Text 10"/>
+          <p:cNvPr id="13" name="Text 11"/>
           <p:cNvSpPr/>
           <p:nvPr/>
         </p:nvSpPr>
         <p:spPr>
           <a:xfrm>
             <a:off x="8074152" y="1563624"/>
-            <a:ext cx="2825496" cy="201168"/>
+            <a:ext cx="2825496" cy="256032"/>
           </a:xfrm>
           <a:prstGeom prst="rect">
             <a:avLst/>
@@ -6176,7 +6449,7 @@
               <a:buNone/>
             </a:pPr>
             <a:r>
-              <a:rPr lang="en-US" sz="950" b="1" dirty="0">
+              <a:rPr lang="en-US" sz="1300" b="1" dirty="0">
                 <a:solidFill>
                   <a:srgbClr val="0068B7"/>
                 </a:solidFill>
@@ -6186,20 +6459,20 @@
               </a:rPr>
               <a:t>Key idea</a:t>
             </a:r>
-            <a:endParaRPr lang="en-US" sz="950" dirty="0"/>
-          </a:p>
-        </p:txBody>
-      </p:sp>
-      <p:sp>
-        <p:nvSpPr>
-          <p:cNvPr id="13" name="Text 11"/>
-          <p:cNvSpPr/>
-          <p:nvPr/>
-        </p:nvSpPr>
-        <p:spPr>
-          <a:xfrm>
-            <a:off x="8074152" y="1856232"/>
-            <a:ext cx="2825496" cy="1261872"/>
+            <a:endParaRPr lang="en-US" sz="1300" dirty="0"/>
+          </a:p>
+        </p:txBody>
+      </p:sp>
+      <p:sp>
+        <p:nvSpPr>
+          <p:cNvPr id="14" name="Text 12"/>
+          <p:cNvSpPr/>
+          <p:nvPr/>
+        </p:nvSpPr>
+        <p:spPr>
+          <a:xfrm>
+            <a:off x="8074152" y="1920240"/>
+            <a:ext cx="2825496" cy="1188720"/>
           </a:xfrm>
           <a:prstGeom prst="rect">
             <a:avLst/>
@@ -6217,7 +6490,7 @@
               <a:buNone/>
             </a:pPr>
             <a:r>
-              <a:rPr lang="en-US" sz="1250" dirty="0">
+              <a:rPr lang="en-US" sz="1550" dirty="0">
                 <a:solidFill>
                   <a:srgbClr val="17364A"/>
                 </a:solidFill>
@@ -6227,13 +6500,13 @@
               </a:rPr>
               <a:t>Where does this topic appear in your agency, program, or workflow?</a:t>
             </a:r>
-            <a:endParaRPr lang="en-US" sz="1250" dirty="0"/>
-          </a:p>
-        </p:txBody>
-      </p:sp>
-      <p:sp>
-        <p:nvSpPr>
-          <p:cNvPr id="14" name="Shape 12"/>
+            <a:endParaRPr lang="en-US" sz="1550" dirty="0"/>
+          </a:p>
+        </p:txBody>
+      </p:sp>
+      <p:sp>
+        <p:nvSpPr>
+          <p:cNvPr id="15" name="Shape 13"/>
           <p:cNvSpPr/>
           <p:nvPr/>
         </p:nvSpPr>
@@ -6260,14 +6533,14 @@
       </p:sp>
       <p:sp>
         <p:nvSpPr>
-          <p:cNvPr id="15" name="Text 13"/>
+          <p:cNvPr id="16" name="Text 14"/>
           <p:cNvSpPr/>
           <p:nvPr/>
         </p:nvSpPr>
         <p:spPr>
           <a:xfrm>
             <a:off x="8074152" y="3666744"/>
-            <a:ext cx="2825496" cy="201168"/>
+            <a:ext cx="2825496" cy="256032"/>
           </a:xfrm>
           <a:prstGeom prst="rect">
             <a:avLst/>
@@ -6283,7 +6556,7 @@
               <a:buNone/>
             </a:pPr>
             <a:r>
-              <a:rPr lang="en-US" sz="950" b="1" dirty="0">
+              <a:rPr lang="en-US" sz="1300" b="1" dirty="0">
                 <a:solidFill>
                   <a:srgbClr val="0068B7"/>
                 </a:solidFill>
@@ -6293,20 +6566,20 @@
               </a:rPr>
               <a:t>Use this for</a:t>
             </a:r>
-            <a:endParaRPr lang="en-US" sz="950" dirty="0"/>
-          </a:p>
-        </p:txBody>
-      </p:sp>
-      <p:sp>
-        <p:nvSpPr>
-          <p:cNvPr id="16" name="Text 14"/>
-          <p:cNvSpPr/>
-          <p:nvPr/>
-        </p:nvSpPr>
-        <p:spPr>
-          <a:xfrm>
-            <a:off x="8074152" y="3959352"/>
-            <a:ext cx="2825496" cy="1170432"/>
+            <a:endParaRPr lang="en-US" sz="1300" dirty="0"/>
+          </a:p>
+        </p:txBody>
+      </p:sp>
+      <p:sp>
+        <p:nvSpPr>
+          <p:cNvPr id="17" name="Text 15"/>
+          <p:cNvSpPr/>
+          <p:nvPr/>
+        </p:nvSpPr>
+        <p:spPr>
+          <a:xfrm>
+            <a:off x="8074152" y="4023360"/>
+            <a:ext cx="2825496" cy="1097280"/>
           </a:xfrm>
           <a:prstGeom prst="rect">
             <a:avLst/>
@@ -6324,7 +6597,7 @@
               <a:buNone/>
             </a:pPr>
             <a:r>
-              <a:rPr lang="en-US" sz="1250" dirty="0">
+              <a:rPr lang="en-US" sz="1550" dirty="0">
                 <a:solidFill>
                   <a:srgbClr val="17364A"/>
                 </a:solidFill>
@@ -6334,7 +6607,7 @@
               </a:rPr>
               <a:t>Connect the concept to public health decisions, safeguards, documentation, or implementation work.</a:t>
             </a:r>
-            <a:endParaRPr lang="en-US" sz="1250" dirty="0"/>
+            <a:endParaRPr lang="en-US" sz="1550" dirty="0"/>
           </a:p>
         </p:txBody>
       </p:sp>
@@ -6531,7 +6804,7 @@
                 <a:ea typeface="Aptos" pitchFamily="34" charset="-122"/>
                 <a:cs typeface="Aptos" pitchFamily="34" charset="-120"/>
               </a:rPr>
-              <a:t>© Paula Soper</a:t>
+              <a:t>Â© Paula Soper</a:t>
             </a:r>
             <a:endParaRPr lang="en-US" sz="800" dirty="0"/>
           </a:p>
@@ -6545,8 +6818,47 @@
         </p:nvSpPr>
         <p:spPr>
           <a:xfrm>
+            <a:off x="11137392" y="6510528"/>
+            <a:ext cx="411480" cy="201168"/>
+          </a:xfrm>
+          <a:prstGeom prst="rect">
+            <a:avLst/>
+          </a:prstGeom>
+          <a:noFill/>
+          <a:ln/>
+        </p:spPr>
+        <p:txBody>
+          <a:bodyPr wrap="square" lIns="0" tIns="0" rIns="0" bIns="0" rtlCol="0" anchor="ctr"/>
+          <a:lstStyle/>
+          <a:p>
+            <a:pPr algn="r" indent="0" marL="0">
+              <a:buNone/>
+            </a:pPr>
+            <a:r>
+              <a:rPr lang="en-US" sz="900" dirty="0">
+                <a:solidFill>
+                  <a:srgbClr val="5F7181"/>
+                </a:solidFill>
+                <a:latin typeface="Aptos" pitchFamily="34" charset="0"/>
+                <a:ea typeface="Aptos" pitchFamily="34" charset="-122"/>
+                <a:cs typeface="Aptos" pitchFamily="34" charset="-120"/>
+              </a:rPr>
+              <a:t>16</a:t>
+            </a:r>
+            <a:endParaRPr lang="en-US" sz="900" dirty="0"/>
+          </a:p>
+        </p:txBody>
+      </p:sp>
+      <p:sp>
+        <p:nvSpPr>
+          <p:cNvPr id="8" name="Text 6"/>
+          <p:cNvSpPr/>
+          <p:nvPr/>
+        </p:nvSpPr>
+        <p:spPr>
+          <a:xfrm>
             <a:off x="640080" y="658368"/>
-            <a:ext cx="10881360" cy="566928"/>
+            <a:ext cx="10881360" cy="713232"/>
           </a:xfrm>
           <a:prstGeom prst="rect">
             <a:avLst/>
@@ -6564,7 +6876,7 @@
               <a:buNone/>
             </a:pPr>
             <a:r>
-              <a:rPr lang="en-US" sz="2700" b="1" dirty="0">
+              <a:rPr lang="en-US" sz="3400" b="1" dirty="0">
                 <a:solidFill>
                   <a:srgbClr val="003A63"/>
                 </a:solidFill>
@@ -6574,20 +6886,20 @@
               </a:rPr>
               <a:t>Reflection Questions Continued</a:t>
             </a:r>
-            <a:endParaRPr lang="en-US" sz="2700" dirty="0"/>
-          </a:p>
-        </p:txBody>
-      </p:sp>
-      <p:sp>
-        <p:nvSpPr>
-          <p:cNvPr id="8" name="Text 6"/>
-          <p:cNvSpPr/>
-          <p:nvPr/>
-        </p:nvSpPr>
-        <p:spPr>
-          <a:xfrm>
-            <a:off x="868680" y="1417320"/>
-            <a:ext cx="6675120" cy="4434840"/>
+            <a:endParaRPr lang="en-US" sz="3400" dirty="0"/>
+          </a:p>
+        </p:txBody>
+      </p:sp>
+      <p:sp>
+        <p:nvSpPr>
+          <p:cNvPr id="9" name="Text 7"/>
+          <p:cNvSpPr/>
+          <p:nvPr/>
+        </p:nvSpPr>
+        <p:spPr>
+          <a:xfrm>
+            <a:off x="868680" y="1508760"/>
+            <a:ext cx="6537960" cy="4160520"/>
           </a:xfrm>
           <a:prstGeom prst="rect">
             <a:avLst/>
@@ -6602,7 +6914,7 @@
           <a:lstStyle/>
           <a:p>
             <a:r>
-              <a:rPr lang="en-US" sz="1700" dirty="0">
+              <a:rPr lang="en-US" sz="2100" dirty="0">
                 <a:solidFill>
                   <a:srgbClr val="17364A"/>
                 </a:solidFill>
@@ -6612,11 +6924,11 @@
               </a:rPr>
               <a:t>What evidence would governance, leadership, or operations staff need before moving forward?</a:t>
             </a:r>
-            <a:endParaRPr lang="en-US" sz="1700" dirty="0"/>
-          </a:p>
-          <a:p>
-            <a:r>
-              <a:rPr lang="en-US" sz="1700" dirty="0">
+            <a:endParaRPr lang="en-US" sz="2100" dirty="0"/>
+          </a:p>
+          <a:p>
+            <a:r>
+              <a:rPr lang="en-US" sz="2100" dirty="0">
                 <a:solidFill>
                   <a:srgbClr val="17364A"/>
                 </a:solidFill>
@@ -6626,13 +6938,13 @@
               </a:rPr>
               <a:t>Which policy, data, equity, privacy, security, or workflow questions remain unresolved?</a:t>
             </a:r>
-            <a:endParaRPr lang="en-US" sz="1700" dirty="0"/>
-          </a:p>
-        </p:txBody>
-      </p:sp>
-      <p:sp>
-        <p:nvSpPr>
-          <p:cNvPr id="9" name="Shape 7"/>
+            <a:endParaRPr lang="en-US" sz="2100" dirty="0"/>
+          </a:p>
+        </p:txBody>
+      </p:sp>
+      <p:sp>
+        <p:nvSpPr>
+          <p:cNvPr id="10" name="Shape 8"/>
           <p:cNvSpPr/>
           <p:nvPr/>
         </p:nvSpPr>
@@ -6659,14 +6971,14 @@
       </p:sp>
       <p:sp>
         <p:nvSpPr>
-          <p:cNvPr id="10" name="Text 8"/>
+          <p:cNvPr id="11" name="Text 9"/>
           <p:cNvSpPr/>
           <p:nvPr/>
         </p:nvSpPr>
         <p:spPr>
           <a:xfrm>
             <a:off x="8074152" y="1563624"/>
-            <a:ext cx="2825496" cy="201168"/>
+            <a:ext cx="2825496" cy="256032"/>
           </a:xfrm>
           <a:prstGeom prst="rect">
             <a:avLst/>
@@ -6682,7 +6994,7 @@
               <a:buNone/>
             </a:pPr>
             <a:r>
-              <a:rPr lang="en-US" sz="950" b="1" dirty="0">
+              <a:rPr lang="en-US" sz="1300" b="1" dirty="0">
                 <a:solidFill>
                   <a:srgbClr val="0068B7"/>
                 </a:solidFill>
@@ -6692,20 +7004,20 @@
               </a:rPr>
               <a:t>Key idea</a:t>
             </a:r>
-            <a:endParaRPr lang="en-US" sz="950" dirty="0"/>
-          </a:p>
-        </p:txBody>
-      </p:sp>
-      <p:sp>
-        <p:nvSpPr>
-          <p:cNvPr id="11" name="Text 9"/>
-          <p:cNvSpPr/>
-          <p:nvPr/>
-        </p:nvSpPr>
-        <p:spPr>
-          <a:xfrm>
-            <a:off x="8074152" y="1856232"/>
-            <a:ext cx="2825496" cy="1261872"/>
+            <a:endParaRPr lang="en-US" sz="1300" dirty="0"/>
+          </a:p>
+        </p:txBody>
+      </p:sp>
+      <p:sp>
+        <p:nvSpPr>
+          <p:cNvPr id="12" name="Text 10"/>
+          <p:cNvSpPr/>
+          <p:nvPr/>
+        </p:nvSpPr>
+        <p:spPr>
+          <a:xfrm>
+            <a:off x="8074152" y="1920240"/>
+            <a:ext cx="2825496" cy="1188720"/>
           </a:xfrm>
           <a:prstGeom prst="rect">
             <a:avLst/>
@@ -6723,7 +7035,7 @@
               <a:buNone/>
             </a:pPr>
             <a:r>
-              <a:rPr lang="en-US" sz="1250" dirty="0">
+              <a:rPr lang="en-US" sz="1550" dirty="0">
                 <a:solidFill>
                   <a:srgbClr val="17364A"/>
                 </a:solidFill>
@@ -6733,13 +7045,13 @@
               </a:rPr>
               <a:t>What evidence would governance, leadership, or operations staff need before moving forward?</a:t>
             </a:r>
-            <a:endParaRPr lang="en-US" sz="1250" dirty="0"/>
-          </a:p>
-        </p:txBody>
-      </p:sp>
-      <p:sp>
-        <p:nvSpPr>
-          <p:cNvPr id="12" name="Shape 10"/>
+            <a:endParaRPr lang="en-US" sz="1550" dirty="0"/>
+          </a:p>
+        </p:txBody>
+      </p:sp>
+      <p:sp>
+        <p:nvSpPr>
+          <p:cNvPr id="13" name="Shape 11"/>
           <p:cNvSpPr/>
           <p:nvPr/>
         </p:nvSpPr>
@@ -6766,14 +7078,14 @@
       </p:sp>
       <p:sp>
         <p:nvSpPr>
-          <p:cNvPr id="13" name="Text 11"/>
+          <p:cNvPr id="14" name="Text 12"/>
           <p:cNvSpPr/>
           <p:nvPr/>
         </p:nvSpPr>
         <p:spPr>
           <a:xfrm>
             <a:off x="8074152" y="3666744"/>
-            <a:ext cx="2825496" cy="201168"/>
+            <a:ext cx="2825496" cy="256032"/>
           </a:xfrm>
           <a:prstGeom prst="rect">
             <a:avLst/>
@@ -6789,7 +7101,7 @@
               <a:buNone/>
             </a:pPr>
             <a:r>
-              <a:rPr lang="en-US" sz="950" b="1" dirty="0">
+              <a:rPr lang="en-US" sz="1300" b="1" dirty="0">
                 <a:solidFill>
                   <a:srgbClr val="0068B7"/>
                 </a:solidFill>
@@ -6799,20 +7111,20 @@
               </a:rPr>
               <a:t>Use this for</a:t>
             </a:r>
-            <a:endParaRPr lang="en-US" sz="950" dirty="0"/>
-          </a:p>
-        </p:txBody>
-      </p:sp>
-      <p:sp>
-        <p:nvSpPr>
-          <p:cNvPr id="14" name="Text 12"/>
-          <p:cNvSpPr/>
-          <p:nvPr/>
-        </p:nvSpPr>
-        <p:spPr>
-          <a:xfrm>
-            <a:off x="8074152" y="3959352"/>
-            <a:ext cx="2825496" cy="1170432"/>
+            <a:endParaRPr lang="en-US" sz="1300" dirty="0"/>
+          </a:p>
+        </p:txBody>
+      </p:sp>
+      <p:sp>
+        <p:nvSpPr>
+          <p:cNvPr id="15" name="Text 13"/>
+          <p:cNvSpPr/>
+          <p:nvPr/>
+        </p:nvSpPr>
+        <p:spPr>
+          <a:xfrm>
+            <a:off x="8074152" y="4023360"/>
+            <a:ext cx="2825496" cy="1097280"/>
           </a:xfrm>
           <a:prstGeom prst="rect">
             <a:avLst/>
@@ -6830,7 +7142,7 @@
               <a:buNone/>
             </a:pPr>
             <a:r>
-              <a:rPr lang="en-US" sz="1250" dirty="0">
+              <a:rPr lang="en-US" sz="1550" dirty="0">
                 <a:solidFill>
                   <a:srgbClr val="17364A"/>
                 </a:solidFill>
@@ -6840,7 +7152,7 @@
               </a:rPr>
               <a:t>Connect the concept to public health decisions, safeguards, documentation, or implementation work.</a:t>
             </a:r>
-            <a:endParaRPr lang="en-US" sz="1250" dirty="0"/>
+            <a:endParaRPr lang="en-US" sz="1550" dirty="0"/>
           </a:p>
         </p:txBody>
       </p:sp>
@@ -7037,7 +7349,7 @@
                 <a:ea typeface="Aptos" pitchFamily="34" charset="-122"/>
                 <a:cs typeface="Aptos" pitchFamily="34" charset="-120"/>
               </a:rPr>
-              <a:t>© Paula Soper</a:t>
+              <a:t>Â© Paula Soper</a:t>
             </a:r>
             <a:endParaRPr lang="en-US" sz="800" dirty="0"/>
           </a:p>
@@ -7045,7 +7357,46 @@
       </p:sp>
       <p:sp>
         <p:nvSpPr>
-          <p:cNvPr id="7" name="Shape 5"/>
+          <p:cNvPr id="7" name="Text 5"/>
+          <p:cNvSpPr/>
+          <p:nvPr/>
+        </p:nvSpPr>
+        <p:spPr>
+          <a:xfrm>
+            <a:off x="11137392" y="6510528"/>
+            <a:ext cx="411480" cy="201168"/>
+          </a:xfrm>
+          <a:prstGeom prst="rect">
+            <a:avLst/>
+          </a:prstGeom>
+          <a:noFill/>
+          <a:ln/>
+        </p:spPr>
+        <p:txBody>
+          <a:bodyPr wrap="square" lIns="0" tIns="0" rIns="0" bIns="0" rtlCol="0" anchor="ctr"/>
+          <a:lstStyle/>
+          <a:p>
+            <a:pPr algn="r" indent="0" marL="0">
+              <a:buNone/>
+            </a:pPr>
+            <a:r>
+              <a:rPr lang="en-US" sz="900" dirty="0">
+                <a:solidFill>
+                  <a:srgbClr val="5F7181"/>
+                </a:solidFill>
+                <a:latin typeface="Aptos" pitchFamily="34" charset="0"/>
+                <a:ea typeface="Aptos" pitchFamily="34" charset="-122"/>
+                <a:cs typeface="Aptos" pitchFamily="34" charset="-120"/>
+              </a:rPr>
+              <a:t>17</a:t>
+            </a:r>
+            <a:endParaRPr lang="en-US" sz="900" dirty="0"/>
+          </a:p>
+        </p:txBody>
+      </p:sp>
+      <p:sp>
+        <p:nvSpPr>
+          <p:cNvPr id="8" name="Shape 6"/>
           <p:cNvSpPr/>
           <p:nvPr/>
         </p:nvSpPr>
@@ -7070,7 +7421,7 @@
       </p:sp>
       <p:sp>
         <p:nvSpPr>
-          <p:cNvPr id="8" name="Text 6"/>
+          <p:cNvPr id="9" name="Text 7"/>
           <p:cNvSpPr/>
           <p:nvPr/>
         </p:nvSpPr>
@@ -7109,14 +7460,14 @@
       </p:sp>
       <p:sp>
         <p:nvSpPr>
-          <p:cNvPr id="9" name="Text 7"/>
+          <p:cNvPr id="10" name="Text 8"/>
           <p:cNvSpPr/>
           <p:nvPr/>
         </p:nvSpPr>
         <p:spPr>
           <a:xfrm>
             <a:off x="640080" y="621792"/>
-            <a:ext cx="10881360" cy="566928"/>
+            <a:ext cx="10881360" cy="713232"/>
           </a:xfrm>
           <a:prstGeom prst="rect">
             <a:avLst/>
@@ -7134,7 +7485,7 @@
               <a:buNone/>
             </a:pPr>
             <a:r>
-              <a:rPr lang="en-US" sz="2700" b="1" dirty="0">
+              <a:rPr lang="en-US" sz="3400" b="1" dirty="0">
                 <a:solidFill>
                   <a:srgbClr val="003A63"/>
                 </a:solidFill>
@@ -7144,20 +7495,20 @@
               </a:rPr>
               <a:t>Practical Exercise</a:t>
             </a:r>
-            <a:endParaRPr lang="en-US" sz="2700" dirty="0"/>
-          </a:p>
-        </p:txBody>
-      </p:sp>
-      <p:sp>
-        <p:nvSpPr>
-          <p:cNvPr id="10" name="Text 8"/>
-          <p:cNvSpPr/>
-          <p:nvPr/>
-        </p:nvSpPr>
-        <p:spPr>
-          <a:xfrm>
-            <a:off x="868680" y="1417320"/>
-            <a:ext cx="6675120" cy="4434840"/>
+            <a:endParaRPr lang="en-US" sz="3400" dirty="0"/>
+          </a:p>
+        </p:txBody>
+      </p:sp>
+      <p:sp>
+        <p:nvSpPr>
+          <p:cNvPr id="11" name="Text 9"/>
+          <p:cNvSpPr/>
+          <p:nvPr/>
+        </p:nvSpPr>
+        <p:spPr>
+          <a:xfrm>
+            <a:off x="868680" y="1508760"/>
+            <a:ext cx="6537960" cy="4160520"/>
           </a:xfrm>
           <a:prstGeom prst="rect">
             <a:avLst/>
@@ -7172,7 +7523,7 @@
           <a:lstStyle/>
           <a:p>
             <a:r>
-              <a:rPr lang="en-US" sz="1700" dirty="0">
+              <a:rPr lang="en-US" sz="2100" dirty="0">
                 <a:solidFill>
                   <a:srgbClr val="17364A"/>
                 </a:solidFill>
@@ -7182,11 +7533,11 @@
               </a:rPr>
               <a:t>Complete a use case intake and triage worksheet for one real or realistic public health workflow.</a:t>
             </a:r>
-            <a:endParaRPr lang="en-US" sz="1700" dirty="0"/>
-          </a:p>
-          <a:p>
-            <a:r>
-              <a:rPr lang="en-US" sz="1700" dirty="0">
+            <a:endParaRPr lang="en-US" sz="2100" dirty="0"/>
+          </a:p>
+          <a:p>
+            <a:r>
+              <a:rPr lang="en-US" sz="2100" dirty="0">
                 <a:solidFill>
                   <a:srgbClr val="17364A"/>
                 </a:solidFill>
@@ -7194,15 +7545,15 @@
                 <a:ea typeface="Aptos" pitchFamily="34" charset="-122"/>
                 <a:cs typeface="Aptos" pitchFamily="34" charset="-120"/>
               </a:rPr>
-              <a:t>Include the problem statement, workflow, intended users, data sources, AI-supported task, output, potential benefit, risk.</a:t>
-            </a:r>
-            <a:endParaRPr lang="en-US" sz="1700" dirty="0"/>
-          </a:p>
-        </p:txBody>
-      </p:sp>
-      <p:sp>
-        <p:nvSpPr>
-          <p:cNvPr id="11" name="Shape 9"/>
+              <a:t>Include the problem statement, workflow, intended users, data sources, AI-supported task, output,.</a:t>
+            </a:r>
+            <a:endParaRPr lang="en-US" sz="2100" dirty="0"/>
+          </a:p>
+        </p:txBody>
+      </p:sp>
+      <p:sp>
+        <p:nvSpPr>
+          <p:cNvPr id="12" name="Shape 10"/>
           <p:cNvSpPr/>
           <p:nvPr/>
         </p:nvSpPr>
@@ -7229,14 +7580,14 @@
       </p:sp>
       <p:sp>
         <p:nvSpPr>
-          <p:cNvPr id="12" name="Text 10"/>
+          <p:cNvPr id="13" name="Text 11"/>
           <p:cNvSpPr/>
           <p:nvPr/>
         </p:nvSpPr>
         <p:spPr>
           <a:xfrm>
             <a:off x="8074152" y="1563624"/>
-            <a:ext cx="2825496" cy="201168"/>
+            <a:ext cx="2825496" cy="256032"/>
           </a:xfrm>
           <a:prstGeom prst="rect">
             <a:avLst/>
@@ -7252,7 +7603,7 @@
               <a:buNone/>
             </a:pPr>
             <a:r>
-              <a:rPr lang="en-US" sz="950" b="1" dirty="0">
+              <a:rPr lang="en-US" sz="1300" b="1" dirty="0">
                 <a:solidFill>
                   <a:srgbClr val="0068B7"/>
                 </a:solidFill>
@@ -7262,20 +7613,20 @@
               </a:rPr>
               <a:t>Key idea</a:t>
             </a:r>
-            <a:endParaRPr lang="en-US" sz="950" dirty="0"/>
-          </a:p>
-        </p:txBody>
-      </p:sp>
-      <p:sp>
-        <p:nvSpPr>
-          <p:cNvPr id="13" name="Text 11"/>
-          <p:cNvSpPr/>
-          <p:nvPr/>
-        </p:nvSpPr>
-        <p:spPr>
-          <a:xfrm>
-            <a:off x="8074152" y="1856232"/>
-            <a:ext cx="2825496" cy="1261872"/>
+            <a:endParaRPr lang="en-US" sz="1300" dirty="0"/>
+          </a:p>
+        </p:txBody>
+      </p:sp>
+      <p:sp>
+        <p:nvSpPr>
+          <p:cNvPr id="14" name="Text 12"/>
+          <p:cNvSpPr/>
+          <p:nvPr/>
+        </p:nvSpPr>
+        <p:spPr>
+          <a:xfrm>
+            <a:off x="8074152" y="1920240"/>
+            <a:ext cx="2825496" cy="1188720"/>
           </a:xfrm>
           <a:prstGeom prst="rect">
             <a:avLst/>
@@ -7293,7 +7644,7 @@
               <a:buNone/>
             </a:pPr>
             <a:r>
-              <a:rPr lang="en-US" sz="1250" dirty="0">
+              <a:rPr lang="en-US" sz="1550" dirty="0">
                 <a:solidFill>
                   <a:srgbClr val="17364A"/>
                 </a:solidFill>
@@ -7303,13 +7654,13 @@
               </a:rPr>
               <a:t>Complete a use case intake and triage worksheet for one real or realistic public health workflow.</a:t>
             </a:r>
-            <a:endParaRPr lang="en-US" sz="1250" dirty="0"/>
-          </a:p>
-        </p:txBody>
-      </p:sp>
-      <p:sp>
-        <p:nvSpPr>
-          <p:cNvPr id="14" name="Shape 12"/>
+            <a:endParaRPr lang="en-US" sz="1550" dirty="0"/>
+          </a:p>
+        </p:txBody>
+      </p:sp>
+      <p:sp>
+        <p:nvSpPr>
+          <p:cNvPr id="15" name="Shape 13"/>
           <p:cNvSpPr/>
           <p:nvPr/>
         </p:nvSpPr>
@@ -7336,14 +7687,14 @@
       </p:sp>
       <p:sp>
         <p:nvSpPr>
-          <p:cNvPr id="15" name="Text 13"/>
+          <p:cNvPr id="16" name="Text 14"/>
           <p:cNvSpPr/>
           <p:nvPr/>
         </p:nvSpPr>
         <p:spPr>
           <a:xfrm>
             <a:off x="8074152" y="3666744"/>
-            <a:ext cx="2825496" cy="201168"/>
+            <a:ext cx="2825496" cy="256032"/>
           </a:xfrm>
           <a:prstGeom prst="rect">
             <a:avLst/>
@@ -7359,7 +7710,7 @@
               <a:buNone/>
             </a:pPr>
             <a:r>
-              <a:rPr lang="en-US" sz="950" b="1" dirty="0">
+              <a:rPr lang="en-US" sz="1300" b="1" dirty="0">
                 <a:solidFill>
                   <a:srgbClr val="0068B7"/>
                 </a:solidFill>
@@ -7369,20 +7720,20 @@
               </a:rPr>
               <a:t>Use this for</a:t>
             </a:r>
-            <a:endParaRPr lang="en-US" sz="950" dirty="0"/>
-          </a:p>
-        </p:txBody>
-      </p:sp>
-      <p:sp>
-        <p:nvSpPr>
-          <p:cNvPr id="16" name="Text 14"/>
-          <p:cNvSpPr/>
-          <p:nvPr/>
-        </p:nvSpPr>
-        <p:spPr>
-          <a:xfrm>
-            <a:off x="8074152" y="3959352"/>
-            <a:ext cx="2825496" cy="1170432"/>
+            <a:endParaRPr lang="en-US" sz="1300" dirty="0"/>
+          </a:p>
+        </p:txBody>
+      </p:sp>
+      <p:sp>
+        <p:nvSpPr>
+          <p:cNvPr id="17" name="Text 15"/>
+          <p:cNvSpPr/>
+          <p:nvPr/>
+        </p:nvSpPr>
+        <p:spPr>
+          <a:xfrm>
+            <a:off x="8074152" y="4023360"/>
+            <a:ext cx="2825496" cy="1097280"/>
           </a:xfrm>
           <a:prstGeom prst="rect">
             <a:avLst/>
@@ -7400,7 +7751,7 @@
               <a:buNone/>
             </a:pPr>
             <a:r>
-              <a:rPr lang="en-US" sz="1250" dirty="0">
+              <a:rPr lang="en-US" sz="1550" dirty="0">
                 <a:solidFill>
                   <a:srgbClr val="17364A"/>
                 </a:solidFill>
@@ -7410,7 +7761,7 @@
               </a:rPr>
               <a:t>Connect the concept to public health decisions, safeguards, documentation, or implementation work.</a:t>
             </a:r>
-            <a:endParaRPr lang="en-US" sz="1250" dirty="0"/>
+            <a:endParaRPr lang="en-US" sz="1550" dirty="0"/>
           </a:p>
         </p:txBody>
       </p:sp>
@@ -7607,7 +7958,7 @@
                 <a:ea typeface="Aptos" pitchFamily="34" charset="-122"/>
                 <a:cs typeface="Aptos" pitchFamily="34" charset="-120"/>
               </a:rPr>
-              <a:t>© Paula Soper</a:t>
+              <a:t>Â© Paula Soper</a:t>
             </a:r>
             <a:endParaRPr lang="en-US" sz="800" dirty="0"/>
           </a:p>
@@ -7615,7 +7966,46 @@
       </p:sp>
       <p:sp>
         <p:nvSpPr>
-          <p:cNvPr id="7" name="Shape 5"/>
+          <p:cNvPr id="7" name="Text 5"/>
+          <p:cNvSpPr/>
+          <p:nvPr/>
+        </p:nvSpPr>
+        <p:spPr>
+          <a:xfrm>
+            <a:off x="11137392" y="6510528"/>
+            <a:ext cx="411480" cy="201168"/>
+          </a:xfrm>
+          <a:prstGeom prst="rect">
+            <a:avLst/>
+          </a:prstGeom>
+          <a:noFill/>
+          <a:ln/>
+        </p:spPr>
+        <p:txBody>
+          <a:bodyPr wrap="square" lIns="0" tIns="0" rIns="0" bIns="0" rtlCol="0" anchor="ctr"/>
+          <a:lstStyle/>
+          <a:p>
+            <a:pPr algn="r" indent="0" marL="0">
+              <a:buNone/>
+            </a:pPr>
+            <a:r>
+              <a:rPr lang="en-US" sz="900" dirty="0">
+                <a:solidFill>
+                  <a:srgbClr val="5F7181"/>
+                </a:solidFill>
+                <a:latin typeface="Aptos" pitchFamily="34" charset="0"/>
+                <a:ea typeface="Aptos" pitchFamily="34" charset="-122"/>
+                <a:cs typeface="Aptos" pitchFamily="34" charset="-120"/>
+              </a:rPr>
+              <a:t>18</a:t>
+            </a:r>
+            <a:endParaRPr lang="en-US" sz="900" dirty="0"/>
+          </a:p>
+        </p:txBody>
+      </p:sp>
+      <p:sp>
+        <p:nvSpPr>
+          <p:cNvPr id="8" name="Shape 6"/>
           <p:cNvSpPr/>
           <p:nvPr/>
         </p:nvSpPr>
@@ -7640,7 +8030,7 @@
       </p:sp>
       <p:sp>
         <p:nvSpPr>
-          <p:cNvPr id="8" name="Text 6"/>
+          <p:cNvPr id="9" name="Text 7"/>
           <p:cNvSpPr/>
           <p:nvPr/>
         </p:nvSpPr>
@@ -7679,14 +8069,14 @@
       </p:sp>
       <p:sp>
         <p:nvSpPr>
-          <p:cNvPr id="9" name="Text 7"/>
+          <p:cNvPr id="10" name="Text 8"/>
           <p:cNvSpPr/>
           <p:nvPr/>
         </p:nvSpPr>
         <p:spPr>
           <a:xfrm>
             <a:off x="640080" y="621792"/>
-            <a:ext cx="10881360" cy="566928"/>
+            <a:ext cx="10881360" cy="713232"/>
           </a:xfrm>
           <a:prstGeom prst="rect">
             <a:avLst/>
@@ -7704,7 +8094,7 @@
               <a:buNone/>
             </a:pPr>
             <a:r>
-              <a:rPr lang="en-US" sz="2700" b="1" dirty="0">
+              <a:rPr lang="en-US" sz="3400" b="1" dirty="0">
                 <a:solidFill>
                   <a:srgbClr val="003A63"/>
                 </a:solidFill>
@@ -7714,20 +8104,20 @@
               </a:rPr>
               <a:t>Expected Artifact or Evidence</a:t>
             </a:r>
-            <a:endParaRPr lang="en-US" sz="2700" dirty="0"/>
-          </a:p>
-        </p:txBody>
-      </p:sp>
-      <p:sp>
-        <p:nvSpPr>
-          <p:cNvPr id="10" name="Text 8"/>
-          <p:cNvSpPr/>
-          <p:nvPr/>
-        </p:nvSpPr>
-        <p:spPr>
-          <a:xfrm>
-            <a:off x="868680" y="1417320"/>
-            <a:ext cx="6675120" cy="4434840"/>
+            <a:endParaRPr lang="en-US" sz="3400" dirty="0"/>
+          </a:p>
+        </p:txBody>
+      </p:sp>
+      <p:sp>
+        <p:nvSpPr>
+          <p:cNvPr id="11" name="Text 9"/>
+          <p:cNvSpPr/>
+          <p:nvPr/>
+        </p:nvSpPr>
+        <p:spPr>
+          <a:xfrm>
+            <a:off x="868680" y="1508760"/>
+            <a:ext cx="6537960" cy="4160520"/>
           </a:xfrm>
           <a:prstGeom prst="rect">
             <a:avLst/>
@@ -7742,7 +8132,7 @@
           <a:lstStyle/>
           <a:p>
             <a:r>
-              <a:rPr lang="en-US" sz="1700" dirty="0">
+              <a:rPr lang="en-US" sz="2100" dirty="0">
                 <a:solidFill>
                   <a:srgbClr val="17364A"/>
                 </a:solidFill>
@@ -7752,11 +8142,11 @@
               </a:rPr>
               <a:t>Completed AI use case intake worksheet</a:t>
             </a:r>
-            <a:endParaRPr lang="en-US" sz="1700" dirty="0"/>
-          </a:p>
-          <a:p>
-            <a:r>
-              <a:rPr lang="en-US" sz="1700" dirty="0">
+            <a:endParaRPr lang="en-US" sz="2100" dirty="0"/>
+          </a:p>
+          <a:p>
+            <a:r>
+              <a:rPr lang="en-US" sz="2100" dirty="0">
                 <a:solidFill>
                   <a:srgbClr val="17364A"/>
                 </a:solidFill>
@@ -7766,11 +8156,11 @@
               </a:rPr>
               <a:t>Risk and readiness triage decision</a:t>
             </a:r>
-            <a:endParaRPr lang="en-US" sz="1700" dirty="0"/>
-          </a:p>
-          <a:p>
-            <a:r>
-              <a:rPr lang="en-US" sz="1700" dirty="0">
+            <a:endParaRPr lang="en-US" sz="2100" dirty="0"/>
+          </a:p>
+          <a:p>
+            <a:r>
+              <a:rPr lang="en-US" sz="2100" dirty="0">
                 <a:solidFill>
                   <a:srgbClr val="17364A"/>
                 </a:solidFill>
@@ -7780,13 +8170,13 @@
               </a:rPr>
               <a:t>List of required reviewers and next steps</a:t>
             </a:r>
-            <a:endParaRPr lang="en-US" sz="1700" dirty="0"/>
-          </a:p>
-        </p:txBody>
-      </p:sp>
-      <p:sp>
-        <p:nvSpPr>
-          <p:cNvPr id="11" name="Shape 9"/>
+            <a:endParaRPr lang="en-US" sz="2100" dirty="0"/>
+          </a:p>
+        </p:txBody>
+      </p:sp>
+      <p:sp>
+        <p:nvSpPr>
+          <p:cNvPr id="12" name="Shape 10"/>
           <p:cNvSpPr/>
           <p:nvPr/>
         </p:nvSpPr>
@@ -7813,14 +8203,14 @@
       </p:sp>
       <p:sp>
         <p:nvSpPr>
-          <p:cNvPr id="12" name="Text 10"/>
+          <p:cNvPr id="13" name="Text 11"/>
           <p:cNvSpPr/>
           <p:nvPr/>
         </p:nvSpPr>
         <p:spPr>
           <a:xfrm>
             <a:off x="8074152" y="1563624"/>
-            <a:ext cx="2825496" cy="201168"/>
+            <a:ext cx="2825496" cy="256032"/>
           </a:xfrm>
           <a:prstGeom prst="rect">
             <a:avLst/>
@@ -7836,7 +8226,7 @@
               <a:buNone/>
             </a:pPr>
             <a:r>
-              <a:rPr lang="en-US" sz="950" b="1" dirty="0">
+              <a:rPr lang="en-US" sz="1300" b="1" dirty="0">
                 <a:solidFill>
                   <a:srgbClr val="0068B7"/>
                 </a:solidFill>
@@ -7846,20 +8236,20 @@
               </a:rPr>
               <a:t>Key idea</a:t>
             </a:r>
-            <a:endParaRPr lang="en-US" sz="950" dirty="0"/>
-          </a:p>
-        </p:txBody>
-      </p:sp>
-      <p:sp>
-        <p:nvSpPr>
-          <p:cNvPr id="13" name="Text 11"/>
-          <p:cNvSpPr/>
-          <p:nvPr/>
-        </p:nvSpPr>
-        <p:spPr>
-          <a:xfrm>
-            <a:off x="8074152" y="1856232"/>
-            <a:ext cx="2825496" cy="1261872"/>
+            <a:endParaRPr lang="en-US" sz="1300" dirty="0"/>
+          </a:p>
+        </p:txBody>
+      </p:sp>
+      <p:sp>
+        <p:nvSpPr>
+          <p:cNvPr id="14" name="Text 12"/>
+          <p:cNvSpPr/>
+          <p:nvPr/>
+        </p:nvSpPr>
+        <p:spPr>
+          <a:xfrm>
+            <a:off x="8074152" y="1920240"/>
+            <a:ext cx="2825496" cy="1188720"/>
           </a:xfrm>
           <a:prstGeom prst="rect">
             <a:avLst/>
@@ -7877,7 +8267,7 @@
               <a:buNone/>
             </a:pPr>
             <a:r>
-              <a:rPr lang="en-US" sz="1250" dirty="0">
+              <a:rPr lang="en-US" sz="1550" dirty="0">
                 <a:solidFill>
                   <a:srgbClr val="17364A"/>
                 </a:solidFill>
@@ -7887,13 +8277,13 @@
               </a:rPr>
               <a:t>Completed AI use case intake worksheet</a:t>
             </a:r>
-            <a:endParaRPr lang="en-US" sz="1250" dirty="0"/>
-          </a:p>
-        </p:txBody>
-      </p:sp>
-      <p:sp>
-        <p:nvSpPr>
-          <p:cNvPr id="14" name="Shape 12"/>
+            <a:endParaRPr lang="en-US" sz="1550" dirty="0"/>
+          </a:p>
+        </p:txBody>
+      </p:sp>
+      <p:sp>
+        <p:nvSpPr>
+          <p:cNvPr id="15" name="Shape 13"/>
           <p:cNvSpPr/>
           <p:nvPr/>
         </p:nvSpPr>
@@ -7920,14 +8310,14 @@
       </p:sp>
       <p:sp>
         <p:nvSpPr>
-          <p:cNvPr id="15" name="Text 13"/>
+          <p:cNvPr id="16" name="Text 14"/>
           <p:cNvSpPr/>
           <p:nvPr/>
         </p:nvSpPr>
         <p:spPr>
           <a:xfrm>
             <a:off x="8074152" y="3666744"/>
-            <a:ext cx="2825496" cy="201168"/>
+            <a:ext cx="2825496" cy="256032"/>
           </a:xfrm>
           <a:prstGeom prst="rect">
             <a:avLst/>
@@ -7943,7 +8333,7 @@
               <a:buNone/>
             </a:pPr>
             <a:r>
-              <a:rPr lang="en-US" sz="950" b="1" dirty="0">
+              <a:rPr lang="en-US" sz="1300" b="1" dirty="0">
                 <a:solidFill>
                   <a:srgbClr val="0068B7"/>
                 </a:solidFill>
@@ -7953,20 +8343,20 @@
               </a:rPr>
               <a:t>Use this for</a:t>
             </a:r>
-            <a:endParaRPr lang="en-US" sz="950" dirty="0"/>
-          </a:p>
-        </p:txBody>
-      </p:sp>
-      <p:sp>
-        <p:nvSpPr>
-          <p:cNvPr id="16" name="Text 14"/>
-          <p:cNvSpPr/>
-          <p:nvPr/>
-        </p:nvSpPr>
-        <p:spPr>
-          <a:xfrm>
-            <a:off x="8074152" y="3959352"/>
-            <a:ext cx="2825496" cy="1170432"/>
+            <a:endParaRPr lang="en-US" sz="1300" dirty="0"/>
+          </a:p>
+        </p:txBody>
+      </p:sp>
+      <p:sp>
+        <p:nvSpPr>
+          <p:cNvPr id="17" name="Text 15"/>
+          <p:cNvSpPr/>
+          <p:nvPr/>
+        </p:nvSpPr>
+        <p:spPr>
+          <a:xfrm>
+            <a:off x="8074152" y="4023360"/>
+            <a:ext cx="2825496" cy="1097280"/>
           </a:xfrm>
           <a:prstGeom prst="rect">
             <a:avLst/>
@@ -7984,7 +8374,7 @@
               <a:buNone/>
             </a:pPr>
             <a:r>
-              <a:rPr lang="en-US" sz="1250" dirty="0">
+              <a:rPr lang="en-US" sz="1550" dirty="0">
                 <a:solidFill>
                   <a:srgbClr val="17364A"/>
                 </a:solidFill>
@@ -7994,7 +8384,7 @@
               </a:rPr>
               <a:t>Connect the concept to public health decisions, safeguards, documentation, or implementation work.</a:t>
             </a:r>
-            <a:endParaRPr lang="en-US" sz="1250" dirty="0"/>
+            <a:endParaRPr lang="en-US" sz="1550" dirty="0"/>
           </a:p>
         </p:txBody>
       </p:sp>
@@ -8191,7 +8581,7 @@
                 <a:ea typeface="Aptos" pitchFamily="34" charset="-122"/>
                 <a:cs typeface="Aptos" pitchFamily="34" charset="-120"/>
               </a:rPr>
-              <a:t>© Paula Soper</a:t>
+              <a:t>Â© Paula Soper</a:t>
             </a:r>
             <a:endParaRPr lang="en-US" sz="800" dirty="0"/>
           </a:p>
@@ -8205,8 +8595,47 @@
         </p:nvSpPr>
         <p:spPr>
           <a:xfrm>
+            <a:off x="11137392" y="6510528"/>
+            <a:ext cx="411480" cy="201168"/>
+          </a:xfrm>
+          <a:prstGeom prst="rect">
+            <a:avLst/>
+          </a:prstGeom>
+          <a:noFill/>
+          <a:ln/>
+        </p:spPr>
+        <p:txBody>
+          <a:bodyPr wrap="square" lIns="0" tIns="0" rIns="0" bIns="0" rtlCol="0" anchor="ctr"/>
+          <a:lstStyle/>
+          <a:p>
+            <a:pPr algn="r" indent="0" marL="0">
+              <a:buNone/>
+            </a:pPr>
+            <a:r>
+              <a:rPr lang="en-US" sz="900" dirty="0">
+                <a:solidFill>
+                  <a:srgbClr val="5F7181"/>
+                </a:solidFill>
+                <a:latin typeface="Aptos" pitchFamily="34" charset="0"/>
+                <a:ea typeface="Aptos" pitchFamily="34" charset="-122"/>
+                <a:cs typeface="Aptos" pitchFamily="34" charset="-120"/>
+              </a:rPr>
+              <a:t>19</a:t>
+            </a:r>
+            <a:endParaRPr lang="en-US" sz="900" dirty="0"/>
+          </a:p>
+        </p:txBody>
+      </p:sp>
+      <p:sp>
+        <p:nvSpPr>
+          <p:cNvPr id="8" name="Text 6"/>
+          <p:cNvSpPr/>
+          <p:nvPr/>
+        </p:nvSpPr>
+        <p:spPr>
+          <a:xfrm>
             <a:off x="640080" y="658368"/>
-            <a:ext cx="10881360" cy="566928"/>
+            <a:ext cx="10881360" cy="713232"/>
           </a:xfrm>
           <a:prstGeom prst="rect">
             <a:avLst/>
@@ -8224,7 +8653,7 @@
               <a:buNone/>
             </a:pPr>
             <a:r>
-              <a:rPr lang="en-US" sz="2700" b="1" dirty="0">
+              <a:rPr lang="en-US" sz="3400" b="1" dirty="0">
                 <a:solidFill>
                   <a:srgbClr val="003A63"/>
                 </a:solidFill>
@@ -8234,20 +8663,20 @@
               </a:rPr>
               <a:t>Expected Artifact or Evidence Continued</a:t>
             </a:r>
-            <a:endParaRPr lang="en-US" sz="2700" dirty="0"/>
-          </a:p>
-        </p:txBody>
-      </p:sp>
-      <p:sp>
-        <p:nvSpPr>
-          <p:cNvPr id="8" name="Text 6"/>
-          <p:cNvSpPr/>
-          <p:nvPr/>
-        </p:nvSpPr>
-        <p:spPr>
-          <a:xfrm>
-            <a:off x="868680" y="1417320"/>
-            <a:ext cx="6675120" cy="4434840"/>
+            <a:endParaRPr lang="en-US" sz="3400" dirty="0"/>
+          </a:p>
+        </p:txBody>
+      </p:sp>
+      <p:sp>
+        <p:nvSpPr>
+          <p:cNvPr id="9" name="Text 7"/>
+          <p:cNvSpPr/>
+          <p:nvPr/>
+        </p:nvSpPr>
+        <p:spPr>
+          <a:xfrm>
+            <a:off x="868680" y="1508760"/>
+            <a:ext cx="6537960" cy="4160520"/>
           </a:xfrm>
           <a:prstGeom prst="rect">
             <a:avLst/>
@@ -8262,7 +8691,7 @@
           <a:lstStyle/>
           <a:p>
             <a:r>
-              <a:rPr lang="en-US" sz="1700" dirty="0">
+              <a:rPr lang="en-US" sz="2100" dirty="0">
                 <a:solidFill>
                   <a:srgbClr val="17364A"/>
                 </a:solidFill>
@@ -8272,13 +8701,13 @@
               </a:rPr>
               <a:t>Documented rationale for proceeding, deferring, redesigning, or rejecting the use case</a:t>
             </a:r>
-            <a:endParaRPr lang="en-US" sz="1700" dirty="0"/>
-          </a:p>
-        </p:txBody>
-      </p:sp>
-      <p:sp>
-        <p:nvSpPr>
-          <p:cNvPr id="9" name="Shape 7"/>
+            <a:endParaRPr lang="en-US" sz="2100" dirty="0"/>
+          </a:p>
+        </p:txBody>
+      </p:sp>
+      <p:sp>
+        <p:nvSpPr>
+          <p:cNvPr id="10" name="Shape 8"/>
           <p:cNvSpPr/>
           <p:nvPr/>
         </p:nvSpPr>
@@ -8305,14 +8734,14 @@
       </p:sp>
       <p:sp>
         <p:nvSpPr>
-          <p:cNvPr id="10" name="Text 8"/>
+          <p:cNvPr id="11" name="Text 9"/>
           <p:cNvSpPr/>
           <p:nvPr/>
         </p:nvSpPr>
         <p:spPr>
           <a:xfrm>
             <a:off x="8074152" y="1563624"/>
-            <a:ext cx="2825496" cy="201168"/>
+            <a:ext cx="2825496" cy="256032"/>
           </a:xfrm>
           <a:prstGeom prst="rect">
             <a:avLst/>
@@ -8328,7 +8757,7 @@
               <a:buNone/>
             </a:pPr>
             <a:r>
-              <a:rPr lang="en-US" sz="950" b="1" dirty="0">
+              <a:rPr lang="en-US" sz="1300" b="1" dirty="0">
                 <a:solidFill>
                   <a:srgbClr val="0068B7"/>
                 </a:solidFill>
@@ -8338,20 +8767,20 @@
               </a:rPr>
               <a:t>Key idea</a:t>
             </a:r>
-            <a:endParaRPr lang="en-US" sz="950" dirty="0"/>
-          </a:p>
-        </p:txBody>
-      </p:sp>
-      <p:sp>
-        <p:nvSpPr>
-          <p:cNvPr id="11" name="Text 9"/>
-          <p:cNvSpPr/>
-          <p:nvPr/>
-        </p:nvSpPr>
-        <p:spPr>
-          <a:xfrm>
-            <a:off x="8074152" y="1856232"/>
-            <a:ext cx="2825496" cy="1261872"/>
+            <a:endParaRPr lang="en-US" sz="1300" dirty="0"/>
+          </a:p>
+        </p:txBody>
+      </p:sp>
+      <p:sp>
+        <p:nvSpPr>
+          <p:cNvPr id="12" name="Text 10"/>
+          <p:cNvSpPr/>
+          <p:nvPr/>
+        </p:nvSpPr>
+        <p:spPr>
+          <a:xfrm>
+            <a:off x="8074152" y="1920240"/>
+            <a:ext cx="2825496" cy="1188720"/>
           </a:xfrm>
           <a:prstGeom prst="rect">
             <a:avLst/>
@@ -8369,7 +8798,7 @@
               <a:buNone/>
             </a:pPr>
             <a:r>
-              <a:rPr lang="en-US" sz="1250" dirty="0">
+              <a:rPr lang="en-US" sz="1550" dirty="0">
                 <a:solidFill>
                   <a:srgbClr val="17364A"/>
                 </a:solidFill>
@@ -8379,13 +8808,13 @@
               </a:rPr>
               <a:t>Documented rationale for proceeding, deferring, redesigning, or rejecting the use case</a:t>
             </a:r>
-            <a:endParaRPr lang="en-US" sz="1250" dirty="0"/>
-          </a:p>
-        </p:txBody>
-      </p:sp>
-      <p:sp>
-        <p:nvSpPr>
-          <p:cNvPr id="12" name="Shape 10"/>
+            <a:endParaRPr lang="en-US" sz="1550" dirty="0"/>
+          </a:p>
+        </p:txBody>
+      </p:sp>
+      <p:sp>
+        <p:nvSpPr>
+          <p:cNvPr id="13" name="Shape 11"/>
           <p:cNvSpPr/>
           <p:nvPr/>
         </p:nvSpPr>
@@ -8412,14 +8841,14 @@
       </p:sp>
       <p:sp>
         <p:nvSpPr>
-          <p:cNvPr id="13" name="Text 11"/>
+          <p:cNvPr id="14" name="Text 12"/>
           <p:cNvSpPr/>
           <p:nvPr/>
         </p:nvSpPr>
         <p:spPr>
           <a:xfrm>
             <a:off x="8074152" y="3666744"/>
-            <a:ext cx="2825496" cy="201168"/>
+            <a:ext cx="2825496" cy="256032"/>
           </a:xfrm>
           <a:prstGeom prst="rect">
             <a:avLst/>
@@ -8435,7 +8864,7 @@
               <a:buNone/>
             </a:pPr>
             <a:r>
-              <a:rPr lang="en-US" sz="950" b="1" dirty="0">
+              <a:rPr lang="en-US" sz="1300" b="1" dirty="0">
                 <a:solidFill>
                   <a:srgbClr val="0068B7"/>
                 </a:solidFill>
@@ -8445,20 +8874,20 @@
               </a:rPr>
               <a:t>Use this for</a:t>
             </a:r>
-            <a:endParaRPr lang="en-US" sz="950" dirty="0"/>
-          </a:p>
-        </p:txBody>
-      </p:sp>
-      <p:sp>
-        <p:nvSpPr>
-          <p:cNvPr id="14" name="Text 12"/>
-          <p:cNvSpPr/>
-          <p:nvPr/>
-        </p:nvSpPr>
-        <p:spPr>
-          <a:xfrm>
-            <a:off x="8074152" y="3959352"/>
-            <a:ext cx="2825496" cy="1170432"/>
+            <a:endParaRPr lang="en-US" sz="1300" dirty="0"/>
+          </a:p>
+        </p:txBody>
+      </p:sp>
+      <p:sp>
+        <p:nvSpPr>
+          <p:cNvPr id="15" name="Text 13"/>
+          <p:cNvSpPr/>
+          <p:nvPr/>
+        </p:nvSpPr>
+        <p:spPr>
+          <a:xfrm>
+            <a:off x="8074152" y="4023360"/>
+            <a:ext cx="2825496" cy="1097280"/>
           </a:xfrm>
           <a:prstGeom prst="rect">
             <a:avLst/>
@@ -8476,7 +8905,7 @@
               <a:buNone/>
             </a:pPr>
             <a:r>
-              <a:rPr lang="en-US" sz="1250" dirty="0">
+              <a:rPr lang="en-US" sz="1550" dirty="0">
                 <a:solidFill>
                   <a:srgbClr val="17364A"/>
                 </a:solidFill>
@@ -8486,7 +8915,7 @@
               </a:rPr>
               <a:t>Connect the concept to public health decisions, safeguards, documentation, or implementation work.</a:t>
             </a:r>
-            <a:endParaRPr lang="en-US" sz="1250" dirty="0"/>
+            <a:endParaRPr lang="en-US" sz="1550" dirty="0"/>
           </a:p>
         </p:txBody>
       </p:sp>
@@ -8683,7 +9112,7 @@
                 <a:ea typeface="Aptos" pitchFamily="34" charset="-122"/>
                 <a:cs typeface="Aptos" pitchFamily="34" charset="-120"/>
               </a:rPr>
-              <a:t>© Paula Soper</a:t>
+              <a:t>Â© Paula Soper</a:t>
             </a:r>
             <a:endParaRPr lang="en-US" sz="800" dirty="0"/>
           </a:p>
@@ -8697,8 +9126,47 @@
         </p:nvSpPr>
         <p:spPr>
           <a:xfrm>
+            <a:off x="11137392" y="6510528"/>
+            <a:ext cx="411480" cy="201168"/>
+          </a:xfrm>
+          <a:prstGeom prst="rect">
+            <a:avLst/>
+          </a:prstGeom>
+          <a:noFill/>
+          <a:ln/>
+        </p:spPr>
+        <p:txBody>
+          <a:bodyPr wrap="square" lIns="0" tIns="0" rIns="0" bIns="0" rtlCol="0" anchor="ctr"/>
+          <a:lstStyle/>
+          <a:p>
+            <a:pPr algn="r" indent="0" marL="0">
+              <a:buNone/>
+            </a:pPr>
+            <a:r>
+              <a:rPr lang="en-US" sz="900" dirty="0">
+                <a:solidFill>
+                  <a:srgbClr val="5F7181"/>
+                </a:solidFill>
+                <a:latin typeface="Aptos" pitchFamily="34" charset="0"/>
+                <a:ea typeface="Aptos" pitchFamily="34" charset="-122"/>
+                <a:cs typeface="Aptos" pitchFamily="34" charset="-120"/>
+              </a:rPr>
+              <a:t>2</a:t>
+            </a:r>
+            <a:endParaRPr lang="en-US" sz="900" dirty="0"/>
+          </a:p>
+        </p:txBody>
+      </p:sp>
+      <p:sp>
+        <p:nvSpPr>
+          <p:cNvPr id="8" name="Text 6"/>
+          <p:cNvSpPr/>
+          <p:nvPr/>
+        </p:nvSpPr>
+        <p:spPr>
+          <a:xfrm>
             <a:off x="640080" y="658368"/>
-            <a:ext cx="10881360" cy="566928"/>
+            <a:ext cx="10881360" cy="713232"/>
           </a:xfrm>
           <a:prstGeom prst="rect">
             <a:avLst/>
@@ -8716,7 +9184,7 @@
               <a:buNone/>
             </a:pPr>
             <a:r>
-              <a:rPr lang="en-US" sz="2700" b="1" dirty="0">
+              <a:rPr lang="en-US" sz="3400" b="1" dirty="0">
                 <a:solidFill>
                   <a:srgbClr val="003A63"/>
                 </a:solidFill>
@@ -8726,20 +9194,20 @@
               </a:rPr>
               <a:t>What this module helps you do</a:t>
             </a:r>
-            <a:endParaRPr lang="en-US" sz="2700" dirty="0"/>
-          </a:p>
-        </p:txBody>
-      </p:sp>
-      <p:sp>
-        <p:nvSpPr>
-          <p:cNvPr id="8" name="Text 6"/>
-          <p:cNvSpPr/>
-          <p:nvPr/>
-        </p:nvSpPr>
-        <p:spPr>
-          <a:xfrm>
-            <a:off x="868680" y="1417320"/>
-            <a:ext cx="6675120" cy="3291840"/>
+            <a:endParaRPr lang="en-US" sz="3400" dirty="0"/>
+          </a:p>
+        </p:txBody>
+      </p:sp>
+      <p:sp>
+        <p:nvSpPr>
+          <p:cNvPr id="9" name="Text 7"/>
+          <p:cNvSpPr/>
+          <p:nvPr/>
+        </p:nvSpPr>
+        <p:spPr>
+          <a:xfrm>
+            <a:off x="868680" y="1508760"/>
+            <a:ext cx="6446520" cy="2926080"/>
           </a:xfrm>
           <a:prstGeom prst="rect">
             <a:avLst/>
@@ -8754,7 +9222,7 @@
           <a:lstStyle/>
           <a:p>
             <a:r>
-              <a:rPr lang="en-US" sz="1700" dirty="0">
+              <a:rPr lang="en-US" sz="2100" dirty="0">
                 <a:solidFill>
                   <a:srgbClr val="17364A"/>
                 </a:solidFill>
@@ -8762,13 +9230,13 @@
                 <a:ea typeface="Aptos" pitchFamily="34" charset="-122"/>
                 <a:cs typeface="Aptos" pitchFamily="34" charset="-120"/>
               </a:rPr>
-              <a:t>AI use case intake is the structured process of receiving, describing, screening, and routing ideas for AI-supported work before a tool is.</a:t>
-            </a:r>
-            <a:endParaRPr lang="en-US" sz="1700" dirty="0"/>
-          </a:p>
-          <a:p>
-            <a:r>
-              <a:rPr lang="en-US" sz="1700" dirty="0">
+              <a:t>AI use case intake is the structured process of receiving, describing, screening, and routing ideas for.</a:t>
+            </a:r>
+            <a:endParaRPr lang="en-US" sz="2100" dirty="0"/>
+          </a:p>
+          <a:p>
+            <a:r>
+              <a:rPr lang="en-US" sz="2100" dirty="0">
                 <a:solidFill>
                   <a:srgbClr val="17364A"/>
                 </a:solidFill>
@@ -8776,13 +9244,13 @@
                 <a:ea typeface="Aptos" pitchFamily="34" charset="-122"/>
                 <a:cs typeface="Aptos" pitchFamily="34" charset="-120"/>
               </a:rPr>
-              <a:t>In public health, this step is essential because AI ideas often begin as informal suggestions to save time, summarize information, automate a task,.</a:t>
-            </a:r>
-            <a:endParaRPr lang="en-US" sz="1700" dirty="0"/>
-          </a:p>
-          <a:p>
-            <a:r>
-              <a:rPr lang="en-US" sz="1700" dirty="0">
+              <a:t>In public health, this step is essential because AI ideas often begin as informal suggestions to save time,.</a:t>
+            </a:r>
+            <a:endParaRPr lang="en-US" sz="2100" dirty="0"/>
+          </a:p>
+          <a:p>
+            <a:r>
+              <a:rPr lang="en-US" sz="2100" dirty="0">
                 <a:solidFill>
                   <a:srgbClr val="17364A"/>
                 </a:solidFill>
@@ -8790,29 +9258,15 @@
                 <a:ea typeface="Aptos" pitchFamily="34" charset="-122"/>
                 <a:cs typeface="Aptos" pitchFamily="34" charset="-120"/>
               </a:rPr>
-              <a:t>Without a common intake process, agencies may approve low-value or high-risk ideas too quickly while overlooking use cases that could improve.</a:t>
-            </a:r>
-            <a:endParaRPr lang="en-US" sz="1700" dirty="0"/>
-          </a:p>
-          <a:p>
-            <a:r>
-              <a:rPr lang="en-US" sz="1700" dirty="0">
-                <a:solidFill>
-                  <a:srgbClr val="17364A"/>
-                </a:solidFill>
-                <a:latin typeface="Aptos" pitchFamily="34" charset="0"/>
-                <a:ea typeface="Aptos" pitchFamily="34" charset="-122"/>
-                <a:cs typeface="Aptos" pitchFamily="34" charset="-120"/>
-              </a:rPr>
-              <a:t>This module teaches learners how to describe a potential AI use case in operational terms, identify the data involved, assess the level of risk, and.</a:t>
-            </a:r>
-            <a:endParaRPr lang="en-US" sz="1700" dirty="0"/>
-          </a:p>
-        </p:txBody>
-      </p:sp>
-      <p:sp>
-        <p:nvSpPr>
-          <p:cNvPr id="9" name="Shape 7"/>
+              <a:t>Without a common intake process, agencies may approve low-value or high-risk ideas too quickly while overlooking.</a:t>
+            </a:r>
+            <a:endParaRPr lang="en-US" sz="2100" dirty="0"/>
+          </a:p>
+        </p:txBody>
+      </p:sp>
+      <p:sp>
+        <p:nvSpPr>
+          <p:cNvPr id="10" name="Shape 8"/>
           <p:cNvSpPr/>
           <p:nvPr/>
         </p:nvSpPr>
@@ -8839,14 +9293,14 @@
       </p:sp>
       <p:sp>
         <p:nvSpPr>
-          <p:cNvPr id="10" name="Text 8"/>
+          <p:cNvPr id="11" name="Text 9"/>
           <p:cNvSpPr/>
           <p:nvPr/>
         </p:nvSpPr>
         <p:spPr>
           <a:xfrm>
             <a:off x="8074152" y="1563624"/>
-            <a:ext cx="2825496" cy="201168"/>
+            <a:ext cx="2825496" cy="256032"/>
           </a:xfrm>
           <a:prstGeom prst="rect">
             <a:avLst/>
@@ -8862,7 +9316,7 @@
               <a:buNone/>
             </a:pPr>
             <a:r>
-              <a:rPr lang="en-US" sz="950" b="1" dirty="0">
+              <a:rPr lang="en-US" sz="1300" b="1" dirty="0">
                 <a:solidFill>
                   <a:srgbClr val="0068B7"/>
                 </a:solidFill>
@@ -8872,20 +9326,20 @@
               </a:rPr>
               <a:t>Module details</a:t>
             </a:r>
-            <a:endParaRPr lang="en-US" sz="950" dirty="0"/>
-          </a:p>
-        </p:txBody>
-      </p:sp>
-      <p:sp>
-        <p:nvSpPr>
-          <p:cNvPr id="11" name="Text 9"/>
-          <p:cNvSpPr/>
-          <p:nvPr/>
-        </p:nvSpPr>
-        <p:spPr>
-          <a:xfrm>
-            <a:off x="8074152" y="1856232"/>
-            <a:ext cx="2825496" cy="1353312"/>
+            <a:endParaRPr lang="en-US" sz="1300" dirty="0"/>
+          </a:p>
+        </p:txBody>
+      </p:sp>
+      <p:sp>
+        <p:nvSpPr>
+          <p:cNvPr id="12" name="Text 10"/>
+          <p:cNvSpPr/>
+          <p:nvPr/>
+        </p:nvSpPr>
+        <p:spPr>
+          <a:xfrm>
+            <a:off x="8074152" y="1920240"/>
+            <a:ext cx="2825496" cy="1280160"/>
           </a:xfrm>
           <a:prstGeom prst="rect">
             <a:avLst/>
@@ -8903,7 +9357,7 @@
               <a:buNone/>
             </a:pPr>
             <a:r>
-              <a:rPr lang="en-US" sz="1250" dirty="0">
+              <a:rPr lang="en-US" sz="1550" dirty="0">
                 <a:solidFill>
                   <a:srgbClr val="17364A"/>
                 </a:solidFill>
@@ -8913,14 +9367,14 @@
               </a:rPr>
               <a:t>Level: applied/foundational</a:t>
             </a:r>
-            <a:endParaRPr lang="en-US" sz="1250" dirty="0"/>
+            <a:endParaRPr lang="en-US" sz="1550" dirty="0"/>
           </a:p>
           <a:p>
             <a:pPr indent="0" marL="0">
               <a:buNone/>
             </a:pPr>
             <a:r>
-              <a:rPr lang="en-US" sz="1250" dirty="0">
+              <a:rPr lang="en-US" sz="1550" dirty="0">
                 <a:solidFill>
                   <a:srgbClr val="17364A"/>
                 </a:solidFill>
@@ -8930,14 +9384,14 @@
               </a:rPr>
               <a:t>Primary track: Shared Foundational / Introductory Course</a:t>
             </a:r>
-            <a:endParaRPr lang="en-US" sz="1250" dirty="0"/>
+            <a:endParaRPr lang="en-US" sz="1550" dirty="0"/>
           </a:p>
           <a:p>
             <a:pPr indent="0" marL="0">
               <a:buNone/>
             </a:pPr>
             <a:r>
-              <a:rPr lang="en-US" sz="1250" dirty="0">
+              <a:rPr lang="en-US" sz="1550" dirty="0">
                 <a:solidFill>
                   <a:srgbClr val="17364A"/>
                 </a:solidFill>
@@ -8947,32 +9401,32 @@
               </a:rPr>
               <a:t>Appears in tracks: shared-foundational, governance-and-security, program-management, public-health-executive-leadership</a:t>
             </a:r>
-            <a:endParaRPr lang="en-US" sz="1250" dirty="0"/>
-          </a:p>
-        </p:txBody>
-      </p:sp>
-      <p:sp>
-        <p:nvSpPr>
-          <p:cNvPr id="12" name="Shape 10"/>
-          <p:cNvSpPr/>
-          <p:nvPr/>
-        </p:nvSpPr>
-        <p:spPr>
-          <a:xfrm>
-            <a:off x="7909560" y="3611880"/>
-            <a:ext cx="3154680" cy="1783080"/>
+            <a:endParaRPr lang="en-US" sz="1550" dirty="0"/>
+          </a:p>
+        </p:txBody>
+      </p:sp>
+      <p:sp>
+        <p:nvSpPr>
+          <p:cNvPr id="13" name="Shape 11"/>
+          <p:cNvSpPr/>
+          <p:nvPr/>
+        </p:nvSpPr>
+        <p:spPr>
+          <a:xfrm>
+            <a:off x="7635240" y="3730752"/>
+            <a:ext cx="1033272" cy="749808"/>
           </a:xfrm>
           <a:prstGeom prst="roundRect">
             <a:avLst>
-              <a:gd name="adj" fmla="val 6154"/>
+              <a:gd name="adj" fmla="val 14634"/>
             </a:avLst>
           </a:prstGeom>
           <a:solidFill>
-            <a:srgbClr val="EEF8ED"/>
+            <a:srgbClr val="0068B7"/>
           </a:solidFill>
           <a:ln w="12700">
             <a:solidFill>
-              <a:srgbClr val="B9D7E6"/>
+              <a:srgbClr val="0068B7"/>
             </a:solidFill>
             <a:prstDash val="solid"/>
           </a:ln>
@@ -8980,81 +9434,256 @@
       </p:sp>
       <p:sp>
         <p:nvSpPr>
-          <p:cNvPr id="13" name="Text 11"/>
-          <p:cNvSpPr/>
-          <p:nvPr/>
-        </p:nvSpPr>
-        <p:spPr>
-          <a:xfrm>
-            <a:off x="8074152" y="3758184"/>
-            <a:ext cx="2825496" cy="201168"/>
-          </a:xfrm>
-          <a:prstGeom prst="rect">
-            <a:avLst/>
-          </a:prstGeom>
-          <a:noFill/>
-          <a:ln/>
-        </p:spPr>
-        <p:txBody>
-          <a:bodyPr wrap="square" lIns="0" tIns="0" rIns="0" bIns="0" rtlCol="0" anchor="ctr"/>
-          <a:lstStyle/>
-          <a:p>
-            <a:pPr indent="0" marL="0">
-              <a:buNone/>
-            </a:pPr>
-            <a:r>
-              <a:rPr lang="en-US" sz="950" b="1" dirty="0">
-                <a:solidFill>
-                  <a:srgbClr val="0068B7"/>
-                </a:solidFill>
-                <a:latin typeface="Aptos" pitchFamily="34" charset="0"/>
-                <a:ea typeface="Aptos" pitchFamily="34" charset="-122"/>
-                <a:cs typeface="Aptos" pitchFamily="34" charset="-120"/>
-              </a:rPr>
-              <a:t>Learning approach</a:t>
-            </a:r>
-            <a:endParaRPr lang="en-US" sz="950" dirty="0"/>
-          </a:p>
-        </p:txBody>
-      </p:sp>
-      <p:sp>
-        <p:nvSpPr>
           <p:cNvPr id="14" name="Text 12"/>
           <p:cNvSpPr/>
           <p:nvPr/>
         </p:nvSpPr>
         <p:spPr>
           <a:xfrm>
-            <a:off x="8074152" y="4050792"/>
-            <a:ext cx="2825496" cy="1216152"/>
-          </a:xfrm>
-          <a:prstGeom prst="rect">
-            <a:avLst/>
-          </a:prstGeom>
-          <a:noFill/>
-          <a:ln/>
-        </p:spPr>
-        <p:txBody>
-          <a:bodyPr wrap="square" lIns="0" tIns="0" rIns="0" bIns="0" rtlCol="0" anchor="t">
+            <a:off x="7708392" y="3922776"/>
+            <a:ext cx="886968" cy="310896"/>
+          </a:xfrm>
+          <a:prstGeom prst="rect">
+            <a:avLst/>
+          </a:prstGeom>
+          <a:noFill/>
+          <a:ln/>
+        </p:spPr>
+        <p:txBody>
+          <a:bodyPr wrap="square" lIns="0" tIns="0" rIns="0" bIns="0" rtlCol="0" anchor="ctr">
             <a:normAutofit/>
           </a:bodyPr>
           <a:lstStyle/>
           <a:p>
-            <a:pPr indent="0" marL="0">
-              <a:buNone/>
-            </a:pPr>
-            <a:r>
-              <a:rPr lang="en-US" sz="1250" dirty="0">
-                <a:solidFill>
-                  <a:srgbClr val="17364A"/>
-                </a:solidFill>
-                <a:latin typeface="Aptos" pitchFamily="34" charset="0"/>
-                <a:ea typeface="Aptos" pitchFamily="34" charset="-122"/>
-                <a:cs typeface="Aptos" pitchFamily="34" charset="-120"/>
-              </a:rPr>
-              <a:t>Review the core ideas, complete the practical exercise, check your understanding, and use the related plays and tools to apply the lesson.</a:t>
-            </a:r>
-            <a:endParaRPr lang="en-US" sz="1250" dirty="0"/>
+            <a:pPr algn="ctr" indent="0" marL="0">
+              <a:buNone/>
+            </a:pPr>
+            <a:r>
+              <a:rPr lang="en-US" sz="1500" b="1" dirty="0">
+                <a:solidFill>
+                  <a:srgbClr val="FFFFFF"/>
+                </a:solidFill>
+                <a:latin typeface="Aptos" pitchFamily="34" charset="0"/>
+                <a:ea typeface="Aptos" pitchFamily="34" charset="-122"/>
+                <a:cs typeface="Aptos" pitchFamily="34" charset="-120"/>
+              </a:rPr>
+              <a:t>Learn</a:t>
+            </a:r>
+            <a:endParaRPr lang="en-US" sz="1500" dirty="0"/>
+          </a:p>
+        </p:txBody>
+      </p:sp>
+      <p:sp>
+        <p:nvSpPr>
+          <p:cNvPr id="15" name="Text 13"/>
+          <p:cNvSpPr/>
+          <p:nvPr/>
+        </p:nvSpPr>
+        <p:spPr>
+          <a:xfrm>
+            <a:off x="8695944" y="3941064"/>
+            <a:ext cx="201168" cy="256032"/>
+          </a:xfrm>
+          <a:prstGeom prst="rect">
+            <a:avLst/>
+          </a:prstGeom>
+          <a:noFill/>
+          <a:ln/>
+        </p:spPr>
+        <p:txBody>
+          <a:bodyPr wrap="square" lIns="0" tIns="0" rIns="0" bIns="0" rtlCol="0" anchor="ctr"/>
+          <a:lstStyle/>
+          <a:p>
+            <a:pPr algn="ctr" indent="0" marL="0">
+              <a:buNone/>
+            </a:pPr>
+            <a:r>
+              <a:rPr lang="en-US" sz="1800" b="1" dirty="0">
+                <a:solidFill>
+                  <a:srgbClr val="0068B7"/>
+                </a:solidFill>
+                <a:latin typeface="Aptos" pitchFamily="34" charset="0"/>
+                <a:ea typeface="Aptos" pitchFamily="34" charset="-122"/>
+                <a:cs typeface="Aptos" pitchFamily="34" charset="-120"/>
+              </a:rPr>
+              <a:t>â†’</a:t>
+            </a:r>
+            <a:endParaRPr lang="en-US" sz="1800" dirty="0"/>
+          </a:p>
+        </p:txBody>
+      </p:sp>
+      <p:sp>
+        <p:nvSpPr>
+          <p:cNvPr id="16" name="Shape 14"/>
+          <p:cNvSpPr/>
+          <p:nvPr/>
+        </p:nvSpPr>
+        <p:spPr>
+          <a:xfrm>
+            <a:off x="8924544" y="3730752"/>
+            <a:ext cx="1033272" cy="749808"/>
+          </a:xfrm>
+          <a:prstGeom prst="roundRect">
+            <a:avLst>
+              <a:gd name="adj" fmla="val 14634"/>
+            </a:avLst>
+          </a:prstGeom>
+          <a:solidFill>
+            <a:srgbClr val="2F8A28"/>
+          </a:solidFill>
+          <a:ln w="12700">
+            <a:solidFill>
+              <a:srgbClr val="2F8A28"/>
+            </a:solidFill>
+            <a:prstDash val="solid"/>
+          </a:ln>
+        </p:spPr>
+      </p:sp>
+      <p:sp>
+        <p:nvSpPr>
+          <p:cNvPr id="17" name="Text 15"/>
+          <p:cNvSpPr/>
+          <p:nvPr/>
+        </p:nvSpPr>
+        <p:spPr>
+          <a:xfrm>
+            <a:off x="8997696" y="3922776"/>
+            <a:ext cx="886968" cy="310896"/>
+          </a:xfrm>
+          <a:prstGeom prst="rect">
+            <a:avLst/>
+          </a:prstGeom>
+          <a:noFill/>
+          <a:ln/>
+        </p:spPr>
+        <p:txBody>
+          <a:bodyPr wrap="square" lIns="0" tIns="0" rIns="0" bIns="0" rtlCol="0" anchor="ctr">
+            <a:normAutofit/>
+          </a:bodyPr>
+          <a:lstStyle/>
+          <a:p>
+            <a:pPr algn="ctr" indent="0" marL="0">
+              <a:buNone/>
+            </a:pPr>
+            <a:r>
+              <a:rPr lang="en-US" sz="1500" b="1" dirty="0">
+                <a:solidFill>
+                  <a:srgbClr val="FFFFFF"/>
+                </a:solidFill>
+                <a:latin typeface="Aptos" pitchFamily="34" charset="0"/>
+                <a:ea typeface="Aptos" pitchFamily="34" charset="-122"/>
+                <a:cs typeface="Aptos" pitchFamily="34" charset="-120"/>
+              </a:rPr>
+              <a:t>Apply</a:t>
+            </a:r>
+            <a:endParaRPr lang="en-US" sz="1500" dirty="0"/>
+          </a:p>
+        </p:txBody>
+      </p:sp>
+      <p:sp>
+        <p:nvSpPr>
+          <p:cNvPr id="18" name="Text 16"/>
+          <p:cNvSpPr/>
+          <p:nvPr/>
+        </p:nvSpPr>
+        <p:spPr>
+          <a:xfrm>
+            <a:off x="9985248" y="3941064"/>
+            <a:ext cx="201168" cy="256032"/>
+          </a:xfrm>
+          <a:prstGeom prst="rect">
+            <a:avLst/>
+          </a:prstGeom>
+          <a:noFill/>
+          <a:ln/>
+        </p:spPr>
+        <p:txBody>
+          <a:bodyPr wrap="square" lIns="0" tIns="0" rIns="0" bIns="0" rtlCol="0" anchor="ctr"/>
+          <a:lstStyle/>
+          <a:p>
+            <a:pPr algn="ctr" indent="0" marL="0">
+              <a:buNone/>
+            </a:pPr>
+            <a:r>
+              <a:rPr lang="en-US" sz="1800" b="1" dirty="0">
+                <a:solidFill>
+                  <a:srgbClr val="0068B7"/>
+                </a:solidFill>
+                <a:latin typeface="Aptos" pitchFamily="34" charset="0"/>
+                <a:ea typeface="Aptos" pitchFamily="34" charset="-122"/>
+                <a:cs typeface="Aptos" pitchFamily="34" charset="-120"/>
+              </a:rPr>
+              <a:t>â†’</a:t>
+            </a:r>
+            <a:endParaRPr lang="en-US" sz="1800" dirty="0"/>
+          </a:p>
+        </p:txBody>
+      </p:sp>
+      <p:sp>
+        <p:nvSpPr>
+          <p:cNvPr id="19" name="Shape 17"/>
+          <p:cNvSpPr/>
+          <p:nvPr/>
+        </p:nvSpPr>
+        <p:spPr>
+          <a:xfrm>
+            <a:off x="10213848" y="3730752"/>
+            <a:ext cx="1033272" cy="749808"/>
+          </a:xfrm>
+          <a:prstGeom prst="roundRect">
+            <a:avLst>
+              <a:gd name="adj" fmla="val 14634"/>
+            </a:avLst>
+          </a:prstGeom>
+          <a:solidFill>
+            <a:srgbClr val="6A4CA3"/>
+          </a:solidFill>
+          <a:ln w="12700">
+            <a:solidFill>
+              <a:srgbClr val="6A4CA3"/>
+            </a:solidFill>
+            <a:prstDash val="solid"/>
+          </a:ln>
+        </p:spPr>
+      </p:sp>
+      <p:sp>
+        <p:nvSpPr>
+          <p:cNvPr id="20" name="Text 18"/>
+          <p:cNvSpPr/>
+          <p:nvPr/>
+        </p:nvSpPr>
+        <p:spPr>
+          <a:xfrm>
+            <a:off x="10287000" y="3922776"/>
+            <a:ext cx="886968" cy="310896"/>
+          </a:xfrm>
+          <a:prstGeom prst="rect">
+            <a:avLst/>
+          </a:prstGeom>
+          <a:noFill/>
+          <a:ln/>
+        </p:spPr>
+        <p:txBody>
+          <a:bodyPr wrap="square" lIns="0" tIns="0" rIns="0" bIns="0" rtlCol="0" anchor="ctr">
+            <a:normAutofit/>
+          </a:bodyPr>
+          <a:lstStyle/>
+          <a:p>
+            <a:pPr algn="ctr" indent="0" marL="0">
+              <a:buNone/>
+            </a:pPr>
+            <a:r>
+              <a:rPr lang="en-US" sz="1500" b="1" dirty="0">
+                <a:solidFill>
+                  <a:srgbClr val="FFFFFF"/>
+                </a:solidFill>
+                <a:latin typeface="Aptos" pitchFamily="34" charset="0"/>
+                <a:ea typeface="Aptos" pitchFamily="34" charset="-122"/>
+                <a:cs typeface="Aptos" pitchFamily="34" charset="-120"/>
+              </a:rPr>
+              <a:t>Document</a:t>
+            </a:r>
+            <a:endParaRPr lang="en-US" sz="1500" dirty="0"/>
           </a:p>
         </p:txBody>
       </p:sp>
@@ -9251,7 +9880,7 @@
                 <a:ea typeface="Aptos" pitchFamily="34" charset="-122"/>
                 <a:cs typeface="Aptos" pitchFamily="34" charset="-120"/>
               </a:rPr>
-              <a:t>© Paula Soper</a:t>
+              <a:t>Â© Paula Soper</a:t>
             </a:r>
             <a:endParaRPr lang="en-US" sz="800" dirty="0"/>
           </a:p>
@@ -9259,7 +9888,46 @@
       </p:sp>
       <p:sp>
         <p:nvSpPr>
-          <p:cNvPr id="7" name="Shape 5"/>
+          <p:cNvPr id="7" name="Text 5"/>
+          <p:cNvSpPr/>
+          <p:nvPr/>
+        </p:nvSpPr>
+        <p:spPr>
+          <a:xfrm>
+            <a:off x="11137392" y="6510528"/>
+            <a:ext cx="411480" cy="201168"/>
+          </a:xfrm>
+          <a:prstGeom prst="rect">
+            <a:avLst/>
+          </a:prstGeom>
+          <a:noFill/>
+          <a:ln/>
+        </p:spPr>
+        <p:txBody>
+          <a:bodyPr wrap="square" lIns="0" tIns="0" rIns="0" bIns="0" rtlCol="0" anchor="ctr"/>
+          <a:lstStyle/>
+          <a:p>
+            <a:pPr algn="r" indent="0" marL="0">
+              <a:buNone/>
+            </a:pPr>
+            <a:r>
+              <a:rPr lang="en-US" sz="900" dirty="0">
+                <a:solidFill>
+                  <a:srgbClr val="5F7181"/>
+                </a:solidFill>
+                <a:latin typeface="Aptos" pitchFamily="34" charset="0"/>
+                <a:ea typeface="Aptos" pitchFamily="34" charset="-122"/>
+                <a:cs typeface="Aptos" pitchFamily="34" charset="-120"/>
+              </a:rPr>
+              <a:t>20</a:t>
+            </a:r>
+            <a:endParaRPr lang="en-US" sz="900" dirty="0"/>
+          </a:p>
+        </p:txBody>
+      </p:sp>
+      <p:sp>
+        <p:nvSpPr>
+          <p:cNvPr id="8" name="Shape 6"/>
           <p:cNvSpPr/>
           <p:nvPr/>
         </p:nvSpPr>
@@ -9284,7 +9952,7 @@
       </p:sp>
       <p:sp>
         <p:nvSpPr>
-          <p:cNvPr id="8" name="Text 6"/>
+          <p:cNvPr id="9" name="Text 7"/>
           <p:cNvSpPr/>
           <p:nvPr/>
         </p:nvSpPr>
@@ -9323,14 +9991,14 @@
       </p:sp>
       <p:sp>
         <p:nvSpPr>
-          <p:cNvPr id="9" name="Text 7"/>
+          <p:cNvPr id="10" name="Text 8"/>
           <p:cNvSpPr/>
           <p:nvPr/>
         </p:nvSpPr>
         <p:spPr>
           <a:xfrm>
             <a:off x="640080" y="621792"/>
-            <a:ext cx="10881360" cy="566928"/>
+            <a:ext cx="10881360" cy="713232"/>
           </a:xfrm>
           <a:prstGeom prst="rect">
             <a:avLst/>
@@ -9348,7 +10016,7 @@
               <a:buNone/>
             </a:pPr>
             <a:r>
-              <a:rPr lang="en-US" sz="2700" b="1" dirty="0">
+              <a:rPr lang="en-US" sz="3400" b="1" dirty="0">
                 <a:solidFill>
                   <a:srgbClr val="003A63"/>
                 </a:solidFill>
@@ -9358,20 +10026,20 @@
               </a:rPr>
               <a:t>Expected Assignment</a:t>
             </a:r>
-            <a:endParaRPr lang="en-US" sz="2700" dirty="0"/>
-          </a:p>
-        </p:txBody>
-      </p:sp>
-      <p:sp>
-        <p:nvSpPr>
-          <p:cNvPr id="10" name="Text 8"/>
-          <p:cNvSpPr/>
-          <p:nvPr/>
-        </p:nvSpPr>
-        <p:spPr>
-          <a:xfrm>
-            <a:off x="868680" y="1417320"/>
-            <a:ext cx="6675120" cy="4434840"/>
+            <a:endParaRPr lang="en-US" sz="3400" dirty="0"/>
+          </a:p>
+        </p:txBody>
+      </p:sp>
+      <p:sp>
+        <p:nvSpPr>
+          <p:cNvPr id="11" name="Text 9"/>
+          <p:cNvSpPr/>
+          <p:nvPr/>
+        </p:nvSpPr>
+        <p:spPr>
+          <a:xfrm>
+            <a:off x="868680" y="1508760"/>
+            <a:ext cx="6537960" cy="4160520"/>
           </a:xfrm>
           <a:prstGeom prst="rect">
             <a:avLst/>
@@ -9386,7 +10054,7 @@
           <a:lstStyle/>
           <a:p>
             <a:r>
-              <a:rPr lang="en-US" sz="1700" dirty="0">
+              <a:rPr lang="en-US" sz="2100" dirty="0">
                 <a:solidFill>
                   <a:srgbClr val="17364A"/>
                 </a:solidFill>
@@ -9396,11 +10064,11 @@
               </a:rPr>
               <a:t>Completed AI use case intake worksheet</a:t>
             </a:r>
-            <a:endParaRPr lang="en-US" sz="1700" dirty="0"/>
-          </a:p>
-          <a:p>
-            <a:r>
-              <a:rPr lang="en-US" sz="1700" dirty="0">
+            <a:endParaRPr lang="en-US" sz="2100" dirty="0"/>
+          </a:p>
+          <a:p>
+            <a:r>
+              <a:rPr lang="en-US" sz="2100" dirty="0">
                 <a:solidFill>
                   <a:srgbClr val="17364A"/>
                 </a:solidFill>
@@ -9410,11 +10078,11 @@
               </a:rPr>
               <a:t>Risk and readiness triage decision</a:t>
             </a:r>
-            <a:endParaRPr lang="en-US" sz="1700" dirty="0"/>
-          </a:p>
-          <a:p>
-            <a:r>
-              <a:rPr lang="en-US" sz="1700" dirty="0">
+            <a:endParaRPr lang="en-US" sz="2100" dirty="0"/>
+          </a:p>
+          <a:p>
+            <a:r>
+              <a:rPr lang="en-US" sz="2100" dirty="0">
                 <a:solidFill>
                   <a:srgbClr val="17364A"/>
                 </a:solidFill>
@@ -9424,27 +10092,13 @@
               </a:rPr>
               <a:t>List of required reviewers and next steps</a:t>
             </a:r>
-            <a:endParaRPr lang="en-US" sz="1700" dirty="0"/>
-          </a:p>
-          <a:p>
-            <a:r>
-              <a:rPr lang="en-US" sz="1700" dirty="0">
-                <a:solidFill>
-                  <a:srgbClr val="17364A"/>
-                </a:solidFill>
-                <a:latin typeface="Aptos" pitchFamily="34" charset="0"/>
-                <a:ea typeface="Aptos" pitchFamily="34" charset="-122"/>
-                <a:cs typeface="Aptos" pitchFamily="34" charset="-120"/>
-              </a:rPr>
-              <a:t>Documented rationale for proceeding, deferring, redesigning, or rejecting the use case</a:t>
-            </a:r>
-            <a:endParaRPr lang="en-US" sz="1700" dirty="0"/>
-          </a:p>
-        </p:txBody>
-      </p:sp>
-      <p:sp>
-        <p:nvSpPr>
-          <p:cNvPr id="11" name="Shape 9"/>
+            <a:endParaRPr lang="en-US" sz="2100" dirty="0"/>
+          </a:p>
+        </p:txBody>
+      </p:sp>
+      <p:sp>
+        <p:nvSpPr>
+          <p:cNvPr id="12" name="Shape 10"/>
           <p:cNvSpPr/>
           <p:nvPr/>
         </p:nvSpPr>
@@ -9471,14 +10125,14 @@
       </p:sp>
       <p:sp>
         <p:nvSpPr>
-          <p:cNvPr id="12" name="Text 10"/>
+          <p:cNvPr id="13" name="Text 11"/>
           <p:cNvSpPr/>
           <p:nvPr/>
         </p:nvSpPr>
         <p:spPr>
           <a:xfrm>
             <a:off x="8074152" y="1563624"/>
-            <a:ext cx="2825496" cy="201168"/>
+            <a:ext cx="2825496" cy="256032"/>
           </a:xfrm>
           <a:prstGeom prst="rect">
             <a:avLst/>
@@ -9494,7 +10148,7 @@
               <a:buNone/>
             </a:pPr>
             <a:r>
-              <a:rPr lang="en-US" sz="950" b="1" dirty="0">
+              <a:rPr lang="en-US" sz="1300" b="1" dirty="0">
                 <a:solidFill>
                   <a:srgbClr val="0068B7"/>
                 </a:solidFill>
@@ -9504,20 +10158,20 @@
               </a:rPr>
               <a:t>Key idea</a:t>
             </a:r>
-            <a:endParaRPr lang="en-US" sz="950" dirty="0"/>
-          </a:p>
-        </p:txBody>
-      </p:sp>
-      <p:sp>
-        <p:nvSpPr>
-          <p:cNvPr id="13" name="Text 11"/>
-          <p:cNvSpPr/>
-          <p:nvPr/>
-        </p:nvSpPr>
-        <p:spPr>
-          <a:xfrm>
-            <a:off x="8074152" y="1856232"/>
-            <a:ext cx="2825496" cy="1261872"/>
+            <a:endParaRPr lang="en-US" sz="1300" dirty="0"/>
+          </a:p>
+        </p:txBody>
+      </p:sp>
+      <p:sp>
+        <p:nvSpPr>
+          <p:cNvPr id="14" name="Text 12"/>
+          <p:cNvSpPr/>
+          <p:nvPr/>
+        </p:nvSpPr>
+        <p:spPr>
+          <a:xfrm>
+            <a:off x="8074152" y="1920240"/>
+            <a:ext cx="2825496" cy="1188720"/>
           </a:xfrm>
           <a:prstGeom prst="rect">
             <a:avLst/>
@@ -9535,7 +10189,7 @@
               <a:buNone/>
             </a:pPr>
             <a:r>
-              <a:rPr lang="en-US" sz="1250" dirty="0">
+              <a:rPr lang="en-US" sz="1550" dirty="0">
                 <a:solidFill>
                   <a:srgbClr val="17364A"/>
                 </a:solidFill>
@@ -9545,13 +10199,13 @@
               </a:rPr>
               <a:t>Completed AI use case intake worksheet</a:t>
             </a:r>
-            <a:endParaRPr lang="en-US" sz="1250" dirty="0"/>
-          </a:p>
-        </p:txBody>
-      </p:sp>
-      <p:sp>
-        <p:nvSpPr>
-          <p:cNvPr id="14" name="Shape 12"/>
+            <a:endParaRPr lang="en-US" sz="1550" dirty="0"/>
+          </a:p>
+        </p:txBody>
+      </p:sp>
+      <p:sp>
+        <p:nvSpPr>
+          <p:cNvPr id="15" name="Shape 13"/>
           <p:cNvSpPr/>
           <p:nvPr/>
         </p:nvSpPr>
@@ -9578,14 +10232,14 @@
       </p:sp>
       <p:sp>
         <p:nvSpPr>
-          <p:cNvPr id="15" name="Text 13"/>
+          <p:cNvPr id="16" name="Text 14"/>
           <p:cNvSpPr/>
           <p:nvPr/>
         </p:nvSpPr>
         <p:spPr>
           <a:xfrm>
             <a:off x="8074152" y="3666744"/>
-            <a:ext cx="2825496" cy="201168"/>
+            <a:ext cx="2825496" cy="256032"/>
           </a:xfrm>
           <a:prstGeom prst="rect">
             <a:avLst/>
@@ -9601,7 +10255,7 @@
               <a:buNone/>
             </a:pPr>
             <a:r>
-              <a:rPr lang="en-US" sz="950" b="1" dirty="0">
+              <a:rPr lang="en-US" sz="1300" b="1" dirty="0">
                 <a:solidFill>
                   <a:srgbClr val="0068B7"/>
                 </a:solidFill>
@@ -9611,20 +10265,20 @@
               </a:rPr>
               <a:t>Use this for</a:t>
             </a:r>
-            <a:endParaRPr lang="en-US" sz="950" dirty="0"/>
-          </a:p>
-        </p:txBody>
-      </p:sp>
-      <p:sp>
-        <p:nvSpPr>
-          <p:cNvPr id="16" name="Text 14"/>
-          <p:cNvSpPr/>
-          <p:nvPr/>
-        </p:nvSpPr>
-        <p:spPr>
-          <a:xfrm>
-            <a:off x="8074152" y="3959352"/>
-            <a:ext cx="2825496" cy="1170432"/>
+            <a:endParaRPr lang="en-US" sz="1300" dirty="0"/>
+          </a:p>
+        </p:txBody>
+      </p:sp>
+      <p:sp>
+        <p:nvSpPr>
+          <p:cNvPr id="17" name="Text 15"/>
+          <p:cNvSpPr/>
+          <p:nvPr/>
+        </p:nvSpPr>
+        <p:spPr>
+          <a:xfrm>
+            <a:off x="8074152" y="4023360"/>
+            <a:ext cx="2825496" cy="1097280"/>
           </a:xfrm>
           <a:prstGeom prst="rect">
             <a:avLst/>
@@ -9642,7 +10296,7 @@
               <a:buNone/>
             </a:pPr>
             <a:r>
-              <a:rPr lang="en-US" sz="1250" dirty="0">
+              <a:rPr lang="en-US" sz="1550" dirty="0">
                 <a:solidFill>
                   <a:srgbClr val="17364A"/>
                 </a:solidFill>
@@ -9652,7 +10306,7 @@
               </a:rPr>
               <a:t>Connect the concept to public health decisions, safeguards, documentation, or implementation work.</a:t>
             </a:r>
-            <a:endParaRPr lang="en-US" sz="1250" dirty="0"/>
+            <a:endParaRPr lang="en-US" sz="1550" dirty="0"/>
           </a:p>
         </p:txBody>
       </p:sp>
@@ -9849,7 +10503,7 @@
                 <a:ea typeface="Aptos" pitchFamily="34" charset="-122"/>
                 <a:cs typeface="Aptos" pitchFamily="34" charset="-120"/>
               </a:rPr>
-              <a:t>© Paula Soper</a:t>
+              <a:t>Â© Paula Soper</a:t>
             </a:r>
             <a:endParaRPr lang="en-US" sz="800" dirty="0"/>
           </a:p>
@@ -9857,7 +10511,46 @@
       </p:sp>
       <p:sp>
         <p:nvSpPr>
-          <p:cNvPr id="7" name="Shape 5"/>
+          <p:cNvPr id="7" name="Text 5"/>
+          <p:cNvSpPr/>
+          <p:nvPr/>
+        </p:nvSpPr>
+        <p:spPr>
+          <a:xfrm>
+            <a:off x="11137392" y="6510528"/>
+            <a:ext cx="411480" cy="201168"/>
+          </a:xfrm>
+          <a:prstGeom prst="rect">
+            <a:avLst/>
+          </a:prstGeom>
+          <a:noFill/>
+          <a:ln/>
+        </p:spPr>
+        <p:txBody>
+          <a:bodyPr wrap="square" lIns="0" tIns="0" rIns="0" bIns="0" rtlCol="0" anchor="ctr"/>
+          <a:lstStyle/>
+          <a:p>
+            <a:pPr algn="r" indent="0" marL="0">
+              <a:buNone/>
+            </a:pPr>
+            <a:r>
+              <a:rPr lang="en-US" sz="900" dirty="0">
+                <a:solidFill>
+                  <a:srgbClr val="5F7181"/>
+                </a:solidFill>
+                <a:latin typeface="Aptos" pitchFamily="34" charset="0"/>
+                <a:ea typeface="Aptos" pitchFamily="34" charset="-122"/>
+                <a:cs typeface="Aptos" pitchFamily="34" charset="-120"/>
+              </a:rPr>
+              <a:t>21</a:t>
+            </a:r>
+            <a:endParaRPr lang="en-US" sz="900" dirty="0"/>
+          </a:p>
+        </p:txBody>
+      </p:sp>
+      <p:sp>
+        <p:nvSpPr>
+          <p:cNvPr id="8" name="Shape 6"/>
           <p:cNvSpPr/>
           <p:nvPr/>
         </p:nvSpPr>
@@ -9882,7 +10575,7 @@
       </p:sp>
       <p:sp>
         <p:nvSpPr>
-          <p:cNvPr id="8" name="Text 6"/>
+          <p:cNvPr id="9" name="Text 7"/>
           <p:cNvSpPr/>
           <p:nvPr/>
         </p:nvSpPr>
@@ -9921,14 +10614,14 @@
       </p:sp>
       <p:sp>
         <p:nvSpPr>
-          <p:cNvPr id="9" name="Text 7"/>
+          <p:cNvPr id="10" name="Text 8"/>
           <p:cNvSpPr/>
           <p:nvPr/>
         </p:nvSpPr>
         <p:spPr>
           <a:xfrm>
             <a:off x="640080" y="621792"/>
-            <a:ext cx="10881360" cy="566928"/>
+            <a:ext cx="10881360" cy="713232"/>
           </a:xfrm>
           <a:prstGeom prst="rect">
             <a:avLst/>
@@ -9946,7 +10639,7 @@
               <a:buNone/>
             </a:pPr>
             <a:r>
-              <a:rPr lang="en-US" sz="2700" b="1" dirty="0">
+              <a:rPr lang="en-US" sz="3400" b="1" dirty="0">
                 <a:solidFill>
                   <a:srgbClr val="003A63"/>
                 </a:solidFill>
@@ -9956,20 +10649,20 @@
               </a:rPr>
               <a:t>Knowledge Check</a:t>
             </a:r>
-            <a:endParaRPr lang="en-US" sz="2700" dirty="0"/>
-          </a:p>
-        </p:txBody>
-      </p:sp>
-      <p:sp>
-        <p:nvSpPr>
-          <p:cNvPr id="10" name="Text 8"/>
-          <p:cNvSpPr/>
-          <p:nvPr/>
-        </p:nvSpPr>
-        <p:spPr>
-          <a:xfrm>
-            <a:off x="868680" y="1417320"/>
-            <a:ext cx="6675120" cy="4434840"/>
+            <a:endParaRPr lang="en-US" sz="3400" dirty="0"/>
+          </a:p>
+        </p:txBody>
+      </p:sp>
+      <p:sp>
+        <p:nvSpPr>
+          <p:cNvPr id="11" name="Text 9"/>
+          <p:cNvSpPr/>
+          <p:nvPr/>
+        </p:nvSpPr>
+        <p:spPr>
+          <a:xfrm>
+            <a:off x="868680" y="1508760"/>
+            <a:ext cx="6537960" cy="4160520"/>
           </a:xfrm>
           <a:prstGeom prst="rect">
             <a:avLst/>
@@ -9984,7 +10677,7 @@
           <a:lstStyle/>
           <a:p>
             <a:r>
-              <a:rPr lang="en-US" sz="1700" dirty="0">
+              <a:rPr lang="en-US" sz="2100" dirty="0">
                 <a:solidFill>
                   <a:srgbClr val="17364A"/>
                 </a:solidFill>
@@ -9994,11 +10687,11 @@
               </a:rPr>
               <a:t>1. What is the main purpose of AI use case intake?</a:t>
             </a:r>
-            <a:endParaRPr lang="en-US" sz="1700" dirty="0"/>
-          </a:p>
-          <a:p>
-            <a:r>
-              <a:rPr lang="en-US" sz="1700" dirty="0">
+            <a:endParaRPr lang="en-US" sz="2100" dirty="0"/>
+          </a:p>
+          <a:p>
+            <a:r>
+              <a:rPr lang="en-US" sz="2100" dirty="0">
                 <a:solidFill>
                   <a:srgbClr val="17364A"/>
                 </a:solidFill>
@@ -10008,11 +10701,11 @@
               </a:rPr>
               <a:t>2. Which proposal should usually receive higher-risk triage?</a:t>
             </a:r>
-            <a:endParaRPr lang="en-US" sz="1700" dirty="0"/>
-          </a:p>
-          <a:p>
-            <a:r>
-              <a:rPr lang="en-US" sz="1700" dirty="0">
+            <a:endParaRPr lang="en-US" sz="2100" dirty="0"/>
+          </a:p>
+          <a:p>
+            <a:r>
+              <a:rPr lang="en-US" sz="2100" dirty="0">
                 <a:solidFill>
                   <a:srgbClr val="17364A"/>
                 </a:solidFill>
@@ -10022,27 +10715,13 @@
               </a:rPr>
               <a:t>3. What should happen when a proposed workflow problem can be solved without AI?</a:t>
             </a:r>
-            <a:endParaRPr lang="en-US" sz="1700" dirty="0"/>
-          </a:p>
-          <a:p>
-            <a:r>
-              <a:rPr lang="en-US" sz="1700" dirty="0">
-                <a:solidFill>
-                  <a:srgbClr val="17364A"/>
-                </a:solidFill>
-                <a:latin typeface="Aptos" pitchFamily="34" charset="0"/>
-                <a:ea typeface="Aptos" pitchFamily="34" charset="-122"/>
-                <a:cs typeface="Aptos" pitchFamily="34" charset="-120"/>
-              </a:rPr>
-              <a:t>4. Which item belongs in an intake worksheet?</a:t>
-            </a:r>
-            <a:endParaRPr lang="en-US" sz="1700" dirty="0"/>
-          </a:p>
-        </p:txBody>
-      </p:sp>
-      <p:sp>
-        <p:nvSpPr>
-          <p:cNvPr id="11" name="Shape 9"/>
+            <a:endParaRPr lang="en-US" sz="2100" dirty="0"/>
+          </a:p>
+        </p:txBody>
+      </p:sp>
+      <p:sp>
+        <p:nvSpPr>
+          <p:cNvPr id="12" name="Shape 10"/>
           <p:cNvSpPr/>
           <p:nvPr/>
         </p:nvSpPr>
@@ -10069,14 +10748,14 @@
       </p:sp>
       <p:sp>
         <p:nvSpPr>
-          <p:cNvPr id="12" name="Text 10"/>
+          <p:cNvPr id="13" name="Text 11"/>
           <p:cNvSpPr/>
           <p:nvPr/>
         </p:nvSpPr>
         <p:spPr>
           <a:xfrm>
             <a:off x="8074152" y="1563624"/>
-            <a:ext cx="2825496" cy="201168"/>
+            <a:ext cx="2825496" cy="256032"/>
           </a:xfrm>
           <a:prstGeom prst="rect">
             <a:avLst/>
@@ -10092,7 +10771,7 @@
               <a:buNone/>
             </a:pPr>
             <a:r>
-              <a:rPr lang="en-US" sz="950" b="1" dirty="0">
+              <a:rPr lang="en-US" sz="1300" b="1" dirty="0">
                 <a:solidFill>
                   <a:srgbClr val="0068B7"/>
                 </a:solidFill>
@@ -10102,20 +10781,20 @@
               </a:rPr>
               <a:t>Key idea</a:t>
             </a:r>
-            <a:endParaRPr lang="en-US" sz="950" dirty="0"/>
-          </a:p>
-        </p:txBody>
-      </p:sp>
-      <p:sp>
-        <p:nvSpPr>
-          <p:cNvPr id="13" name="Text 11"/>
-          <p:cNvSpPr/>
-          <p:nvPr/>
-        </p:nvSpPr>
-        <p:spPr>
-          <a:xfrm>
-            <a:off x="8074152" y="1856232"/>
-            <a:ext cx="2825496" cy="1261872"/>
+            <a:endParaRPr lang="en-US" sz="1300" dirty="0"/>
+          </a:p>
+        </p:txBody>
+      </p:sp>
+      <p:sp>
+        <p:nvSpPr>
+          <p:cNvPr id="14" name="Text 12"/>
+          <p:cNvSpPr/>
+          <p:nvPr/>
+        </p:nvSpPr>
+        <p:spPr>
+          <a:xfrm>
+            <a:off x="8074152" y="1920240"/>
+            <a:ext cx="2825496" cy="1188720"/>
           </a:xfrm>
           <a:prstGeom prst="rect">
             <a:avLst/>
@@ -10133,7 +10812,7 @@
               <a:buNone/>
             </a:pPr>
             <a:r>
-              <a:rPr lang="en-US" sz="1250" dirty="0">
+              <a:rPr lang="en-US" sz="1550" dirty="0">
                 <a:solidFill>
                   <a:srgbClr val="17364A"/>
                 </a:solidFill>
@@ -10143,13 +10822,13 @@
               </a:rPr>
               <a:t>1. What is the main purpose of AI use case intake?</a:t>
             </a:r>
-            <a:endParaRPr lang="en-US" sz="1250" dirty="0"/>
-          </a:p>
-        </p:txBody>
-      </p:sp>
-      <p:sp>
-        <p:nvSpPr>
-          <p:cNvPr id="14" name="Shape 12"/>
+            <a:endParaRPr lang="en-US" sz="1550" dirty="0"/>
+          </a:p>
+        </p:txBody>
+      </p:sp>
+      <p:sp>
+        <p:nvSpPr>
+          <p:cNvPr id="15" name="Shape 13"/>
           <p:cNvSpPr/>
           <p:nvPr/>
         </p:nvSpPr>
@@ -10176,14 +10855,14 @@
       </p:sp>
       <p:sp>
         <p:nvSpPr>
-          <p:cNvPr id="15" name="Text 13"/>
+          <p:cNvPr id="16" name="Text 14"/>
           <p:cNvSpPr/>
           <p:nvPr/>
         </p:nvSpPr>
         <p:spPr>
           <a:xfrm>
             <a:off x="8074152" y="3666744"/>
-            <a:ext cx="2825496" cy="201168"/>
+            <a:ext cx="2825496" cy="256032"/>
           </a:xfrm>
           <a:prstGeom prst="rect">
             <a:avLst/>
@@ -10199,7 +10878,7 @@
               <a:buNone/>
             </a:pPr>
             <a:r>
-              <a:rPr lang="en-US" sz="950" b="1" dirty="0">
+              <a:rPr lang="en-US" sz="1300" b="1" dirty="0">
                 <a:solidFill>
                   <a:srgbClr val="0068B7"/>
                 </a:solidFill>
@@ -10209,20 +10888,20 @@
               </a:rPr>
               <a:t>Use this for</a:t>
             </a:r>
-            <a:endParaRPr lang="en-US" sz="950" dirty="0"/>
-          </a:p>
-        </p:txBody>
-      </p:sp>
-      <p:sp>
-        <p:nvSpPr>
-          <p:cNvPr id="16" name="Text 14"/>
-          <p:cNvSpPr/>
-          <p:nvPr/>
-        </p:nvSpPr>
-        <p:spPr>
-          <a:xfrm>
-            <a:off x="8074152" y="3959352"/>
-            <a:ext cx="2825496" cy="1170432"/>
+            <a:endParaRPr lang="en-US" sz="1300" dirty="0"/>
+          </a:p>
+        </p:txBody>
+      </p:sp>
+      <p:sp>
+        <p:nvSpPr>
+          <p:cNvPr id="17" name="Text 15"/>
+          <p:cNvSpPr/>
+          <p:nvPr/>
+        </p:nvSpPr>
+        <p:spPr>
+          <a:xfrm>
+            <a:off x="8074152" y="4023360"/>
+            <a:ext cx="2825496" cy="1097280"/>
           </a:xfrm>
           <a:prstGeom prst="rect">
             <a:avLst/>
@@ -10240,7 +10919,7 @@
               <a:buNone/>
             </a:pPr>
             <a:r>
-              <a:rPr lang="en-US" sz="1250" dirty="0">
+              <a:rPr lang="en-US" sz="1550" dirty="0">
                 <a:solidFill>
                   <a:srgbClr val="17364A"/>
                 </a:solidFill>
@@ -10250,7 +10929,7 @@
               </a:rPr>
               <a:t>Connect the concept to public health decisions, safeguards, documentation, or implementation work.</a:t>
             </a:r>
-            <a:endParaRPr lang="en-US" sz="1250" dirty="0"/>
+            <a:endParaRPr lang="en-US" sz="1550" dirty="0"/>
           </a:p>
         </p:txBody>
       </p:sp>
@@ -10447,7 +11126,7 @@
                 <a:ea typeface="Aptos" pitchFamily="34" charset="-122"/>
                 <a:cs typeface="Aptos" pitchFamily="34" charset="-120"/>
               </a:rPr>
-              <a:t>© Paula Soper</a:t>
+              <a:t>Â© Paula Soper</a:t>
             </a:r>
             <a:endParaRPr lang="en-US" sz="800" dirty="0"/>
           </a:p>
@@ -10455,7 +11134,46 @@
       </p:sp>
       <p:sp>
         <p:nvSpPr>
-          <p:cNvPr id="7" name="Shape 5"/>
+          <p:cNvPr id="7" name="Text 5"/>
+          <p:cNvSpPr/>
+          <p:nvPr/>
+        </p:nvSpPr>
+        <p:spPr>
+          <a:xfrm>
+            <a:off x="11137392" y="6510528"/>
+            <a:ext cx="411480" cy="201168"/>
+          </a:xfrm>
+          <a:prstGeom prst="rect">
+            <a:avLst/>
+          </a:prstGeom>
+          <a:noFill/>
+          <a:ln/>
+        </p:spPr>
+        <p:txBody>
+          <a:bodyPr wrap="square" lIns="0" tIns="0" rIns="0" bIns="0" rtlCol="0" anchor="ctr"/>
+          <a:lstStyle/>
+          <a:p>
+            <a:pPr algn="r" indent="0" marL="0">
+              <a:buNone/>
+            </a:pPr>
+            <a:r>
+              <a:rPr lang="en-US" sz="900" dirty="0">
+                <a:solidFill>
+                  <a:srgbClr val="5F7181"/>
+                </a:solidFill>
+                <a:latin typeface="Aptos" pitchFamily="34" charset="0"/>
+                <a:ea typeface="Aptos" pitchFamily="34" charset="-122"/>
+                <a:cs typeface="Aptos" pitchFamily="34" charset="-120"/>
+              </a:rPr>
+              <a:t>22</a:t>
+            </a:r>
+            <a:endParaRPr lang="en-US" sz="900" dirty="0"/>
+          </a:p>
+        </p:txBody>
+      </p:sp>
+      <p:sp>
+        <p:nvSpPr>
+          <p:cNvPr id="8" name="Shape 6"/>
           <p:cNvSpPr/>
           <p:nvPr/>
         </p:nvSpPr>
@@ -10480,7 +11198,7 @@
       </p:sp>
       <p:sp>
         <p:nvSpPr>
-          <p:cNvPr id="8" name="Text 6"/>
+          <p:cNvPr id="9" name="Text 7"/>
           <p:cNvSpPr/>
           <p:nvPr/>
         </p:nvSpPr>
@@ -10519,14 +11237,14 @@
       </p:sp>
       <p:sp>
         <p:nvSpPr>
-          <p:cNvPr id="9" name="Text 7"/>
+          <p:cNvPr id="10" name="Text 8"/>
           <p:cNvSpPr/>
           <p:nvPr/>
         </p:nvSpPr>
         <p:spPr>
           <a:xfrm>
             <a:off x="640080" y="621792"/>
-            <a:ext cx="10881360" cy="566928"/>
+            <a:ext cx="10881360" cy="713232"/>
           </a:xfrm>
           <a:prstGeom prst="rect">
             <a:avLst/>
@@ -10544,7 +11262,7 @@
               <a:buNone/>
             </a:pPr>
             <a:r>
-              <a:rPr lang="en-US" sz="2700" b="1" dirty="0">
+              <a:rPr lang="en-US" sz="3400" b="1" dirty="0">
                 <a:solidFill>
                   <a:srgbClr val="003A63"/>
                 </a:solidFill>
@@ -10554,20 +11272,20 @@
               </a:rPr>
               <a:t>References and Resources</a:t>
             </a:r>
-            <a:endParaRPr lang="en-US" sz="2700" dirty="0"/>
-          </a:p>
-        </p:txBody>
-      </p:sp>
-      <p:sp>
-        <p:nvSpPr>
-          <p:cNvPr id="10" name="Text 8"/>
-          <p:cNvSpPr/>
-          <p:nvPr/>
-        </p:nvSpPr>
-        <p:spPr>
-          <a:xfrm>
-            <a:off x="868680" y="1417320"/>
-            <a:ext cx="6675120" cy="4434840"/>
+            <a:endParaRPr lang="en-US" sz="3400" dirty="0"/>
+          </a:p>
+        </p:txBody>
+      </p:sp>
+      <p:sp>
+        <p:nvSpPr>
+          <p:cNvPr id="11" name="Text 9"/>
+          <p:cNvSpPr/>
+          <p:nvPr/>
+        </p:nvSpPr>
+        <p:spPr>
+          <a:xfrm>
+            <a:off x="868680" y="1508760"/>
+            <a:ext cx="6537960" cy="4160520"/>
           </a:xfrm>
           <a:prstGeom prst="rect">
             <a:avLst/>
@@ -10582,7 +11300,7 @@
           <a:lstStyle/>
           <a:p>
             <a:r>
-              <a:rPr lang="en-US" sz="1700" dirty="0">
+              <a:rPr lang="en-US" sz="2100" dirty="0">
                 <a:solidFill>
                   <a:srgbClr val="17364A"/>
                 </a:solidFill>
@@ -10590,13 +11308,13 @@
                 <a:ea typeface="Aptos" pitchFamily="34" charset="-122"/>
                 <a:cs typeface="Aptos" pitchFamily="34" charset="-120"/>
               </a:rPr>
-              <a:t>NIST Artificial Intelligence Risk Management Framework: https://www.nist.gov/itl/ai-risk-management-framework</a:t>
-            </a:r>
-            <a:endParaRPr lang="en-US" sz="1700" dirty="0"/>
-          </a:p>
-          <a:p>
-            <a:r>
-              <a:rPr lang="en-US" sz="1700" dirty="0">
+              <a:t>NIST Artificial Intelligence Risk Management Framework:.</a:t>
+            </a:r>
+            <a:endParaRPr lang="en-US" sz="2100" dirty="0"/>
+          </a:p>
+          <a:p>
+            <a:r>
+              <a:rPr lang="en-US" sz="2100" dirty="0">
                 <a:solidFill>
                   <a:srgbClr val="17364A"/>
                 </a:solidFill>
@@ -10606,11 +11324,11 @@
               </a:rPr>
               <a:t>NIST Generative AI Profile:.</a:t>
             </a:r>
-            <a:endParaRPr lang="en-US" sz="1700" dirty="0"/>
-          </a:p>
-          <a:p>
-            <a:r>
-              <a:rPr lang="en-US" sz="1700" dirty="0">
+            <a:endParaRPr lang="en-US" sz="2100" dirty="0"/>
+          </a:p>
+          <a:p>
+            <a:r>
+              <a:rPr lang="en-US" sz="2100" dirty="0">
                 <a:solidFill>
                   <a:srgbClr val="17364A"/>
                 </a:solidFill>
@@ -10620,27 +11338,13 @@
               </a:rPr>
               <a:t>CDC Public Health Data Strategy and Data Modernization resources:.</a:t>
             </a:r>
-            <a:endParaRPr lang="en-US" sz="1700" dirty="0"/>
-          </a:p>
-          <a:p>
-            <a:r>
-              <a:rPr lang="en-US" sz="1700" dirty="0">
-                <a:solidFill>
-                  <a:srgbClr val="17364A"/>
-                </a:solidFill>
-                <a:latin typeface="Aptos" pitchFamily="34" charset="0"/>
-                <a:ea typeface="Aptos" pitchFamily="34" charset="-122"/>
-                <a:cs typeface="Aptos" pitchFamily="34" charset="-120"/>
-              </a:rPr>
-              <a:t>OWASP guidance for LLM application security</a:t>
-            </a:r>
-            <a:endParaRPr lang="en-US" sz="1700" dirty="0"/>
-          </a:p>
-        </p:txBody>
-      </p:sp>
-      <p:sp>
-        <p:nvSpPr>
-          <p:cNvPr id="11" name="Shape 9"/>
+            <a:endParaRPr lang="en-US" sz="2100" dirty="0"/>
+          </a:p>
+        </p:txBody>
+      </p:sp>
+      <p:sp>
+        <p:nvSpPr>
+          <p:cNvPr id="12" name="Shape 10"/>
           <p:cNvSpPr/>
           <p:nvPr/>
         </p:nvSpPr>
@@ -10667,14 +11371,14 @@
       </p:sp>
       <p:sp>
         <p:nvSpPr>
-          <p:cNvPr id="12" name="Text 10"/>
+          <p:cNvPr id="13" name="Text 11"/>
           <p:cNvSpPr/>
           <p:nvPr/>
         </p:nvSpPr>
         <p:spPr>
           <a:xfrm>
             <a:off x="8074152" y="1563624"/>
-            <a:ext cx="2825496" cy="201168"/>
+            <a:ext cx="2825496" cy="256032"/>
           </a:xfrm>
           <a:prstGeom prst="rect">
             <a:avLst/>
@@ -10690,7 +11394,7 @@
               <a:buNone/>
             </a:pPr>
             <a:r>
-              <a:rPr lang="en-US" sz="950" b="1" dirty="0">
+              <a:rPr lang="en-US" sz="1300" b="1" dirty="0">
                 <a:solidFill>
                   <a:srgbClr val="0068B7"/>
                 </a:solidFill>
@@ -10700,20 +11404,20 @@
               </a:rPr>
               <a:t>Key idea</a:t>
             </a:r>
-            <a:endParaRPr lang="en-US" sz="950" dirty="0"/>
-          </a:p>
-        </p:txBody>
-      </p:sp>
-      <p:sp>
-        <p:nvSpPr>
-          <p:cNvPr id="13" name="Text 11"/>
-          <p:cNvSpPr/>
-          <p:nvPr/>
-        </p:nvSpPr>
-        <p:spPr>
-          <a:xfrm>
-            <a:off x="8074152" y="1856232"/>
-            <a:ext cx="2825496" cy="1261872"/>
+            <a:endParaRPr lang="en-US" sz="1300" dirty="0"/>
+          </a:p>
+        </p:txBody>
+      </p:sp>
+      <p:sp>
+        <p:nvSpPr>
+          <p:cNvPr id="14" name="Text 12"/>
+          <p:cNvSpPr/>
+          <p:nvPr/>
+        </p:nvSpPr>
+        <p:spPr>
+          <a:xfrm>
+            <a:off x="8074152" y="1920240"/>
+            <a:ext cx="2825496" cy="1188720"/>
           </a:xfrm>
           <a:prstGeom prst="rect">
             <a:avLst/>
@@ -10731,7 +11435,7 @@
               <a:buNone/>
             </a:pPr>
             <a:r>
-              <a:rPr lang="en-US" sz="1250" dirty="0">
+              <a:rPr lang="en-US" sz="1550" dirty="0">
                 <a:solidFill>
                   <a:srgbClr val="17364A"/>
                 </a:solidFill>
@@ -10739,15 +11443,15 @@
                 <a:ea typeface="Aptos" pitchFamily="34" charset="-122"/>
                 <a:cs typeface="Aptos" pitchFamily="34" charset="-120"/>
               </a:rPr>
-              <a:t>NIST Artificial Intelligence Risk Management Framework: https://www.nist.gov/itl/ai-risk-management-framework</a:t>
-            </a:r>
-            <a:endParaRPr lang="en-US" sz="1250" dirty="0"/>
-          </a:p>
-        </p:txBody>
-      </p:sp>
-      <p:sp>
-        <p:nvSpPr>
-          <p:cNvPr id="14" name="Shape 12"/>
+              <a:t>NIST Artificial Intelligence Risk Management Framework:.</a:t>
+            </a:r>
+            <a:endParaRPr lang="en-US" sz="1550" dirty="0"/>
+          </a:p>
+        </p:txBody>
+      </p:sp>
+      <p:sp>
+        <p:nvSpPr>
+          <p:cNvPr id="15" name="Shape 13"/>
           <p:cNvSpPr/>
           <p:nvPr/>
         </p:nvSpPr>
@@ -10774,14 +11478,14 @@
       </p:sp>
       <p:sp>
         <p:nvSpPr>
-          <p:cNvPr id="15" name="Text 13"/>
+          <p:cNvPr id="16" name="Text 14"/>
           <p:cNvSpPr/>
           <p:nvPr/>
         </p:nvSpPr>
         <p:spPr>
           <a:xfrm>
             <a:off x="8074152" y="3666744"/>
-            <a:ext cx="2825496" cy="201168"/>
+            <a:ext cx="2825496" cy="256032"/>
           </a:xfrm>
           <a:prstGeom prst="rect">
             <a:avLst/>
@@ -10797,7 +11501,7 @@
               <a:buNone/>
             </a:pPr>
             <a:r>
-              <a:rPr lang="en-US" sz="950" b="1" dirty="0">
+              <a:rPr lang="en-US" sz="1300" b="1" dirty="0">
                 <a:solidFill>
                   <a:srgbClr val="0068B7"/>
                 </a:solidFill>
@@ -10807,20 +11511,20 @@
               </a:rPr>
               <a:t>Use this for</a:t>
             </a:r>
-            <a:endParaRPr lang="en-US" sz="950" dirty="0"/>
-          </a:p>
-        </p:txBody>
-      </p:sp>
-      <p:sp>
-        <p:nvSpPr>
-          <p:cNvPr id="16" name="Text 14"/>
-          <p:cNvSpPr/>
-          <p:nvPr/>
-        </p:nvSpPr>
-        <p:spPr>
-          <a:xfrm>
-            <a:off x="8074152" y="3959352"/>
-            <a:ext cx="2825496" cy="1170432"/>
+            <a:endParaRPr lang="en-US" sz="1300" dirty="0"/>
+          </a:p>
+        </p:txBody>
+      </p:sp>
+      <p:sp>
+        <p:nvSpPr>
+          <p:cNvPr id="17" name="Text 15"/>
+          <p:cNvSpPr/>
+          <p:nvPr/>
+        </p:nvSpPr>
+        <p:spPr>
+          <a:xfrm>
+            <a:off x="8074152" y="4023360"/>
+            <a:ext cx="2825496" cy="1097280"/>
           </a:xfrm>
           <a:prstGeom prst="rect">
             <a:avLst/>
@@ -10838,7 +11542,7 @@
               <a:buNone/>
             </a:pPr>
             <a:r>
-              <a:rPr lang="en-US" sz="1250" dirty="0">
+              <a:rPr lang="en-US" sz="1550" dirty="0">
                 <a:solidFill>
                   <a:srgbClr val="17364A"/>
                 </a:solidFill>
@@ -10848,7 +11552,7 @@
               </a:rPr>
               <a:t>Connect the concept to public health decisions, safeguards, documentation, or implementation work.</a:t>
             </a:r>
-            <a:endParaRPr lang="en-US" sz="1250" dirty="0"/>
+            <a:endParaRPr lang="en-US" sz="1550" dirty="0"/>
           </a:p>
         </p:txBody>
       </p:sp>
@@ -11045,7 +11749,7 @@
                 <a:ea typeface="Aptos" pitchFamily="34" charset="-122"/>
                 <a:cs typeface="Aptos" pitchFamily="34" charset="-120"/>
               </a:rPr>
-              <a:t>© Paula Soper</a:t>
+              <a:t>Â© Paula Soper</a:t>
             </a:r>
             <a:endParaRPr lang="en-US" sz="800" dirty="0"/>
           </a:p>
@@ -11059,8 +11763,47 @@
         </p:nvSpPr>
         <p:spPr>
           <a:xfrm>
+            <a:off x="11137392" y="6510528"/>
+            <a:ext cx="411480" cy="201168"/>
+          </a:xfrm>
+          <a:prstGeom prst="rect">
+            <a:avLst/>
+          </a:prstGeom>
+          <a:noFill/>
+          <a:ln/>
+        </p:spPr>
+        <p:txBody>
+          <a:bodyPr wrap="square" lIns="0" tIns="0" rIns="0" bIns="0" rtlCol="0" anchor="ctr"/>
+          <a:lstStyle/>
+          <a:p>
+            <a:pPr algn="r" indent="0" marL="0">
+              <a:buNone/>
+            </a:pPr>
+            <a:r>
+              <a:rPr lang="en-US" sz="900" dirty="0">
+                <a:solidFill>
+                  <a:srgbClr val="5F7181"/>
+                </a:solidFill>
+                <a:latin typeface="Aptos" pitchFamily="34" charset="0"/>
+                <a:ea typeface="Aptos" pitchFamily="34" charset="-122"/>
+                <a:cs typeface="Aptos" pitchFamily="34" charset="-120"/>
+              </a:rPr>
+              <a:t>23</a:t>
+            </a:r>
+            <a:endParaRPr lang="en-US" sz="900" dirty="0"/>
+          </a:p>
+        </p:txBody>
+      </p:sp>
+      <p:sp>
+        <p:nvSpPr>
+          <p:cNvPr id="8" name="Text 6"/>
+          <p:cNvSpPr/>
+          <p:nvPr/>
+        </p:nvSpPr>
+        <p:spPr>
+          <a:xfrm>
             <a:off x="640080" y="658368"/>
-            <a:ext cx="10881360" cy="566928"/>
+            <a:ext cx="10881360" cy="713232"/>
           </a:xfrm>
           <a:prstGeom prst="rect">
             <a:avLst/>
@@ -11078,7 +11821,7 @@
               <a:buNone/>
             </a:pPr>
             <a:r>
-              <a:rPr lang="en-US" sz="2700" b="1" dirty="0">
+              <a:rPr lang="en-US" sz="3400" b="1" dirty="0">
                 <a:solidFill>
                   <a:srgbClr val="003A63"/>
                 </a:solidFill>
@@ -11088,20 +11831,20 @@
               </a:rPr>
               <a:t>References and Resources Continued</a:t>
             </a:r>
-            <a:endParaRPr lang="en-US" sz="2700" dirty="0"/>
-          </a:p>
-        </p:txBody>
-      </p:sp>
-      <p:sp>
-        <p:nvSpPr>
-          <p:cNvPr id="8" name="Text 6"/>
-          <p:cNvSpPr/>
-          <p:nvPr/>
-        </p:nvSpPr>
-        <p:spPr>
-          <a:xfrm>
-            <a:off x="868680" y="1417320"/>
-            <a:ext cx="6675120" cy="4434840"/>
+            <a:endParaRPr lang="en-US" sz="3400" dirty="0"/>
+          </a:p>
+        </p:txBody>
+      </p:sp>
+      <p:sp>
+        <p:nvSpPr>
+          <p:cNvPr id="9" name="Text 7"/>
+          <p:cNvSpPr/>
+          <p:nvPr/>
+        </p:nvSpPr>
+        <p:spPr>
+          <a:xfrm>
+            <a:off x="868680" y="1508760"/>
+            <a:ext cx="6537960" cy="4160520"/>
           </a:xfrm>
           <a:prstGeom prst="rect">
             <a:avLst/>
@@ -11116,7 +11859,7 @@
           <a:lstStyle/>
           <a:p>
             <a:r>
-              <a:rPr lang="en-US" sz="1700" dirty="0">
+              <a:rPr lang="en-US" sz="2100" dirty="0">
                 <a:solidFill>
                   <a:srgbClr val="17364A"/>
                 </a:solidFill>
@@ -11126,13 +11869,13 @@
               </a:rPr>
               <a:t>Relevant public health program SOPs, data governance documentation, and implementation plans</a:t>
             </a:r>
-            <a:endParaRPr lang="en-US" sz="1700" dirty="0"/>
-          </a:p>
-        </p:txBody>
-      </p:sp>
-      <p:sp>
-        <p:nvSpPr>
-          <p:cNvPr id="9" name="Shape 7"/>
+            <a:endParaRPr lang="en-US" sz="2100" dirty="0"/>
+          </a:p>
+        </p:txBody>
+      </p:sp>
+      <p:sp>
+        <p:nvSpPr>
+          <p:cNvPr id="10" name="Shape 8"/>
           <p:cNvSpPr/>
           <p:nvPr/>
         </p:nvSpPr>
@@ -11159,14 +11902,14 @@
       </p:sp>
       <p:sp>
         <p:nvSpPr>
-          <p:cNvPr id="10" name="Text 8"/>
+          <p:cNvPr id="11" name="Text 9"/>
           <p:cNvSpPr/>
           <p:nvPr/>
         </p:nvSpPr>
         <p:spPr>
           <a:xfrm>
             <a:off x="8074152" y="1563624"/>
-            <a:ext cx="2825496" cy="201168"/>
+            <a:ext cx="2825496" cy="256032"/>
           </a:xfrm>
           <a:prstGeom prst="rect">
             <a:avLst/>
@@ -11182,7 +11925,7 @@
               <a:buNone/>
             </a:pPr>
             <a:r>
-              <a:rPr lang="en-US" sz="950" b="1" dirty="0">
+              <a:rPr lang="en-US" sz="1300" b="1" dirty="0">
                 <a:solidFill>
                   <a:srgbClr val="0068B7"/>
                 </a:solidFill>
@@ -11192,20 +11935,20 @@
               </a:rPr>
               <a:t>Key idea</a:t>
             </a:r>
-            <a:endParaRPr lang="en-US" sz="950" dirty="0"/>
-          </a:p>
-        </p:txBody>
-      </p:sp>
-      <p:sp>
-        <p:nvSpPr>
-          <p:cNvPr id="11" name="Text 9"/>
-          <p:cNvSpPr/>
-          <p:nvPr/>
-        </p:nvSpPr>
-        <p:spPr>
-          <a:xfrm>
-            <a:off x="8074152" y="1856232"/>
-            <a:ext cx="2825496" cy="1261872"/>
+            <a:endParaRPr lang="en-US" sz="1300" dirty="0"/>
+          </a:p>
+        </p:txBody>
+      </p:sp>
+      <p:sp>
+        <p:nvSpPr>
+          <p:cNvPr id="12" name="Text 10"/>
+          <p:cNvSpPr/>
+          <p:nvPr/>
+        </p:nvSpPr>
+        <p:spPr>
+          <a:xfrm>
+            <a:off x="8074152" y="1920240"/>
+            <a:ext cx="2825496" cy="1188720"/>
           </a:xfrm>
           <a:prstGeom prst="rect">
             <a:avLst/>
@@ -11223,7 +11966,7 @@
               <a:buNone/>
             </a:pPr>
             <a:r>
-              <a:rPr lang="en-US" sz="1250" dirty="0">
+              <a:rPr lang="en-US" sz="1550" dirty="0">
                 <a:solidFill>
                   <a:srgbClr val="17364A"/>
                 </a:solidFill>
@@ -11233,13 +11976,13 @@
               </a:rPr>
               <a:t>Relevant public health program SOPs, data governance documentation, and implementation plans</a:t>
             </a:r>
-            <a:endParaRPr lang="en-US" sz="1250" dirty="0"/>
-          </a:p>
-        </p:txBody>
-      </p:sp>
-      <p:sp>
-        <p:nvSpPr>
-          <p:cNvPr id="12" name="Shape 10"/>
+            <a:endParaRPr lang="en-US" sz="1550" dirty="0"/>
+          </a:p>
+        </p:txBody>
+      </p:sp>
+      <p:sp>
+        <p:nvSpPr>
+          <p:cNvPr id="13" name="Shape 11"/>
           <p:cNvSpPr/>
           <p:nvPr/>
         </p:nvSpPr>
@@ -11266,14 +12009,14 @@
       </p:sp>
       <p:sp>
         <p:nvSpPr>
-          <p:cNvPr id="13" name="Text 11"/>
+          <p:cNvPr id="14" name="Text 12"/>
           <p:cNvSpPr/>
           <p:nvPr/>
         </p:nvSpPr>
         <p:spPr>
           <a:xfrm>
             <a:off x="8074152" y="3666744"/>
-            <a:ext cx="2825496" cy="201168"/>
+            <a:ext cx="2825496" cy="256032"/>
           </a:xfrm>
           <a:prstGeom prst="rect">
             <a:avLst/>
@@ -11289,7 +12032,7 @@
               <a:buNone/>
             </a:pPr>
             <a:r>
-              <a:rPr lang="en-US" sz="950" b="1" dirty="0">
+              <a:rPr lang="en-US" sz="1300" b="1" dirty="0">
                 <a:solidFill>
                   <a:srgbClr val="0068B7"/>
                 </a:solidFill>
@@ -11299,20 +12042,20 @@
               </a:rPr>
               <a:t>Use this for</a:t>
             </a:r>
-            <a:endParaRPr lang="en-US" sz="950" dirty="0"/>
-          </a:p>
-        </p:txBody>
-      </p:sp>
-      <p:sp>
-        <p:nvSpPr>
-          <p:cNvPr id="14" name="Text 12"/>
-          <p:cNvSpPr/>
-          <p:nvPr/>
-        </p:nvSpPr>
-        <p:spPr>
-          <a:xfrm>
-            <a:off x="8074152" y="3959352"/>
-            <a:ext cx="2825496" cy="1170432"/>
+            <a:endParaRPr lang="en-US" sz="1300" dirty="0"/>
+          </a:p>
+        </p:txBody>
+      </p:sp>
+      <p:sp>
+        <p:nvSpPr>
+          <p:cNvPr id="15" name="Text 13"/>
+          <p:cNvSpPr/>
+          <p:nvPr/>
+        </p:nvSpPr>
+        <p:spPr>
+          <a:xfrm>
+            <a:off x="8074152" y="4023360"/>
+            <a:ext cx="2825496" cy="1097280"/>
           </a:xfrm>
           <a:prstGeom prst="rect">
             <a:avLst/>
@@ -11330,7 +12073,7 @@
               <a:buNone/>
             </a:pPr>
             <a:r>
-              <a:rPr lang="en-US" sz="1250" dirty="0">
+              <a:rPr lang="en-US" sz="1550" dirty="0">
                 <a:solidFill>
                   <a:srgbClr val="17364A"/>
                 </a:solidFill>
@@ -11340,7 +12083,7 @@
               </a:rPr>
               <a:t>Connect the concept to public health decisions, safeguards, documentation, or implementation work.</a:t>
             </a:r>
-            <a:endParaRPr lang="en-US" sz="1250" dirty="0"/>
+            <a:endParaRPr lang="en-US" sz="1550" dirty="0"/>
           </a:p>
         </p:txBody>
       </p:sp>
@@ -11537,7 +12280,7 @@
                 <a:ea typeface="Aptos" pitchFamily="34" charset="-122"/>
                 <a:cs typeface="Aptos" pitchFamily="34" charset="-120"/>
               </a:rPr>
-              <a:t>© Paula Soper</a:t>
+              <a:t>Â© Paula Soper</a:t>
             </a:r>
             <a:endParaRPr lang="en-US" sz="800" dirty="0"/>
           </a:p>
@@ -11551,8 +12294,47 @@
         </p:nvSpPr>
         <p:spPr>
           <a:xfrm>
+            <a:off x="11137392" y="6510528"/>
+            <a:ext cx="411480" cy="201168"/>
+          </a:xfrm>
+          <a:prstGeom prst="rect">
+            <a:avLst/>
+          </a:prstGeom>
+          <a:noFill/>
+          <a:ln/>
+        </p:spPr>
+        <p:txBody>
+          <a:bodyPr wrap="square" lIns="0" tIns="0" rIns="0" bIns="0" rtlCol="0" anchor="ctr"/>
+          <a:lstStyle/>
+          <a:p>
+            <a:pPr algn="r" indent="0" marL="0">
+              <a:buNone/>
+            </a:pPr>
+            <a:r>
+              <a:rPr lang="en-US" sz="900" dirty="0">
+                <a:solidFill>
+                  <a:srgbClr val="5F7181"/>
+                </a:solidFill>
+                <a:latin typeface="Aptos" pitchFamily="34" charset="0"/>
+                <a:ea typeface="Aptos" pitchFamily="34" charset="-122"/>
+                <a:cs typeface="Aptos" pitchFamily="34" charset="-120"/>
+              </a:rPr>
+              <a:t>3</a:t>
+            </a:r>
+            <a:endParaRPr lang="en-US" sz="900" dirty="0"/>
+          </a:p>
+        </p:txBody>
+      </p:sp>
+      <p:sp>
+        <p:nvSpPr>
+          <p:cNvPr id="8" name="Text 6"/>
+          <p:cNvSpPr/>
+          <p:nvPr/>
+        </p:nvSpPr>
+        <p:spPr>
+          <a:xfrm>
             <a:off x="640080" y="658368"/>
-            <a:ext cx="10881360" cy="566928"/>
+            <a:ext cx="10881360" cy="713232"/>
           </a:xfrm>
           <a:prstGeom prst="rect">
             <a:avLst/>
@@ -11570,7 +12352,7 @@
               <a:buNone/>
             </a:pPr>
             <a:r>
-              <a:rPr lang="en-US" sz="2700" b="1" dirty="0">
+              <a:rPr lang="en-US" sz="3400" b="1" dirty="0">
                 <a:solidFill>
                   <a:srgbClr val="003A63"/>
                 </a:solidFill>
@@ -11580,20 +12362,20 @@
               </a:rPr>
               <a:t>How this module connects to the playbook</a:t>
             </a:r>
-            <a:endParaRPr lang="en-US" sz="2700" dirty="0"/>
-          </a:p>
-        </p:txBody>
-      </p:sp>
-      <p:sp>
-        <p:nvSpPr>
-          <p:cNvPr id="8" name="Text 6"/>
-          <p:cNvSpPr/>
-          <p:nvPr/>
-        </p:nvSpPr>
-        <p:spPr>
-          <a:xfrm>
-            <a:off x="868680" y="1417320"/>
-            <a:ext cx="6903720" cy="4480560"/>
+            <a:endParaRPr lang="en-US" sz="3400" dirty="0"/>
+          </a:p>
+        </p:txBody>
+      </p:sp>
+      <p:sp>
+        <p:nvSpPr>
+          <p:cNvPr id="9" name="Text 7"/>
+          <p:cNvSpPr/>
+          <p:nvPr/>
+        </p:nvSpPr>
+        <p:spPr>
+          <a:xfrm>
+            <a:off x="868680" y="1508760"/>
+            <a:ext cx="6812280" cy="3977640"/>
           </a:xfrm>
           <a:prstGeom prst="rect">
             <a:avLst/>
@@ -11608,7 +12390,7 @@
           <a:lstStyle/>
           <a:p>
             <a:r>
-              <a:rPr lang="en-US" sz="1540" dirty="0">
+              <a:rPr lang="en-US" sz="1900" dirty="0">
                 <a:solidFill>
                   <a:srgbClr val="17364A"/>
                 </a:solidFill>
@@ -11616,13 +12398,13 @@
                 <a:ea typeface="Aptos" pitchFamily="34" charset="-122"/>
                 <a:cs typeface="Aptos" pitchFamily="34" charset="-120"/>
               </a:rPr>
-              <a:t>Play 7: Prioritize Use Cases - This lesson informs Play 7 by helping learners connect the lesson topic to prioritize use cases work.</a:t>
-            </a:r>
-            <a:endParaRPr lang="en-US" sz="1540" dirty="0"/>
-          </a:p>
-          <a:p>
-            <a:r>
-              <a:rPr lang="en-US" sz="1540" dirty="0">
+              <a:t>Play 7: Prioritize Use Cases - This lesson informs Play 7 by helping learners connect the lesson topic to.</a:t>
+            </a:r>
+            <a:endParaRPr lang="en-US" sz="1900" dirty="0"/>
+          </a:p>
+          <a:p>
+            <a:r>
+              <a:rPr lang="en-US" sz="1900" dirty="0">
                 <a:solidFill>
                   <a:srgbClr val="17364A"/>
                 </a:solidFill>
@@ -11630,13 +12412,13 @@
                 <a:ea typeface="Aptos" pitchFamily="34" charset="-122"/>
                 <a:cs typeface="Aptos" pitchFamily="34" charset="-120"/>
               </a:rPr>
-              <a:t>Play 11: Build and Deploy AI Solutions - This lesson informs Play 11 by helping learners connect the lesson topic to build and deploy.</a:t>
-            </a:r>
-            <a:endParaRPr lang="en-US" sz="1540" dirty="0"/>
-          </a:p>
-          <a:p>
-            <a:r>
-              <a:rPr lang="en-US" sz="1540" dirty="0">
+              <a:t>Play 11: Build and Deploy AI Solutions - This lesson informs Play 11 by helping learners connect the lesson.</a:t>
+            </a:r>
+            <a:endParaRPr lang="en-US" sz="1900" dirty="0"/>
+          </a:p>
+          <a:p>
+            <a:r>
+              <a:rPr lang="en-US" sz="1900" dirty="0">
                 <a:solidFill>
                   <a:srgbClr val="17364A"/>
                 </a:solidFill>
@@ -11644,13 +12426,13 @@
                 <a:ea typeface="Aptos" pitchFamily="34" charset="-122"/>
                 <a:cs typeface="Aptos" pitchFamily="34" charset="-120"/>
               </a:rPr>
-              <a:t>Play 3: Establish AI Governance - This lesson informs Play 3 by helping learners connect the lesson topic to establish ai governance.</a:t>
-            </a:r>
-            <a:endParaRPr lang="en-US" sz="1540" dirty="0"/>
-          </a:p>
-          <a:p>
-            <a:r>
-              <a:rPr lang="en-US" sz="1540" dirty="0">
+              <a:t>Play 3: Establish AI Governance - This lesson informs Play 3 by helping learners connect the lesson topic to.</a:t>
+            </a:r>
+            <a:endParaRPr lang="en-US" sz="1900" dirty="0"/>
+          </a:p>
+          <a:p>
+            <a:r>
+              <a:rPr lang="en-US" sz="1900" dirty="0">
                 <a:solidFill>
                   <a:srgbClr val="17364A"/>
                 </a:solidFill>
@@ -11658,15 +12440,15 @@
                 <a:ea typeface="Aptos" pitchFamily="34" charset="-122"/>
                 <a:cs typeface="Aptos" pitchFamily="34" charset="-120"/>
               </a:rPr>
-              <a:t>Play 1: Vision &amp; Guardrails - This lesson informs Play 1 by helping learners connect the lesson topic to vision &amp; guardrails work in.</a:t>
-            </a:r>
-            <a:endParaRPr lang="en-US" sz="1540" dirty="0"/>
-          </a:p>
-        </p:txBody>
-      </p:sp>
-      <p:sp>
-        <p:nvSpPr>
-          <p:cNvPr id="9" name="Shape 7"/>
+              <a:t>Play 1: Vision &amp; Guardrails - This lesson informs Play 1 by helping learners connect the lesson topic to.</a:t>
+            </a:r>
+            <a:endParaRPr lang="en-US" sz="1900" dirty="0"/>
+          </a:p>
+        </p:txBody>
+      </p:sp>
+      <p:sp>
+        <p:nvSpPr>
+          <p:cNvPr id="10" name="Shape 8"/>
           <p:cNvSpPr/>
           <p:nvPr/>
         </p:nvSpPr>
@@ -11693,14 +12475,14 @@
       </p:sp>
       <p:sp>
         <p:nvSpPr>
-          <p:cNvPr id="10" name="Text 8"/>
+          <p:cNvPr id="11" name="Text 9"/>
           <p:cNvSpPr/>
           <p:nvPr/>
         </p:nvSpPr>
         <p:spPr>
           <a:xfrm>
             <a:off x="8211312" y="1563624"/>
-            <a:ext cx="2734056" cy="201168"/>
+            <a:ext cx="2734056" cy="256032"/>
           </a:xfrm>
           <a:prstGeom prst="rect">
             <a:avLst/>
@@ -11716,7 +12498,7 @@
               <a:buNone/>
             </a:pPr>
             <a:r>
-              <a:rPr lang="en-US" sz="950" b="1" dirty="0">
+              <a:rPr lang="en-US" sz="1300" b="1" dirty="0">
                 <a:solidFill>
                   <a:srgbClr val="0068B7"/>
                 </a:solidFill>
@@ -11726,20 +12508,20 @@
               </a:rPr>
               <a:t>Apply the lesson</a:t>
             </a:r>
-            <a:endParaRPr lang="en-US" sz="950" dirty="0"/>
-          </a:p>
-        </p:txBody>
-      </p:sp>
-      <p:sp>
-        <p:nvSpPr>
-          <p:cNvPr id="11" name="Text 9"/>
-          <p:cNvSpPr/>
-          <p:nvPr/>
-        </p:nvSpPr>
-        <p:spPr>
-          <a:xfrm>
-            <a:off x="8211312" y="1856232"/>
-            <a:ext cx="2734056" cy="1536192"/>
+            <a:endParaRPr lang="en-US" sz="1300" dirty="0"/>
+          </a:p>
+        </p:txBody>
+      </p:sp>
+      <p:sp>
+        <p:nvSpPr>
+          <p:cNvPr id="12" name="Text 10"/>
+          <p:cNvSpPr/>
+          <p:nvPr/>
+        </p:nvSpPr>
+        <p:spPr>
+          <a:xfrm>
+            <a:off x="8211312" y="1920240"/>
+            <a:ext cx="2734056" cy="1463040"/>
           </a:xfrm>
           <a:prstGeom prst="rect">
             <a:avLst/>
@@ -11757,7 +12539,7 @@
               <a:buNone/>
             </a:pPr>
             <a:r>
-              <a:rPr lang="en-US" sz="1250" dirty="0">
+              <a:rPr lang="en-US" sz="1550" dirty="0">
                 <a:solidFill>
                   <a:srgbClr val="17364A"/>
                 </a:solidFill>
@@ -11767,32 +12549,32 @@
               </a:rPr>
               <a:t>Use the related plays to identify decisions, participants, timing, approvals, and documentation needed for responsible implementation.</a:t>
             </a:r>
-            <a:endParaRPr lang="en-US" sz="1250" dirty="0"/>
-          </a:p>
-        </p:txBody>
-      </p:sp>
-      <p:sp>
-        <p:nvSpPr>
-          <p:cNvPr id="12" name="Shape 10"/>
-          <p:cNvSpPr/>
-          <p:nvPr/>
-        </p:nvSpPr>
-        <p:spPr>
-          <a:xfrm>
-            <a:off x="8046720" y="3794760"/>
-            <a:ext cx="3063240" cy="1508760"/>
+            <a:endParaRPr lang="en-US" sz="1550" dirty="0"/>
+          </a:p>
+        </p:txBody>
+      </p:sp>
+      <p:sp>
+        <p:nvSpPr>
+          <p:cNvPr id="13" name="Shape 11"/>
+          <p:cNvSpPr/>
+          <p:nvPr/>
+        </p:nvSpPr>
+        <p:spPr>
+          <a:xfrm>
+            <a:off x="7818120" y="3977640"/>
+            <a:ext cx="972312" cy="749808"/>
           </a:xfrm>
           <a:prstGeom prst="roundRect">
             <a:avLst>
-              <a:gd name="adj" fmla="val 7273"/>
+              <a:gd name="adj" fmla="val 14634"/>
             </a:avLst>
           </a:prstGeom>
           <a:solidFill>
-            <a:srgbClr val="FFF4D9"/>
+            <a:srgbClr val="0068B7"/>
           </a:solidFill>
           <a:ln w="12700">
             <a:solidFill>
-              <a:srgbClr val="B9D7E6"/>
+              <a:srgbClr val="0068B7"/>
             </a:solidFill>
             <a:prstDash val="solid"/>
           </a:ln>
@@ -11800,81 +12582,256 @@
       </p:sp>
       <p:sp>
         <p:nvSpPr>
-          <p:cNvPr id="13" name="Text 11"/>
-          <p:cNvSpPr/>
-          <p:nvPr/>
-        </p:nvSpPr>
-        <p:spPr>
-          <a:xfrm>
-            <a:off x="8211312" y="3941064"/>
-            <a:ext cx="2734056" cy="201168"/>
-          </a:xfrm>
-          <a:prstGeom prst="rect">
-            <a:avLst/>
-          </a:prstGeom>
-          <a:noFill/>
-          <a:ln/>
-        </p:spPr>
-        <p:txBody>
-          <a:bodyPr wrap="square" lIns="0" tIns="0" rIns="0" bIns="0" rtlCol="0" anchor="ctr"/>
-          <a:lstStyle/>
-          <a:p>
-            <a:pPr indent="0" marL="0">
-              <a:buNone/>
-            </a:pPr>
-            <a:r>
-              <a:rPr lang="en-US" sz="950" b="1" dirty="0">
-                <a:solidFill>
-                  <a:srgbClr val="0068B7"/>
-                </a:solidFill>
-                <a:latin typeface="Aptos" pitchFamily="34" charset="0"/>
-                <a:ea typeface="Aptos" pitchFamily="34" charset="-122"/>
-                <a:cs typeface="Aptos" pitchFamily="34" charset="-120"/>
-              </a:rPr>
-              <a:t>Keep in mind</a:t>
-            </a:r>
-            <a:endParaRPr lang="en-US" sz="950" dirty="0"/>
-          </a:p>
-        </p:txBody>
-      </p:sp>
-      <p:sp>
-        <p:nvSpPr>
           <p:cNvPr id="14" name="Text 12"/>
           <p:cNvSpPr/>
           <p:nvPr/>
         </p:nvSpPr>
         <p:spPr>
           <a:xfrm>
-            <a:off x="8211312" y="4233672"/>
-            <a:ext cx="2734056" cy="941832"/>
-          </a:xfrm>
-          <a:prstGeom prst="rect">
-            <a:avLst/>
-          </a:prstGeom>
-          <a:noFill/>
-          <a:ln/>
-        </p:spPr>
-        <p:txBody>
-          <a:bodyPr wrap="square" lIns="0" tIns="0" rIns="0" bIns="0" rtlCol="0" anchor="t">
+            <a:off x="7891272" y="4169664"/>
+            <a:ext cx="826008" cy="310896"/>
+          </a:xfrm>
+          <a:prstGeom prst="rect">
+            <a:avLst/>
+          </a:prstGeom>
+          <a:noFill/>
+          <a:ln/>
+        </p:spPr>
+        <p:txBody>
+          <a:bodyPr wrap="square" lIns="0" tIns="0" rIns="0" bIns="0" rtlCol="0" anchor="ctr">
             <a:normAutofit/>
           </a:bodyPr>
           <a:lstStyle/>
           <a:p>
-            <a:pPr indent="0" marL="0">
-              <a:buNone/>
-            </a:pPr>
-            <a:r>
-              <a:rPr lang="en-US" sz="1250" dirty="0">
-                <a:solidFill>
-                  <a:srgbClr val="17364A"/>
-                </a:solidFill>
-                <a:latin typeface="Aptos" pitchFamily="34" charset="0"/>
-                <a:ea typeface="Aptos" pitchFamily="34" charset="-122"/>
-                <a:cs typeface="Aptos" pitchFamily="34" charset="-120"/>
-              </a:rPr>
-              <a:t>The playbook connection helps turn training into agency work, not just individual knowledge.</a:t>
-            </a:r>
-            <a:endParaRPr lang="en-US" sz="1250" dirty="0"/>
+            <a:pPr algn="ctr" indent="0" marL="0">
+              <a:buNone/>
+            </a:pPr>
+            <a:r>
+              <a:rPr lang="en-US" sz="1500" b="1" dirty="0">
+                <a:solidFill>
+                  <a:srgbClr val="FFFFFF"/>
+                </a:solidFill>
+                <a:latin typeface="Aptos" pitchFamily="34" charset="0"/>
+                <a:ea typeface="Aptos" pitchFamily="34" charset="-122"/>
+                <a:cs typeface="Aptos" pitchFamily="34" charset="-120"/>
+              </a:rPr>
+              <a:t>Lesson</a:t>
+            </a:r>
+            <a:endParaRPr lang="en-US" sz="1500" dirty="0"/>
+          </a:p>
+        </p:txBody>
+      </p:sp>
+      <p:sp>
+        <p:nvSpPr>
+          <p:cNvPr id="15" name="Text 13"/>
+          <p:cNvSpPr/>
+          <p:nvPr/>
+        </p:nvSpPr>
+        <p:spPr>
+          <a:xfrm>
+            <a:off x="8817864" y="4187952"/>
+            <a:ext cx="201168" cy="256032"/>
+          </a:xfrm>
+          <a:prstGeom prst="rect">
+            <a:avLst/>
+          </a:prstGeom>
+          <a:noFill/>
+          <a:ln/>
+        </p:spPr>
+        <p:txBody>
+          <a:bodyPr wrap="square" lIns="0" tIns="0" rIns="0" bIns="0" rtlCol="0" anchor="ctr"/>
+          <a:lstStyle/>
+          <a:p>
+            <a:pPr algn="ctr" indent="0" marL="0">
+              <a:buNone/>
+            </a:pPr>
+            <a:r>
+              <a:rPr lang="en-US" sz="1800" b="1" dirty="0">
+                <a:solidFill>
+                  <a:srgbClr val="0068B7"/>
+                </a:solidFill>
+                <a:latin typeface="Aptos" pitchFamily="34" charset="0"/>
+                <a:ea typeface="Aptos" pitchFamily="34" charset="-122"/>
+                <a:cs typeface="Aptos" pitchFamily="34" charset="-120"/>
+              </a:rPr>
+              <a:t>â†’</a:t>
+            </a:r>
+            <a:endParaRPr lang="en-US" sz="1800" dirty="0"/>
+          </a:p>
+        </p:txBody>
+      </p:sp>
+      <p:sp>
+        <p:nvSpPr>
+          <p:cNvPr id="16" name="Shape 14"/>
+          <p:cNvSpPr/>
+          <p:nvPr/>
+        </p:nvSpPr>
+        <p:spPr>
+          <a:xfrm>
+            <a:off x="9046464" y="3977640"/>
+            <a:ext cx="972312" cy="749808"/>
+          </a:xfrm>
+          <a:prstGeom prst="roundRect">
+            <a:avLst>
+              <a:gd name="adj" fmla="val 14634"/>
+            </a:avLst>
+          </a:prstGeom>
+          <a:solidFill>
+            <a:srgbClr val="2F8A28"/>
+          </a:solidFill>
+          <a:ln w="12700">
+            <a:solidFill>
+              <a:srgbClr val="2F8A28"/>
+            </a:solidFill>
+            <a:prstDash val="solid"/>
+          </a:ln>
+        </p:spPr>
+      </p:sp>
+      <p:sp>
+        <p:nvSpPr>
+          <p:cNvPr id="17" name="Text 15"/>
+          <p:cNvSpPr/>
+          <p:nvPr/>
+        </p:nvSpPr>
+        <p:spPr>
+          <a:xfrm>
+            <a:off x="9119616" y="4169664"/>
+            <a:ext cx="826008" cy="310896"/>
+          </a:xfrm>
+          <a:prstGeom prst="rect">
+            <a:avLst/>
+          </a:prstGeom>
+          <a:noFill/>
+          <a:ln/>
+        </p:spPr>
+        <p:txBody>
+          <a:bodyPr wrap="square" lIns="0" tIns="0" rIns="0" bIns="0" rtlCol="0" anchor="ctr">
+            <a:normAutofit/>
+          </a:bodyPr>
+          <a:lstStyle/>
+          <a:p>
+            <a:pPr algn="ctr" indent="0" marL="0">
+              <a:buNone/>
+            </a:pPr>
+            <a:r>
+              <a:rPr lang="en-US" sz="1500" b="1" dirty="0">
+                <a:solidFill>
+                  <a:srgbClr val="FFFFFF"/>
+                </a:solidFill>
+                <a:latin typeface="Aptos" pitchFamily="34" charset="0"/>
+                <a:ea typeface="Aptos" pitchFamily="34" charset="-122"/>
+                <a:cs typeface="Aptos" pitchFamily="34" charset="-120"/>
+              </a:rPr>
+              <a:t>Plays</a:t>
+            </a:r>
+            <a:endParaRPr lang="en-US" sz="1500" dirty="0"/>
+          </a:p>
+        </p:txBody>
+      </p:sp>
+      <p:sp>
+        <p:nvSpPr>
+          <p:cNvPr id="18" name="Text 16"/>
+          <p:cNvSpPr/>
+          <p:nvPr/>
+        </p:nvSpPr>
+        <p:spPr>
+          <a:xfrm>
+            <a:off x="10046208" y="4187952"/>
+            <a:ext cx="201168" cy="256032"/>
+          </a:xfrm>
+          <a:prstGeom prst="rect">
+            <a:avLst/>
+          </a:prstGeom>
+          <a:noFill/>
+          <a:ln/>
+        </p:spPr>
+        <p:txBody>
+          <a:bodyPr wrap="square" lIns="0" tIns="0" rIns="0" bIns="0" rtlCol="0" anchor="ctr"/>
+          <a:lstStyle/>
+          <a:p>
+            <a:pPr algn="ctr" indent="0" marL="0">
+              <a:buNone/>
+            </a:pPr>
+            <a:r>
+              <a:rPr lang="en-US" sz="1800" b="1" dirty="0">
+                <a:solidFill>
+                  <a:srgbClr val="0068B7"/>
+                </a:solidFill>
+                <a:latin typeface="Aptos" pitchFamily="34" charset="0"/>
+                <a:ea typeface="Aptos" pitchFamily="34" charset="-122"/>
+                <a:cs typeface="Aptos" pitchFamily="34" charset="-120"/>
+              </a:rPr>
+              <a:t>â†’</a:t>
+            </a:r>
+            <a:endParaRPr lang="en-US" sz="1800" dirty="0"/>
+          </a:p>
+        </p:txBody>
+      </p:sp>
+      <p:sp>
+        <p:nvSpPr>
+          <p:cNvPr id="19" name="Shape 17"/>
+          <p:cNvSpPr/>
+          <p:nvPr/>
+        </p:nvSpPr>
+        <p:spPr>
+          <a:xfrm>
+            <a:off x="10274808" y="3977640"/>
+            <a:ext cx="972312" cy="749808"/>
+          </a:xfrm>
+          <a:prstGeom prst="roundRect">
+            <a:avLst>
+              <a:gd name="adj" fmla="val 14634"/>
+            </a:avLst>
+          </a:prstGeom>
+          <a:solidFill>
+            <a:srgbClr val="6A4CA3"/>
+          </a:solidFill>
+          <a:ln w="12700">
+            <a:solidFill>
+              <a:srgbClr val="6A4CA3"/>
+            </a:solidFill>
+            <a:prstDash val="solid"/>
+          </a:ln>
+        </p:spPr>
+      </p:sp>
+      <p:sp>
+        <p:nvSpPr>
+          <p:cNvPr id="20" name="Text 18"/>
+          <p:cNvSpPr/>
+          <p:nvPr/>
+        </p:nvSpPr>
+        <p:spPr>
+          <a:xfrm>
+            <a:off x="10347960" y="4169664"/>
+            <a:ext cx="826008" cy="310896"/>
+          </a:xfrm>
+          <a:prstGeom prst="rect">
+            <a:avLst/>
+          </a:prstGeom>
+          <a:noFill/>
+          <a:ln/>
+        </p:spPr>
+        <p:txBody>
+          <a:bodyPr wrap="square" lIns="0" tIns="0" rIns="0" bIns="0" rtlCol="0" anchor="ctr">
+            <a:normAutofit/>
+          </a:bodyPr>
+          <a:lstStyle/>
+          <a:p>
+            <a:pPr algn="ctr" indent="0" marL="0">
+              <a:buNone/>
+            </a:pPr>
+            <a:r>
+              <a:rPr lang="en-US" sz="1500" b="1" dirty="0">
+                <a:solidFill>
+                  <a:srgbClr val="FFFFFF"/>
+                </a:solidFill>
+                <a:latin typeface="Aptos" pitchFamily="34" charset="0"/>
+                <a:ea typeface="Aptos" pitchFamily="34" charset="-122"/>
+                <a:cs typeface="Aptos" pitchFamily="34" charset="-120"/>
+              </a:rPr>
+              <a:t>Action</a:t>
+            </a:r>
+            <a:endParaRPr lang="en-US" sz="1500" dirty="0"/>
           </a:p>
         </p:txBody>
       </p:sp>
@@ -12071,7 +13028,7 @@
                 <a:ea typeface="Aptos" pitchFamily="34" charset="-122"/>
                 <a:cs typeface="Aptos" pitchFamily="34" charset="-120"/>
               </a:rPr>
-              <a:t>© Paula Soper</a:t>
+              <a:t>Â© Paula Soper</a:t>
             </a:r>
             <a:endParaRPr lang="en-US" sz="800" dirty="0"/>
           </a:p>
@@ -12085,8 +13042,47 @@
         </p:nvSpPr>
         <p:spPr>
           <a:xfrm>
+            <a:off x="11137392" y="6510528"/>
+            <a:ext cx="411480" cy="201168"/>
+          </a:xfrm>
+          <a:prstGeom prst="rect">
+            <a:avLst/>
+          </a:prstGeom>
+          <a:noFill/>
+          <a:ln/>
+        </p:spPr>
+        <p:txBody>
+          <a:bodyPr wrap="square" lIns="0" tIns="0" rIns="0" bIns="0" rtlCol="0" anchor="ctr"/>
+          <a:lstStyle/>
+          <a:p>
+            <a:pPr algn="r" indent="0" marL="0">
+              <a:buNone/>
+            </a:pPr>
+            <a:r>
+              <a:rPr lang="en-US" sz="900" dirty="0">
+                <a:solidFill>
+                  <a:srgbClr val="5F7181"/>
+                </a:solidFill>
+                <a:latin typeface="Aptos" pitchFamily="34" charset="0"/>
+                <a:ea typeface="Aptos" pitchFamily="34" charset="-122"/>
+                <a:cs typeface="Aptos" pitchFamily="34" charset="-120"/>
+              </a:rPr>
+              <a:t>4</a:t>
+            </a:r>
+            <a:endParaRPr lang="en-US" sz="900" dirty="0"/>
+          </a:p>
+        </p:txBody>
+      </p:sp>
+      <p:sp>
+        <p:nvSpPr>
+          <p:cNvPr id="8" name="Text 6"/>
+          <p:cNvSpPr/>
+          <p:nvPr/>
+        </p:nvSpPr>
+        <p:spPr>
+          <a:xfrm>
             <a:off x="640080" y="658368"/>
-            <a:ext cx="10881360" cy="566928"/>
+            <a:ext cx="10881360" cy="713232"/>
           </a:xfrm>
           <a:prstGeom prst="rect">
             <a:avLst/>
@@ -12104,7 +13100,7 @@
               <a:buNone/>
             </a:pPr>
             <a:r>
-              <a:rPr lang="en-US" sz="2700" b="1" dirty="0">
+              <a:rPr lang="en-US" sz="3400" b="1" dirty="0">
                 <a:solidFill>
                   <a:srgbClr val="003A63"/>
                 </a:solidFill>
@@ -12114,20 +13110,20 @@
               </a:rPr>
               <a:t>Related toolkit resources</a:t>
             </a:r>
-            <a:endParaRPr lang="en-US" sz="2700" dirty="0"/>
-          </a:p>
-        </p:txBody>
-      </p:sp>
-      <p:sp>
-        <p:nvSpPr>
-          <p:cNvPr id="8" name="Text 6"/>
-          <p:cNvSpPr/>
-          <p:nvPr/>
-        </p:nvSpPr>
-        <p:spPr>
-          <a:xfrm>
-            <a:off x="868680" y="1417320"/>
-            <a:ext cx="6903720" cy="4480560"/>
+            <a:endParaRPr lang="en-US" sz="3400" dirty="0"/>
+          </a:p>
+        </p:txBody>
+      </p:sp>
+      <p:sp>
+        <p:nvSpPr>
+          <p:cNvPr id="9" name="Text 7"/>
+          <p:cNvSpPr/>
+          <p:nvPr/>
+        </p:nvSpPr>
+        <p:spPr>
+          <a:xfrm>
+            <a:off x="868680" y="1508760"/>
+            <a:ext cx="6812280" cy="3977640"/>
           </a:xfrm>
           <a:prstGeom prst="rect">
             <a:avLst/>
@@ -12142,7 +13138,7 @@
           <a:lstStyle/>
           <a:p>
             <a:r>
-              <a:rPr lang="en-US" sz="1460" dirty="0">
+              <a:rPr lang="en-US" sz="1850" dirty="0">
                 <a:solidFill>
                   <a:srgbClr val="17364A"/>
                 </a:solidFill>
@@ -12150,13 +13146,13 @@
                 <a:ea typeface="Aptos" pitchFamily="34" charset="-122"/>
                 <a:cs typeface="Aptos" pitchFamily="34" charset="-120"/>
               </a:rPr>
-              <a:t>Tool 3: Equity Impact Assessment Checklist (Checklist) - Use this tool to complete or strengthen the practical exercise for the.</a:t>
-            </a:r>
-            <a:endParaRPr lang="en-US" sz="1460" dirty="0"/>
-          </a:p>
-          <a:p>
-            <a:r>
-              <a:rPr lang="en-US" sz="1460" dirty="0">
+              <a:t>Tool 3: Equity Impact Assessment Checklist (Checklist) - Use this tool to complete or strengthen the.</a:t>
+            </a:r>
+            <a:endParaRPr lang="en-US" sz="1850" dirty="0"/>
+          </a:p>
+          <a:p>
+            <a:r>
+              <a:rPr lang="en-US" sz="1850" dirty="0">
                 <a:solidFill>
                   <a:srgbClr val="17364A"/>
                 </a:solidFill>
@@ -12164,13 +13160,13 @@
                 <a:ea typeface="Aptos" pitchFamily="34" charset="-122"/>
                 <a:cs typeface="Aptos" pitchFamily="34" charset="-120"/>
               </a:rPr>
-              <a:t>Tool 31: Use Case Scoring &amp; Prioritization Matrix (Matrix) - Use this tool to complete or strengthen the practical exercise for the.</a:t>
-            </a:r>
-            <a:endParaRPr lang="en-US" sz="1460" dirty="0"/>
-          </a:p>
-          <a:p>
-            <a:r>
-              <a:rPr lang="en-US" sz="1460" dirty="0">
+              <a:t>Tool 31: Use Case Scoring &amp; Prioritization Matrix (Matrix) - Use this tool to complete or strengthen the.</a:t>
+            </a:r>
+            <a:endParaRPr lang="en-US" sz="1850" dirty="0"/>
+          </a:p>
+          <a:p>
+            <a:r>
+              <a:rPr lang="en-US" sz="1850" dirty="0">
                 <a:solidFill>
                   <a:srgbClr val="17364A"/>
                 </a:solidFill>
@@ -12178,13 +13174,13 @@
                 <a:ea typeface="Aptos" pitchFamily="34" charset="-122"/>
                 <a:cs typeface="Aptos" pitchFamily="34" charset="-120"/>
               </a:rPr>
-              <a:t>Tool 49: AI Use Case Intake and Triage Worksheet (Worksheet) - Use this tool to complete or strengthen the practical exercise for the.</a:t>
-            </a:r>
-            <a:endParaRPr lang="en-US" sz="1460" dirty="0"/>
-          </a:p>
-          <a:p>
-            <a:r>
-              <a:rPr lang="en-US" sz="1460" dirty="0">
+              <a:t>Tool 49: AI Use Case Intake and Triage Worksheet (Worksheet) - Use this tool to complete or strengthen the.</a:t>
+            </a:r>
+            <a:endParaRPr lang="en-US" sz="1850" dirty="0"/>
+          </a:p>
+          <a:p>
+            <a:r>
+              <a:rPr lang="en-US" sz="1850" dirty="0">
                 <a:solidFill>
                   <a:srgbClr val="17364A"/>
                 </a:solidFill>
@@ -12192,29 +13188,15 @@
                 <a:ea typeface="Aptos" pitchFamily="34" charset="-122"/>
                 <a:cs typeface="Aptos" pitchFamily="34" charset="-120"/>
               </a:rPr>
-              <a:t>Tool 4: AI Policy Landscape Scan (Worksheet) - Use AI Policy Landscape Scan to translate this lesson into a documented public health.</a:t>
-            </a:r>
-            <a:endParaRPr lang="en-US" sz="1460" dirty="0"/>
-          </a:p>
-          <a:p>
-            <a:r>
-              <a:rPr lang="en-US" sz="1460" dirty="0">
-                <a:solidFill>
-                  <a:srgbClr val="17364A"/>
-                </a:solidFill>
-                <a:latin typeface="Aptos" pitchFamily="34" charset="0"/>
-                <a:ea typeface="Aptos" pitchFamily="34" charset="-122"/>
-                <a:cs typeface="Aptos" pitchFamily="34" charset="-120"/>
-              </a:rPr>
-              <a:t>Tool 5: AI Environmental and Resource Impact Review (Checklist) - Use AI Environmental and Resource Impact Review to translate this.</a:t>
-            </a:r>
-            <a:endParaRPr lang="en-US" sz="1460" dirty="0"/>
-          </a:p>
-        </p:txBody>
-      </p:sp>
-      <p:sp>
-        <p:nvSpPr>
-          <p:cNvPr id="9" name="Shape 7"/>
+              <a:t>Tool 4: AI Policy Landscape Scan (Worksheet) - Use AI Policy Landscape Scan to translate this lesson into a.</a:t>
+            </a:r>
+            <a:endParaRPr lang="en-US" sz="1850" dirty="0"/>
+          </a:p>
+        </p:txBody>
+      </p:sp>
+      <p:sp>
+        <p:nvSpPr>
+          <p:cNvPr id="10" name="Shape 8"/>
           <p:cNvSpPr/>
           <p:nvPr/>
         </p:nvSpPr>
@@ -12241,14 +13223,14 @@
       </p:sp>
       <p:sp>
         <p:nvSpPr>
-          <p:cNvPr id="10" name="Text 8"/>
+          <p:cNvPr id="11" name="Text 9"/>
           <p:cNvSpPr/>
           <p:nvPr/>
         </p:nvSpPr>
         <p:spPr>
           <a:xfrm>
             <a:off x="8211312" y="1563624"/>
-            <a:ext cx="2734056" cy="201168"/>
+            <a:ext cx="2734056" cy="256032"/>
           </a:xfrm>
           <a:prstGeom prst="rect">
             <a:avLst/>
@@ -12264,7 +13246,7 @@
               <a:buNone/>
             </a:pPr>
             <a:r>
-              <a:rPr lang="en-US" sz="950" b="1" dirty="0">
+              <a:rPr lang="en-US" sz="1300" b="1" dirty="0">
                 <a:solidFill>
                   <a:srgbClr val="0068B7"/>
                 </a:solidFill>
@@ -12274,20 +13256,20 @@
               </a:rPr>
               <a:t>Use the tools</a:t>
             </a:r>
-            <a:endParaRPr lang="en-US" sz="950" dirty="0"/>
-          </a:p>
-        </p:txBody>
-      </p:sp>
-      <p:sp>
-        <p:nvSpPr>
-          <p:cNvPr id="11" name="Text 9"/>
-          <p:cNvSpPr/>
-          <p:nvPr/>
-        </p:nvSpPr>
-        <p:spPr>
-          <a:xfrm>
-            <a:off x="8211312" y="1856232"/>
-            <a:ext cx="2734056" cy="1536192"/>
+            <a:endParaRPr lang="en-US" sz="1300" dirty="0"/>
+          </a:p>
+        </p:txBody>
+      </p:sp>
+      <p:sp>
+        <p:nvSpPr>
+          <p:cNvPr id="12" name="Text 10"/>
+          <p:cNvSpPr/>
+          <p:nvPr/>
+        </p:nvSpPr>
+        <p:spPr>
+          <a:xfrm>
+            <a:off x="8211312" y="1920240"/>
+            <a:ext cx="2734056" cy="1463040"/>
           </a:xfrm>
           <a:prstGeom prst="rect">
             <a:avLst/>
@@ -12305,7 +13287,7 @@
               <a:buNone/>
             </a:pPr>
             <a:r>
-              <a:rPr lang="en-US" sz="1250" dirty="0">
+              <a:rPr lang="en-US" sz="1550" dirty="0">
                 <a:solidFill>
                   <a:srgbClr val="17364A"/>
                 </a:solidFill>
@@ -12315,32 +13297,32 @@
               </a:rPr>
               <a:t>Use linked tools when your department needs a structured worksheet, template, checklist, review process, or documentation artifact.</a:t>
             </a:r>
-            <a:endParaRPr lang="en-US" sz="1250" dirty="0"/>
-          </a:p>
-        </p:txBody>
-      </p:sp>
-      <p:sp>
-        <p:nvSpPr>
-          <p:cNvPr id="12" name="Shape 10"/>
-          <p:cNvSpPr/>
-          <p:nvPr/>
-        </p:nvSpPr>
-        <p:spPr>
-          <a:xfrm>
-            <a:off x="8046720" y="3794760"/>
-            <a:ext cx="3063240" cy="1508760"/>
+            <a:endParaRPr lang="en-US" sz="1550" dirty="0"/>
+          </a:p>
+        </p:txBody>
+      </p:sp>
+      <p:sp>
+        <p:nvSpPr>
+          <p:cNvPr id="13" name="Shape 11"/>
+          <p:cNvSpPr/>
+          <p:nvPr/>
+        </p:nvSpPr>
+        <p:spPr>
+          <a:xfrm>
+            <a:off x="7818120" y="3977640"/>
+            <a:ext cx="972312" cy="749808"/>
           </a:xfrm>
           <a:prstGeom prst="roundRect">
             <a:avLst>
-              <a:gd name="adj" fmla="val 7273"/>
+              <a:gd name="adj" fmla="val 14634"/>
             </a:avLst>
           </a:prstGeom>
           <a:solidFill>
-            <a:srgbClr val="EEF8ED"/>
+            <a:srgbClr val="0068B7"/>
           </a:solidFill>
           <a:ln w="12700">
             <a:solidFill>
-              <a:srgbClr val="B9D7E6"/>
+              <a:srgbClr val="0068B7"/>
             </a:solidFill>
             <a:prstDash val="solid"/>
           </a:ln>
@@ -12348,81 +13330,256 @@
       </p:sp>
       <p:sp>
         <p:nvSpPr>
-          <p:cNvPr id="13" name="Text 11"/>
-          <p:cNvSpPr/>
-          <p:nvPr/>
-        </p:nvSpPr>
-        <p:spPr>
-          <a:xfrm>
-            <a:off x="8211312" y="3941064"/>
-            <a:ext cx="2734056" cy="201168"/>
-          </a:xfrm>
-          <a:prstGeom prst="rect">
-            <a:avLst/>
-          </a:prstGeom>
-          <a:noFill/>
-          <a:ln/>
-        </p:spPr>
-        <p:txBody>
-          <a:bodyPr wrap="square" lIns="0" tIns="0" rIns="0" bIns="0" rtlCol="0" anchor="ctr"/>
-          <a:lstStyle/>
-          <a:p>
-            <a:pPr indent="0" marL="0">
-              <a:buNone/>
-            </a:pPr>
-            <a:r>
-              <a:rPr lang="en-US" sz="950" b="1" dirty="0">
-                <a:solidFill>
-                  <a:srgbClr val="0068B7"/>
-                </a:solidFill>
-                <a:latin typeface="Aptos" pitchFamily="34" charset="0"/>
-                <a:ea typeface="Aptos" pitchFamily="34" charset="-122"/>
-                <a:cs typeface="Aptos" pitchFamily="34" charset="-120"/>
-              </a:rPr>
-              <a:t>Avoid duplication</a:t>
-            </a:r>
-            <a:endParaRPr lang="en-US" sz="950" dirty="0"/>
-          </a:p>
-        </p:txBody>
-      </p:sp>
-      <p:sp>
-        <p:nvSpPr>
           <p:cNvPr id="14" name="Text 12"/>
           <p:cNvSpPr/>
           <p:nvPr/>
         </p:nvSpPr>
         <p:spPr>
           <a:xfrm>
-            <a:off x="8211312" y="4233672"/>
-            <a:ext cx="2734056" cy="941832"/>
-          </a:xfrm>
-          <a:prstGeom prst="rect">
-            <a:avLst/>
-          </a:prstGeom>
-          <a:noFill/>
-          <a:ln/>
-        </p:spPr>
-        <p:txBody>
-          <a:bodyPr wrap="square" lIns="0" tIns="0" rIns="0" bIns="0" rtlCol="0" anchor="t">
+            <a:off x="7891272" y="4169664"/>
+            <a:ext cx="826008" cy="310896"/>
+          </a:xfrm>
+          <a:prstGeom prst="rect">
+            <a:avLst/>
+          </a:prstGeom>
+          <a:noFill/>
+          <a:ln/>
+        </p:spPr>
+        <p:txBody>
+          <a:bodyPr wrap="square" lIns="0" tIns="0" rIns="0" bIns="0" rtlCol="0" anchor="ctr">
             <a:normAutofit/>
           </a:bodyPr>
           <a:lstStyle/>
           <a:p>
-            <a:pPr indent="0" marL="0">
-              <a:buNone/>
-            </a:pPr>
-            <a:r>
-              <a:rPr lang="en-US" sz="1250" dirty="0">
-                <a:solidFill>
-                  <a:srgbClr val="17364A"/>
-                </a:solidFill>
-                <a:latin typeface="Aptos" pitchFamily="34" charset="0"/>
-                <a:ea typeface="Aptos" pitchFamily="34" charset="-122"/>
-                <a:cs typeface="Aptos" pitchFamily="34" charset="-120"/>
-              </a:rPr>
-              <a:t>If your department already has a strong equivalent tool, adapt or use the existing process instead of recreating it.</a:t>
-            </a:r>
-            <a:endParaRPr lang="en-US" sz="1250" dirty="0"/>
+            <a:pPr algn="ctr" indent="0" marL="0">
+              <a:buNone/>
+            </a:pPr>
+            <a:r>
+              <a:rPr lang="en-US" sz="1500" b="1" dirty="0">
+                <a:solidFill>
+                  <a:srgbClr val="FFFFFF"/>
+                </a:solidFill>
+                <a:latin typeface="Aptos" pitchFamily="34" charset="0"/>
+                <a:ea typeface="Aptos" pitchFamily="34" charset="-122"/>
+                <a:cs typeface="Aptos" pitchFamily="34" charset="-120"/>
+              </a:rPr>
+              <a:t>Concept</a:t>
+            </a:r>
+            <a:endParaRPr lang="en-US" sz="1500" dirty="0"/>
+          </a:p>
+        </p:txBody>
+      </p:sp>
+      <p:sp>
+        <p:nvSpPr>
+          <p:cNvPr id="15" name="Text 13"/>
+          <p:cNvSpPr/>
+          <p:nvPr/>
+        </p:nvSpPr>
+        <p:spPr>
+          <a:xfrm>
+            <a:off x="8817864" y="4187952"/>
+            <a:ext cx="201168" cy="256032"/>
+          </a:xfrm>
+          <a:prstGeom prst="rect">
+            <a:avLst/>
+          </a:prstGeom>
+          <a:noFill/>
+          <a:ln/>
+        </p:spPr>
+        <p:txBody>
+          <a:bodyPr wrap="square" lIns="0" tIns="0" rIns="0" bIns="0" rtlCol="0" anchor="ctr"/>
+          <a:lstStyle/>
+          <a:p>
+            <a:pPr algn="ctr" indent="0" marL="0">
+              <a:buNone/>
+            </a:pPr>
+            <a:r>
+              <a:rPr lang="en-US" sz="1800" b="1" dirty="0">
+                <a:solidFill>
+                  <a:srgbClr val="0068B7"/>
+                </a:solidFill>
+                <a:latin typeface="Aptos" pitchFamily="34" charset="0"/>
+                <a:ea typeface="Aptos" pitchFamily="34" charset="-122"/>
+                <a:cs typeface="Aptos" pitchFamily="34" charset="-120"/>
+              </a:rPr>
+              <a:t>â†’</a:t>
+            </a:r>
+            <a:endParaRPr lang="en-US" sz="1800" dirty="0"/>
+          </a:p>
+        </p:txBody>
+      </p:sp>
+      <p:sp>
+        <p:nvSpPr>
+          <p:cNvPr id="16" name="Shape 14"/>
+          <p:cNvSpPr/>
+          <p:nvPr/>
+        </p:nvSpPr>
+        <p:spPr>
+          <a:xfrm>
+            <a:off x="9046464" y="3977640"/>
+            <a:ext cx="972312" cy="749808"/>
+          </a:xfrm>
+          <a:prstGeom prst="roundRect">
+            <a:avLst>
+              <a:gd name="adj" fmla="val 14634"/>
+            </a:avLst>
+          </a:prstGeom>
+          <a:solidFill>
+            <a:srgbClr val="2F8A28"/>
+          </a:solidFill>
+          <a:ln w="12700">
+            <a:solidFill>
+              <a:srgbClr val="2F8A28"/>
+            </a:solidFill>
+            <a:prstDash val="solid"/>
+          </a:ln>
+        </p:spPr>
+      </p:sp>
+      <p:sp>
+        <p:nvSpPr>
+          <p:cNvPr id="17" name="Text 15"/>
+          <p:cNvSpPr/>
+          <p:nvPr/>
+        </p:nvSpPr>
+        <p:spPr>
+          <a:xfrm>
+            <a:off x="9119616" y="4169664"/>
+            <a:ext cx="826008" cy="310896"/>
+          </a:xfrm>
+          <a:prstGeom prst="rect">
+            <a:avLst/>
+          </a:prstGeom>
+          <a:noFill/>
+          <a:ln/>
+        </p:spPr>
+        <p:txBody>
+          <a:bodyPr wrap="square" lIns="0" tIns="0" rIns="0" bIns="0" rtlCol="0" anchor="ctr">
+            <a:normAutofit/>
+          </a:bodyPr>
+          <a:lstStyle/>
+          <a:p>
+            <a:pPr algn="ctr" indent="0" marL="0">
+              <a:buNone/>
+            </a:pPr>
+            <a:r>
+              <a:rPr lang="en-US" sz="1500" b="1" dirty="0">
+                <a:solidFill>
+                  <a:srgbClr val="FFFFFF"/>
+                </a:solidFill>
+                <a:latin typeface="Aptos" pitchFamily="34" charset="0"/>
+                <a:ea typeface="Aptos" pitchFamily="34" charset="-122"/>
+                <a:cs typeface="Aptos" pitchFamily="34" charset="-120"/>
+              </a:rPr>
+              <a:t>Tool</a:t>
+            </a:r>
+            <a:endParaRPr lang="en-US" sz="1500" dirty="0"/>
+          </a:p>
+        </p:txBody>
+      </p:sp>
+      <p:sp>
+        <p:nvSpPr>
+          <p:cNvPr id="18" name="Text 16"/>
+          <p:cNvSpPr/>
+          <p:nvPr/>
+        </p:nvSpPr>
+        <p:spPr>
+          <a:xfrm>
+            <a:off x="10046208" y="4187952"/>
+            <a:ext cx="201168" cy="256032"/>
+          </a:xfrm>
+          <a:prstGeom prst="rect">
+            <a:avLst/>
+          </a:prstGeom>
+          <a:noFill/>
+          <a:ln/>
+        </p:spPr>
+        <p:txBody>
+          <a:bodyPr wrap="square" lIns="0" tIns="0" rIns="0" bIns="0" rtlCol="0" anchor="ctr"/>
+          <a:lstStyle/>
+          <a:p>
+            <a:pPr algn="ctr" indent="0" marL="0">
+              <a:buNone/>
+            </a:pPr>
+            <a:r>
+              <a:rPr lang="en-US" sz="1800" b="1" dirty="0">
+                <a:solidFill>
+                  <a:srgbClr val="0068B7"/>
+                </a:solidFill>
+                <a:latin typeface="Aptos" pitchFamily="34" charset="0"/>
+                <a:ea typeface="Aptos" pitchFamily="34" charset="-122"/>
+                <a:cs typeface="Aptos" pitchFamily="34" charset="-120"/>
+              </a:rPr>
+              <a:t>â†’</a:t>
+            </a:r>
+            <a:endParaRPr lang="en-US" sz="1800" dirty="0"/>
+          </a:p>
+        </p:txBody>
+      </p:sp>
+      <p:sp>
+        <p:nvSpPr>
+          <p:cNvPr id="19" name="Shape 17"/>
+          <p:cNvSpPr/>
+          <p:nvPr/>
+        </p:nvSpPr>
+        <p:spPr>
+          <a:xfrm>
+            <a:off x="10274808" y="3977640"/>
+            <a:ext cx="972312" cy="749808"/>
+          </a:xfrm>
+          <a:prstGeom prst="roundRect">
+            <a:avLst>
+              <a:gd name="adj" fmla="val 14634"/>
+            </a:avLst>
+          </a:prstGeom>
+          <a:solidFill>
+            <a:srgbClr val="D69A2D"/>
+          </a:solidFill>
+          <a:ln w="12700">
+            <a:solidFill>
+              <a:srgbClr val="D69A2D"/>
+            </a:solidFill>
+            <a:prstDash val="solid"/>
+          </a:ln>
+        </p:spPr>
+      </p:sp>
+      <p:sp>
+        <p:nvSpPr>
+          <p:cNvPr id="20" name="Text 18"/>
+          <p:cNvSpPr/>
+          <p:nvPr/>
+        </p:nvSpPr>
+        <p:spPr>
+          <a:xfrm>
+            <a:off x="10347960" y="4169664"/>
+            <a:ext cx="826008" cy="310896"/>
+          </a:xfrm>
+          <a:prstGeom prst="rect">
+            <a:avLst/>
+          </a:prstGeom>
+          <a:noFill/>
+          <a:ln/>
+        </p:spPr>
+        <p:txBody>
+          <a:bodyPr wrap="square" lIns="0" tIns="0" rIns="0" bIns="0" rtlCol="0" anchor="ctr">
+            <a:normAutofit/>
+          </a:bodyPr>
+          <a:lstStyle/>
+          <a:p>
+            <a:pPr algn="ctr" indent="0" marL="0">
+              <a:buNone/>
+            </a:pPr>
+            <a:r>
+              <a:rPr lang="en-US" sz="1500" b="1" dirty="0">
+                <a:solidFill>
+                  <a:srgbClr val="FFFFFF"/>
+                </a:solidFill>
+                <a:latin typeface="Aptos" pitchFamily="34" charset="0"/>
+                <a:ea typeface="Aptos" pitchFamily="34" charset="-122"/>
+                <a:cs typeface="Aptos" pitchFamily="34" charset="-120"/>
+              </a:rPr>
+              <a:t>Artifact</a:t>
+            </a:r>
+            <a:endParaRPr lang="en-US" sz="1500" dirty="0"/>
           </a:p>
         </p:txBody>
       </p:sp>
@@ -12619,7 +13776,7 @@
                 <a:ea typeface="Aptos" pitchFamily="34" charset="-122"/>
                 <a:cs typeface="Aptos" pitchFamily="34" charset="-120"/>
               </a:rPr>
-              <a:t>© Paula Soper</a:t>
+              <a:t>Â© Paula Soper</a:t>
             </a:r>
             <a:endParaRPr lang="en-US" sz="800" dirty="0"/>
           </a:p>
@@ -12627,7 +13784,46 @@
       </p:sp>
       <p:sp>
         <p:nvSpPr>
-          <p:cNvPr id="7" name="Shape 5"/>
+          <p:cNvPr id="7" name="Text 5"/>
+          <p:cNvSpPr/>
+          <p:nvPr/>
+        </p:nvSpPr>
+        <p:spPr>
+          <a:xfrm>
+            <a:off x="11137392" y="6510528"/>
+            <a:ext cx="411480" cy="201168"/>
+          </a:xfrm>
+          <a:prstGeom prst="rect">
+            <a:avLst/>
+          </a:prstGeom>
+          <a:noFill/>
+          <a:ln/>
+        </p:spPr>
+        <p:txBody>
+          <a:bodyPr wrap="square" lIns="0" tIns="0" rIns="0" bIns="0" rtlCol="0" anchor="ctr"/>
+          <a:lstStyle/>
+          <a:p>
+            <a:pPr algn="r" indent="0" marL="0">
+              <a:buNone/>
+            </a:pPr>
+            <a:r>
+              <a:rPr lang="en-US" sz="900" dirty="0">
+                <a:solidFill>
+                  <a:srgbClr val="5F7181"/>
+                </a:solidFill>
+                <a:latin typeface="Aptos" pitchFamily="34" charset="0"/>
+                <a:ea typeface="Aptos" pitchFamily="34" charset="-122"/>
+                <a:cs typeface="Aptos" pitchFamily="34" charset="-120"/>
+              </a:rPr>
+              <a:t>5</a:t>
+            </a:r>
+            <a:endParaRPr lang="en-US" sz="900" dirty="0"/>
+          </a:p>
+        </p:txBody>
+      </p:sp>
+      <p:sp>
+        <p:nvSpPr>
+          <p:cNvPr id="8" name="Shape 6"/>
           <p:cNvSpPr/>
           <p:nvPr/>
         </p:nvSpPr>
@@ -12652,7 +13848,7 @@
       </p:sp>
       <p:sp>
         <p:nvSpPr>
-          <p:cNvPr id="8" name="Text 6"/>
+          <p:cNvPr id="9" name="Text 7"/>
           <p:cNvSpPr/>
           <p:nvPr/>
         </p:nvSpPr>
@@ -12691,14 +13887,14 @@
       </p:sp>
       <p:sp>
         <p:nvSpPr>
-          <p:cNvPr id="9" name="Text 7"/>
+          <p:cNvPr id="10" name="Text 8"/>
           <p:cNvSpPr/>
           <p:nvPr/>
         </p:nvSpPr>
         <p:spPr>
           <a:xfrm>
             <a:off x="640080" y="621792"/>
-            <a:ext cx="10881360" cy="566928"/>
+            <a:ext cx="10881360" cy="713232"/>
           </a:xfrm>
           <a:prstGeom prst="rect">
             <a:avLst/>
@@ -12716,7 +13912,7 @@
               <a:buNone/>
             </a:pPr>
             <a:r>
-              <a:rPr lang="en-US" sz="2700" b="1" dirty="0">
+              <a:rPr lang="en-US" sz="3400" b="1" dirty="0">
                 <a:solidFill>
                   <a:srgbClr val="003A63"/>
                 </a:solidFill>
@@ -12726,20 +13922,20 @@
               </a:rPr>
               <a:t>Learning Objectives</a:t>
             </a:r>
-            <a:endParaRPr lang="en-US" sz="2700" dirty="0"/>
-          </a:p>
-        </p:txBody>
-      </p:sp>
-      <p:sp>
-        <p:nvSpPr>
-          <p:cNvPr id="10" name="Text 8"/>
-          <p:cNvSpPr/>
-          <p:nvPr/>
-        </p:nvSpPr>
-        <p:spPr>
-          <a:xfrm>
-            <a:off x="868680" y="1417320"/>
-            <a:ext cx="6675120" cy="4434840"/>
+            <a:endParaRPr lang="en-US" sz="3400" dirty="0"/>
+          </a:p>
+        </p:txBody>
+      </p:sp>
+      <p:sp>
+        <p:nvSpPr>
+          <p:cNvPr id="11" name="Text 9"/>
+          <p:cNvSpPr/>
+          <p:nvPr/>
+        </p:nvSpPr>
+        <p:spPr>
+          <a:xfrm>
+            <a:off x="868680" y="1508760"/>
+            <a:ext cx="6537960" cy="4160520"/>
           </a:xfrm>
           <a:prstGeom prst="rect">
             <a:avLst/>
@@ -12754,7 +13950,7 @@
           <a:lstStyle/>
           <a:p>
             <a:r>
-              <a:rPr lang="en-US" sz="1700" dirty="0">
+              <a:rPr lang="en-US" sz="2100" dirty="0">
                 <a:solidFill>
                   <a:srgbClr val="17364A"/>
                 </a:solidFill>
@@ -12762,13 +13958,13 @@
                 <a:ea typeface="Aptos" pitchFamily="34" charset="-122"/>
                 <a:cs typeface="Aptos" pitchFamily="34" charset="-120"/>
               </a:rPr>
-              <a:t>Describe an AI use case in plain language using the public health workflow, users, data, intended output, and decision context.</a:t>
-            </a:r>
-            <a:endParaRPr lang="en-US" sz="1700" dirty="0"/>
-          </a:p>
-          <a:p>
-            <a:r>
-              <a:rPr lang="en-US" sz="1700" dirty="0">
+              <a:t>Describe an AI use case in plain language using the public health workflow, users, data, intended.</a:t>
+            </a:r>
+            <a:endParaRPr lang="en-US" sz="2100" dirty="0"/>
+          </a:p>
+          <a:p>
+            <a:r>
+              <a:rPr lang="en-US" sz="2100" dirty="0">
                 <a:solidFill>
                   <a:srgbClr val="17364A"/>
                 </a:solidFill>
@@ -12776,13 +13972,13 @@
                 <a:ea typeface="Aptos" pitchFamily="34" charset="-122"/>
                 <a:cs typeface="Aptos" pitchFamily="34" charset="-120"/>
               </a:rPr>
-              <a:t>Distinguish between low-risk, moderate-risk, and high-risk AI use cases based on data sensitivity, workflow impact,.</a:t>
-            </a:r>
-            <a:endParaRPr lang="en-US" sz="1700" dirty="0"/>
-          </a:p>
-          <a:p>
-            <a:r>
-              <a:rPr lang="en-US" sz="1700" dirty="0">
+              <a:t>Distinguish between low-risk, moderate-risk, and high-risk AI use cases based on data sensitivity,.</a:t>
+            </a:r>
+            <a:endParaRPr lang="en-US" sz="2100" dirty="0"/>
+          </a:p>
+          <a:p>
+            <a:r>
+              <a:rPr lang="en-US" sz="2100" dirty="0">
                 <a:solidFill>
                   <a:srgbClr val="17364A"/>
                 </a:solidFill>
@@ -12790,29 +13986,15 @@
                 <a:ea typeface="Aptos" pitchFamily="34" charset="-122"/>
                 <a:cs typeface="Aptos" pitchFamily="34" charset="-120"/>
               </a:rPr>
-              <a:t>Identify when a use case should be routed to privacy, legal, IT, cybersecurity, equity, procurement, communications, or.</a:t>
-            </a:r>
-            <a:endParaRPr lang="en-US" sz="1700" dirty="0"/>
-          </a:p>
-          <a:p>
-            <a:r>
-              <a:rPr lang="en-US" sz="1700" dirty="0">
-                <a:solidFill>
-                  <a:srgbClr val="17364A"/>
-                </a:solidFill>
-                <a:latin typeface="Aptos" pitchFamily="34" charset="0"/>
-                <a:ea typeface="Aptos" pitchFamily="34" charset="-122"/>
-                <a:cs typeface="Aptos" pitchFamily="34" charset="-120"/>
-              </a:rPr>
-              <a:t>Recognize use cases that should not proceed because AI is unnecessary, inappropriate, unsafe, or unsupported by available data.</a:t>
-            </a:r>
-            <a:endParaRPr lang="en-US" sz="1700" dirty="0"/>
-          </a:p>
-        </p:txBody>
-      </p:sp>
-      <p:sp>
-        <p:nvSpPr>
-          <p:cNvPr id="11" name="Shape 9"/>
+              <a:t>Identify when a use case should be routed to privacy, legal, IT, cybersecurity, equity, procurement,.</a:t>
+            </a:r>
+            <a:endParaRPr lang="en-US" sz="2100" dirty="0"/>
+          </a:p>
+        </p:txBody>
+      </p:sp>
+      <p:sp>
+        <p:nvSpPr>
+          <p:cNvPr id="12" name="Shape 10"/>
           <p:cNvSpPr/>
           <p:nvPr/>
         </p:nvSpPr>
@@ -12839,14 +14021,14 @@
       </p:sp>
       <p:sp>
         <p:nvSpPr>
-          <p:cNvPr id="12" name="Text 10"/>
+          <p:cNvPr id="13" name="Text 11"/>
           <p:cNvSpPr/>
           <p:nvPr/>
         </p:nvSpPr>
         <p:spPr>
           <a:xfrm>
             <a:off x="8074152" y="1563624"/>
-            <a:ext cx="2825496" cy="201168"/>
+            <a:ext cx="2825496" cy="256032"/>
           </a:xfrm>
           <a:prstGeom prst="rect">
             <a:avLst/>
@@ -12862,7 +14044,7 @@
               <a:buNone/>
             </a:pPr>
             <a:r>
-              <a:rPr lang="en-US" sz="950" b="1" dirty="0">
+              <a:rPr lang="en-US" sz="1300" b="1" dirty="0">
                 <a:solidFill>
                   <a:srgbClr val="0068B7"/>
                 </a:solidFill>
@@ -12872,20 +14054,20 @@
               </a:rPr>
               <a:t>Key idea</a:t>
             </a:r>
-            <a:endParaRPr lang="en-US" sz="950" dirty="0"/>
-          </a:p>
-        </p:txBody>
-      </p:sp>
-      <p:sp>
-        <p:nvSpPr>
-          <p:cNvPr id="13" name="Text 11"/>
-          <p:cNvSpPr/>
-          <p:nvPr/>
-        </p:nvSpPr>
-        <p:spPr>
-          <a:xfrm>
-            <a:off x="8074152" y="1856232"/>
-            <a:ext cx="2825496" cy="1261872"/>
+            <a:endParaRPr lang="en-US" sz="1300" dirty="0"/>
+          </a:p>
+        </p:txBody>
+      </p:sp>
+      <p:sp>
+        <p:nvSpPr>
+          <p:cNvPr id="14" name="Text 12"/>
+          <p:cNvSpPr/>
+          <p:nvPr/>
+        </p:nvSpPr>
+        <p:spPr>
+          <a:xfrm>
+            <a:off x="8074152" y="1920240"/>
+            <a:ext cx="2825496" cy="1188720"/>
           </a:xfrm>
           <a:prstGeom prst="rect">
             <a:avLst/>
@@ -12903,7 +14085,7 @@
               <a:buNone/>
             </a:pPr>
             <a:r>
-              <a:rPr lang="en-US" sz="1250" dirty="0">
+              <a:rPr lang="en-US" sz="1550" dirty="0">
                 <a:solidFill>
                   <a:srgbClr val="17364A"/>
                 </a:solidFill>
@@ -12911,15 +14093,15 @@
                 <a:ea typeface="Aptos" pitchFamily="34" charset="-122"/>
                 <a:cs typeface="Aptos" pitchFamily="34" charset="-120"/>
               </a:rPr>
-              <a:t>Describe an AI use case in plain language using the public health workflow, users, data, intended output, and decision context.</a:t>
-            </a:r>
-            <a:endParaRPr lang="en-US" sz="1250" dirty="0"/>
-          </a:p>
-        </p:txBody>
-      </p:sp>
-      <p:sp>
-        <p:nvSpPr>
-          <p:cNvPr id="14" name="Shape 12"/>
+              <a:t>Describe an AI use case in plain language using the public health workflow, users, data, intended.</a:t>
+            </a:r>
+            <a:endParaRPr lang="en-US" sz="1550" dirty="0"/>
+          </a:p>
+        </p:txBody>
+      </p:sp>
+      <p:sp>
+        <p:nvSpPr>
+          <p:cNvPr id="15" name="Shape 13"/>
           <p:cNvSpPr/>
           <p:nvPr/>
         </p:nvSpPr>
@@ -12946,14 +14128,14 @@
       </p:sp>
       <p:sp>
         <p:nvSpPr>
-          <p:cNvPr id="15" name="Text 13"/>
+          <p:cNvPr id="16" name="Text 14"/>
           <p:cNvSpPr/>
           <p:nvPr/>
         </p:nvSpPr>
         <p:spPr>
           <a:xfrm>
             <a:off x="8074152" y="3666744"/>
-            <a:ext cx="2825496" cy="201168"/>
+            <a:ext cx="2825496" cy="256032"/>
           </a:xfrm>
           <a:prstGeom prst="rect">
             <a:avLst/>
@@ -12969,7 +14151,7 @@
               <a:buNone/>
             </a:pPr>
             <a:r>
-              <a:rPr lang="en-US" sz="950" b="1" dirty="0">
+              <a:rPr lang="en-US" sz="1300" b="1" dirty="0">
                 <a:solidFill>
                   <a:srgbClr val="0068B7"/>
                 </a:solidFill>
@@ -12979,20 +14161,20 @@
               </a:rPr>
               <a:t>Use this for</a:t>
             </a:r>
-            <a:endParaRPr lang="en-US" sz="950" dirty="0"/>
-          </a:p>
-        </p:txBody>
-      </p:sp>
-      <p:sp>
-        <p:nvSpPr>
-          <p:cNvPr id="16" name="Text 14"/>
-          <p:cNvSpPr/>
-          <p:nvPr/>
-        </p:nvSpPr>
-        <p:spPr>
-          <a:xfrm>
-            <a:off x="8074152" y="3959352"/>
-            <a:ext cx="2825496" cy="1170432"/>
+            <a:endParaRPr lang="en-US" sz="1300" dirty="0"/>
+          </a:p>
+        </p:txBody>
+      </p:sp>
+      <p:sp>
+        <p:nvSpPr>
+          <p:cNvPr id="17" name="Text 15"/>
+          <p:cNvSpPr/>
+          <p:nvPr/>
+        </p:nvSpPr>
+        <p:spPr>
+          <a:xfrm>
+            <a:off x="8074152" y="4023360"/>
+            <a:ext cx="2825496" cy="1097280"/>
           </a:xfrm>
           <a:prstGeom prst="rect">
             <a:avLst/>
@@ -13010,7 +14192,7 @@
               <a:buNone/>
             </a:pPr>
             <a:r>
-              <a:rPr lang="en-US" sz="1250" dirty="0">
+              <a:rPr lang="en-US" sz="1550" dirty="0">
                 <a:solidFill>
                   <a:srgbClr val="17364A"/>
                 </a:solidFill>
@@ -13020,7 +14202,7 @@
               </a:rPr>
               <a:t>Connect the concept to public health decisions, safeguards, documentation, or implementation work.</a:t>
             </a:r>
-            <a:endParaRPr lang="en-US" sz="1250" dirty="0"/>
+            <a:endParaRPr lang="en-US" sz="1550" dirty="0"/>
           </a:p>
         </p:txBody>
       </p:sp>
@@ -13217,7 +14399,7 @@
                 <a:ea typeface="Aptos" pitchFamily="34" charset="-122"/>
                 <a:cs typeface="Aptos" pitchFamily="34" charset="-120"/>
               </a:rPr>
-              <a:t>© Paula Soper</a:t>
+              <a:t>Â© Paula Soper</a:t>
             </a:r>
             <a:endParaRPr lang="en-US" sz="800" dirty="0"/>
           </a:p>
@@ -13225,7 +14407,46 @@
       </p:sp>
       <p:sp>
         <p:nvSpPr>
-          <p:cNvPr id="7" name="Shape 5"/>
+          <p:cNvPr id="7" name="Text 5"/>
+          <p:cNvSpPr/>
+          <p:nvPr/>
+        </p:nvSpPr>
+        <p:spPr>
+          <a:xfrm>
+            <a:off x="11137392" y="6510528"/>
+            <a:ext cx="411480" cy="201168"/>
+          </a:xfrm>
+          <a:prstGeom prst="rect">
+            <a:avLst/>
+          </a:prstGeom>
+          <a:noFill/>
+          <a:ln/>
+        </p:spPr>
+        <p:txBody>
+          <a:bodyPr wrap="square" lIns="0" tIns="0" rIns="0" bIns="0" rtlCol="0" anchor="ctr"/>
+          <a:lstStyle/>
+          <a:p>
+            <a:pPr algn="r" indent="0" marL="0">
+              <a:buNone/>
+            </a:pPr>
+            <a:r>
+              <a:rPr lang="en-US" sz="900" dirty="0">
+                <a:solidFill>
+                  <a:srgbClr val="5F7181"/>
+                </a:solidFill>
+                <a:latin typeface="Aptos" pitchFamily="34" charset="0"/>
+                <a:ea typeface="Aptos" pitchFamily="34" charset="-122"/>
+                <a:cs typeface="Aptos" pitchFamily="34" charset="-120"/>
+              </a:rPr>
+              <a:t>6</a:t>
+            </a:r>
+            <a:endParaRPr lang="en-US" sz="900" dirty="0"/>
+          </a:p>
+        </p:txBody>
+      </p:sp>
+      <p:sp>
+        <p:nvSpPr>
+          <p:cNvPr id="8" name="Shape 6"/>
           <p:cNvSpPr/>
           <p:nvPr/>
         </p:nvSpPr>
@@ -13250,7 +14471,7 @@
       </p:sp>
       <p:sp>
         <p:nvSpPr>
-          <p:cNvPr id="8" name="Text 6"/>
+          <p:cNvPr id="9" name="Text 7"/>
           <p:cNvSpPr/>
           <p:nvPr/>
         </p:nvSpPr>
@@ -13289,14 +14510,14 @@
       </p:sp>
       <p:sp>
         <p:nvSpPr>
-          <p:cNvPr id="9" name="Text 7"/>
+          <p:cNvPr id="10" name="Text 8"/>
           <p:cNvSpPr/>
           <p:nvPr/>
         </p:nvSpPr>
         <p:spPr>
           <a:xfrm>
             <a:off x="640080" y="621792"/>
-            <a:ext cx="10881360" cy="566928"/>
+            <a:ext cx="10881360" cy="713232"/>
           </a:xfrm>
           <a:prstGeom prst="rect">
             <a:avLst/>
@@ -13314,7 +14535,7 @@
               <a:buNone/>
             </a:pPr>
             <a:r>
-              <a:rPr lang="en-US" sz="2700" b="1" dirty="0">
+              <a:rPr lang="en-US" sz="3400" b="1" dirty="0">
                 <a:solidFill>
                   <a:srgbClr val="003A63"/>
                 </a:solidFill>
@@ -13324,20 +14545,20 @@
               </a:rPr>
               <a:t>Module Overview</a:t>
             </a:r>
-            <a:endParaRPr lang="en-US" sz="2700" dirty="0"/>
-          </a:p>
-        </p:txBody>
-      </p:sp>
-      <p:sp>
-        <p:nvSpPr>
-          <p:cNvPr id="10" name="Text 8"/>
-          <p:cNvSpPr/>
-          <p:nvPr/>
-        </p:nvSpPr>
-        <p:spPr>
-          <a:xfrm>
-            <a:off x="868680" y="1417320"/>
-            <a:ext cx="6675120" cy="4434840"/>
+            <a:endParaRPr lang="en-US" sz="3400" dirty="0"/>
+          </a:p>
+        </p:txBody>
+      </p:sp>
+      <p:sp>
+        <p:nvSpPr>
+          <p:cNvPr id="11" name="Text 9"/>
+          <p:cNvSpPr/>
+          <p:nvPr/>
+        </p:nvSpPr>
+        <p:spPr>
+          <a:xfrm>
+            <a:off x="868680" y="1508760"/>
+            <a:ext cx="6537960" cy="4160520"/>
           </a:xfrm>
           <a:prstGeom prst="rect">
             <a:avLst/>
@@ -13352,7 +14573,7 @@
           <a:lstStyle/>
           <a:p>
             <a:r>
-              <a:rPr lang="en-US" sz="1700" dirty="0">
+              <a:rPr lang="en-US" sz="2100" dirty="0">
                 <a:solidFill>
                   <a:srgbClr val="17364A"/>
                 </a:solidFill>
@@ -13360,13 +14581,13 @@
                 <a:ea typeface="Aptos" pitchFamily="34" charset="-122"/>
                 <a:cs typeface="Aptos" pitchFamily="34" charset="-120"/>
               </a:rPr>
-              <a:t>AI use case intake is the structured process of receiving, describing, screening, and routing ideas for AI-supported work.</a:t>
-            </a:r>
-            <a:endParaRPr lang="en-US" sz="1700" dirty="0"/>
-          </a:p>
-          <a:p>
-            <a:r>
-              <a:rPr lang="en-US" sz="1700" dirty="0">
+              <a:t>AI use case intake is the structured process of receiving, describing, screening, and routing ideas for.</a:t>
+            </a:r>
+            <a:endParaRPr lang="en-US" sz="2100" dirty="0"/>
+          </a:p>
+          <a:p>
+            <a:r>
+              <a:rPr lang="en-US" sz="2100" dirty="0">
                 <a:solidFill>
                   <a:srgbClr val="17364A"/>
                 </a:solidFill>
@@ -13374,13 +14595,13 @@
                 <a:ea typeface="Aptos" pitchFamily="34" charset="-122"/>
                 <a:cs typeface="Aptos" pitchFamily="34" charset="-120"/>
               </a:rPr>
-              <a:t>In public health, this step is essential because AI ideas often begin as informal suggestions to save time, summarize.</a:t>
-            </a:r>
-            <a:endParaRPr lang="en-US" sz="1700" dirty="0"/>
-          </a:p>
-          <a:p>
-            <a:r>
-              <a:rPr lang="en-US" sz="1700" dirty="0">
+              <a:t>In public health, this step is essential because AI ideas often begin as informal suggestions to save.</a:t>
+            </a:r>
+            <a:endParaRPr lang="en-US" sz="2100" dirty="0"/>
+          </a:p>
+          <a:p>
+            <a:r>
+              <a:rPr lang="en-US" sz="2100" dirty="0">
                 <a:solidFill>
                   <a:srgbClr val="17364A"/>
                 </a:solidFill>
@@ -13388,29 +14609,15 @@
                 <a:ea typeface="Aptos" pitchFamily="34" charset="-122"/>
                 <a:cs typeface="Aptos" pitchFamily="34" charset="-120"/>
               </a:rPr>
-              <a:t>Without a common intake process, agencies may approve low-value or high-risk ideas too quickly while overlooking use cases.</a:t>
-            </a:r>
-            <a:endParaRPr lang="en-US" sz="1700" dirty="0"/>
-          </a:p>
-          <a:p>
-            <a:r>
-              <a:rPr lang="en-US" sz="1700" dirty="0">
-                <a:solidFill>
-                  <a:srgbClr val="17364A"/>
-                </a:solidFill>
-                <a:latin typeface="Aptos" pitchFamily="34" charset="0"/>
-                <a:ea typeface="Aptos" pitchFamily="34" charset="-122"/>
-                <a:cs typeface="Aptos" pitchFamily="34" charset="-120"/>
-              </a:rPr>
-              <a:t>This module teaches learners how to describe a potential AI use case in operational terms, identify the data involved,.</a:t>
-            </a:r>
-            <a:endParaRPr lang="en-US" sz="1700" dirty="0"/>
-          </a:p>
-        </p:txBody>
-      </p:sp>
-      <p:sp>
-        <p:nvSpPr>
-          <p:cNvPr id="11" name="Shape 9"/>
+              <a:t>Without a common intake process, agencies may approve low-value or high-risk ideas too quickly while.</a:t>
+            </a:r>
+            <a:endParaRPr lang="en-US" sz="2100" dirty="0"/>
+          </a:p>
+        </p:txBody>
+      </p:sp>
+      <p:sp>
+        <p:nvSpPr>
+          <p:cNvPr id="12" name="Shape 10"/>
           <p:cNvSpPr/>
           <p:nvPr/>
         </p:nvSpPr>
@@ -13437,14 +14644,14 @@
       </p:sp>
       <p:sp>
         <p:nvSpPr>
-          <p:cNvPr id="12" name="Text 10"/>
+          <p:cNvPr id="13" name="Text 11"/>
           <p:cNvSpPr/>
           <p:nvPr/>
         </p:nvSpPr>
         <p:spPr>
           <a:xfrm>
             <a:off x="8074152" y="1563624"/>
-            <a:ext cx="2825496" cy="201168"/>
+            <a:ext cx="2825496" cy="256032"/>
           </a:xfrm>
           <a:prstGeom prst="rect">
             <a:avLst/>
@@ -13460,7 +14667,7 @@
               <a:buNone/>
             </a:pPr>
             <a:r>
-              <a:rPr lang="en-US" sz="950" b="1" dirty="0">
+              <a:rPr lang="en-US" sz="1300" b="1" dirty="0">
                 <a:solidFill>
                   <a:srgbClr val="0068B7"/>
                 </a:solidFill>
@@ -13470,20 +14677,20 @@
               </a:rPr>
               <a:t>Key idea</a:t>
             </a:r>
-            <a:endParaRPr lang="en-US" sz="950" dirty="0"/>
-          </a:p>
-        </p:txBody>
-      </p:sp>
-      <p:sp>
-        <p:nvSpPr>
-          <p:cNvPr id="13" name="Text 11"/>
-          <p:cNvSpPr/>
-          <p:nvPr/>
-        </p:nvSpPr>
-        <p:spPr>
-          <a:xfrm>
-            <a:off x="8074152" y="1856232"/>
-            <a:ext cx="2825496" cy="1261872"/>
+            <a:endParaRPr lang="en-US" sz="1300" dirty="0"/>
+          </a:p>
+        </p:txBody>
+      </p:sp>
+      <p:sp>
+        <p:nvSpPr>
+          <p:cNvPr id="14" name="Text 12"/>
+          <p:cNvSpPr/>
+          <p:nvPr/>
+        </p:nvSpPr>
+        <p:spPr>
+          <a:xfrm>
+            <a:off x="8074152" y="1920240"/>
+            <a:ext cx="2825496" cy="1188720"/>
           </a:xfrm>
           <a:prstGeom prst="rect">
             <a:avLst/>
@@ -13501,7 +14708,7 @@
               <a:buNone/>
             </a:pPr>
             <a:r>
-              <a:rPr lang="en-US" sz="1250" dirty="0">
+              <a:rPr lang="en-US" sz="1550" dirty="0">
                 <a:solidFill>
                   <a:srgbClr val="17364A"/>
                 </a:solidFill>
@@ -13509,15 +14716,15 @@
                 <a:ea typeface="Aptos" pitchFamily="34" charset="-122"/>
                 <a:cs typeface="Aptos" pitchFamily="34" charset="-120"/>
               </a:rPr>
-              <a:t>AI use case intake is the structured process of receiving, describing, screening, and routing ideas for AI-supported work.</a:t>
-            </a:r>
-            <a:endParaRPr lang="en-US" sz="1250" dirty="0"/>
-          </a:p>
-        </p:txBody>
-      </p:sp>
-      <p:sp>
-        <p:nvSpPr>
-          <p:cNvPr id="14" name="Shape 12"/>
+              <a:t>AI use case intake is the structured process of receiving, describing, screening, and routing ideas for.</a:t>
+            </a:r>
+            <a:endParaRPr lang="en-US" sz="1550" dirty="0"/>
+          </a:p>
+        </p:txBody>
+      </p:sp>
+      <p:sp>
+        <p:nvSpPr>
+          <p:cNvPr id="15" name="Shape 13"/>
           <p:cNvSpPr/>
           <p:nvPr/>
         </p:nvSpPr>
@@ -13544,14 +14751,14 @@
       </p:sp>
       <p:sp>
         <p:nvSpPr>
-          <p:cNvPr id="15" name="Text 13"/>
+          <p:cNvPr id="16" name="Text 14"/>
           <p:cNvSpPr/>
           <p:nvPr/>
         </p:nvSpPr>
         <p:spPr>
           <a:xfrm>
             <a:off x="8074152" y="3666744"/>
-            <a:ext cx="2825496" cy="201168"/>
+            <a:ext cx="2825496" cy="256032"/>
           </a:xfrm>
           <a:prstGeom prst="rect">
             <a:avLst/>
@@ -13567,7 +14774,7 @@
               <a:buNone/>
             </a:pPr>
             <a:r>
-              <a:rPr lang="en-US" sz="950" b="1" dirty="0">
+              <a:rPr lang="en-US" sz="1300" b="1" dirty="0">
                 <a:solidFill>
                   <a:srgbClr val="0068B7"/>
                 </a:solidFill>
@@ -13577,20 +14784,20 @@
               </a:rPr>
               <a:t>Use this for</a:t>
             </a:r>
-            <a:endParaRPr lang="en-US" sz="950" dirty="0"/>
-          </a:p>
-        </p:txBody>
-      </p:sp>
-      <p:sp>
-        <p:nvSpPr>
-          <p:cNvPr id="16" name="Text 14"/>
-          <p:cNvSpPr/>
-          <p:nvPr/>
-        </p:nvSpPr>
-        <p:spPr>
-          <a:xfrm>
-            <a:off x="8074152" y="3959352"/>
-            <a:ext cx="2825496" cy="1170432"/>
+            <a:endParaRPr lang="en-US" sz="1300" dirty="0"/>
+          </a:p>
+        </p:txBody>
+      </p:sp>
+      <p:sp>
+        <p:nvSpPr>
+          <p:cNvPr id="17" name="Text 15"/>
+          <p:cNvSpPr/>
+          <p:nvPr/>
+        </p:nvSpPr>
+        <p:spPr>
+          <a:xfrm>
+            <a:off x="8074152" y="4023360"/>
+            <a:ext cx="2825496" cy="1097280"/>
           </a:xfrm>
           <a:prstGeom prst="rect">
             <a:avLst/>
@@ -13608,7 +14815,7 @@
               <a:buNone/>
             </a:pPr>
             <a:r>
-              <a:rPr lang="en-US" sz="1250" dirty="0">
+              <a:rPr lang="en-US" sz="1550" dirty="0">
                 <a:solidFill>
                   <a:srgbClr val="17364A"/>
                 </a:solidFill>
@@ -13618,7 +14825,7 @@
               </a:rPr>
               <a:t>Connect the concept to public health decisions, safeguards, documentation, or implementation work.</a:t>
             </a:r>
-            <a:endParaRPr lang="en-US" sz="1250" dirty="0"/>
+            <a:endParaRPr lang="en-US" sz="1550" dirty="0"/>
           </a:p>
         </p:txBody>
       </p:sp>
@@ -13815,7 +15022,7 @@
                 <a:ea typeface="Aptos" pitchFamily="34" charset="-122"/>
                 <a:cs typeface="Aptos" pitchFamily="34" charset="-120"/>
               </a:rPr>
-              <a:t>© Paula Soper</a:t>
+              <a:t>Â© Paula Soper</a:t>
             </a:r>
             <a:endParaRPr lang="en-US" sz="800" dirty="0"/>
           </a:p>
@@ -13823,7 +15030,46 @@
       </p:sp>
       <p:sp>
         <p:nvSpPr>
-          <p:cNvPr id="7" name="Shape 5"/>
+          <p:cNvPr id="7" name="Text 5"/>
+          <p:cNvSpPr/>
+          <p:nvPr/>
+        </p:nvSpPr>
+        <p:spPr>
+          <a:xfrm>
+            <a:off x="11137392" y="6510528"/>
+            <a:ext cx="411480" cy="201168"/>
+          </a:xfrm>
+          <a:prstGeom prst="rect">
+            <a:avLst/>
+          </a:prstGeom>
+          <a:noFill/>
+          <a:ln/>
+        </p:spPr>
+        <p:txBody>
+          <a:bodyPr wrap="square" lIns="0" tIns="0" rIns="0" bIns="0" rtlCol="0" anchor="ctr"/>
+          <a:lstStyle/>
+          <a:p>
+            <a:pPr algn="r" indent="0" marL="0">
+              <a:buNone/>
+            </a:pPr>
+            <a:r>
+              <a:rPr lang="en-US" sz="900" dirty="0">
+                <a:solidFill>
+                  <a:srgbClr val="5F7181"/>
+                </a:solidFill>
+                <a:latin typeface="Aptos" pitchFamily="34" charset="0"/>
+                <a:ea typeface="Aptos" pitchFamily="34" charset="-122"/>
+                <a:cs typeface="Aptos" pitchFamily="34" charset="-120"/>
+              </a:rPr>
+              <a:t>7</a:t>
+            </a:r>
+            <a:endParaRPr lang="en-US" sz="900" dirty="0"/>
+          </a:p>
+        </p:txBody>
+      </p:sp>
+      <p:sp>
+        <p:nvSpPr>
+          <p:cNvPr id="8" name="Shape 6"/>
           <p:cNvSpPr/>
           <p:nvPr/>
         </p:nvSpPr>
@@ -13848,7 +15094,7 @@
       </p:sp>
       <p:sp>
         <p:nvSpPr>
-          <p:cNvPr id="8" name="Text 6"/>
+          <p:cNvPr id="9" name="Text 7"/>
           <p:cNvSpPr/>
           <p:nvPr/>
         </p:nvSpPr>
@@ -13887,14 +15133,14 @@
       </p:sp>
       <p:sp>
         <p:nvSpPr>
-          <p:cNvPr id="9" name="Text 7"/>
+          <p:cNvPr id="10" name="Text 8"/>
           <p:cNvSpPr/>
           <p:nvPr/>
         </p:nvSpPr>
         <p:spPr>
           <a:xfrm>
             <a:off x="640080" y="621792"/>
-            <a:ext cx="10881360" cy="566928"/>
+            <a:ext cx="10881360" cy="713232"/>
           </a:xfrm>
           <a:prstGeom prst="rect">
             <a:avLst/>
@@ -13912,7 +15158,7 @@
               <a:buNone/>
             </a:pPr>
             <a:r>
-              <a:rPr lang="en-US" sz="2700" b="1" dirty="0">
+              <a:rPr lang="en-US" sz="3400" b="1" dirty="0">
                 <a:solidFill>
                   <a:srgbClr val="003A63"/>
                 </a:solidFill>
@@ -13922,20 +15168,20 @@
               </a:rPr>
               <a:t>Jurisdiction and Agency Policy Note</a:t>
             </a:r>
-            <a:endParaRPr lang="en-US" sz="2700" dirty="0"/>
-          </a:p>
-        </p:txBody>
-      </p:sp>
-      <p:sp>
-        <p:nvSpPr>
-          <p:cNvPr id="10" name="Text 8"/>
-          <p:cNvSpPr/>
-          <p:nvPr/>
-        </p:nvSpPr>
-        <p:spPr>
-          <a:xfrm>
-            <a:off x="868680" y="1417320"/>
-            <a:ext cx="6675120" cy="4434840"/>
+            <a:endParaRPr lang="en-US" sz="3400" dirty="0"/>
+          </a:p>
+        </p:txBody>
+      </p:sp>
+      <p:sp>
+        <p:nvSpPr>
+          <p:cNvPr id="11" name="Text 9"/>
+          <p:cNvSpPr/>
+          <p:nvPr/>
+        </p:nvSpPr>
+        <p:spPr>
+          <a:xfrm>
+            <a:off x="868680" y="1508760"/>
+            <a:ext cx="6537960" cy="4160520"/>
           </a:xfrm>
           <a:prstGeom prst="rect">
             <a:avLst/>
@@ -13950,7 +15196,7 @@
           <a:lstStyle/>
           <a:p>
             <a:r>
-              <a:rPr lang="en-US" sz="1700" dirty="0">
+              <a:rPr lang="en-US" sz="2100" dirty="0">
                 <a:solidFill>
                   <a:srgbClr val="17364A"/>
                 </a:solidFill>
@@ -13960,11 +15206,11 @@
               </a:rPr>
               <a:t>This module provides national-level training guidance for public health agencies and partners.</a:t>
             </a:r>
-            <a:endParaRPr lang="en-US" sz="1700" dirty="0"/>
-          </a:p>
-          <a:p>
-            <a:r>
-              <a:rPr lang="en-US" sz="1700" dirty="0">
+            <a:endParaRPr lang="en-US" sz="2100" dirty="0"/>
+          </a:p>
+          <a:p>
+            <a:r>
+              <a:rPr lang="en-US" sz="2100" dirty="0">
                 <a:solidFill>
                   <a:srgbClr val="17364A"/>
                 </a:solidFill>
@@ -13972,13 +15218,13 @@
                 <a:ea typeface="Aptos" pitchFamily="34" charset="-122"/>
                 <a:cs typeface="Aptos" pitchFamily="34" charset="-120"/>
               </a:rPr>
-              <a:t>It is not legal advice and does not replace review by agency legal counsel, privacy officers, procurement officials, civil.</a:t>
-            </a:r>
-            <a:endParaRPr lang="en-US" sz="1700" dirty="0"/>
-          </a:p>
-          <a:p>
-            <a:r>
-              <a:rPr lang="en-US" sz="1700" dirty="0">
+              <a:t>It is not legal advice and does not replace review by agency legal counsel, privacy officers,.</a:t>
+            </a:r>
+            <a:endParaRPr lang="en-US" sz="2100" dirty="0"/>
+          </a:p>
+          <a:p>
+            <a:r>
+              <a:rPr lang="en-US" sz="2100" dirty="0">
                 <a:solidFill>
                   <a:srgbClr val="17364A"/>
                 </a:solidFill>
@@ -13986,29 +15232,15 @@
                 <a:ea typeface="Aptos" pitchFamily="34" charset="-122"/>
                 <a:cs typeface="Aptos" pitchFamily="34" charset="-120"/>
               </a:rPr>
-              <a:t>Requirements may vary by state, locality, territory, Tribe, agency, funding source, data-sharing agreement, emergency.</a:t>
-            </a:r>
-            <a:endParaRPr lang="en-US" sz="1700" dirty="0"/>
-          </a:p>
-          <a:p>
-            <a:r>
-              <a:rPr lang="en-US" sz="1700" dirty="0">
-                <a:solidFill>
-                  <a:srgbClr val="17364A"/>
-                </a:solidFill>
-                <a:latin typeface="Aptos" pitchFamily="34" charset="0"/>
-                <a:ea typeface="Aptos" pitchFamily="34" charset="-122"/>
-                <a:cs typeface="Aptos" pitchFamily="34" charset="-120"/>
-              </a:rPr>
-              <a:t>Learners should use this module to identify the issues that require review and should confirm applicable requirements.</a:t>
-            </a:r>
-            <a:endParaRPr lang="en-US" sz="1700" dirty="0"/>
-          </a:p>
-        </p:txBody>
-      </p:sp>
-      <p:sp>
-        <p:nvSpPr>
-          <p:cNvPr id="11" name="Shape 9"/>
+              <a:t>Requirements may vary by state, locality, territory, Tribe, agency, funding source, data-sharing.</a:t>
+            </a:r>
+            <a:endParaRPr lang="en-US" sz="2100" dirty="0"/>
+          </a:p>
+        </p:txBody>
+      </p:sp>
+      <p:sp>
+        <p:nvSpPr>
+          <p:cNvPr id="12" name="Shape 10"/>
           <p:cNvSpPr/>
           <p:nvPr/>
         </p:nvSpPr>
@@ -14035,14 +15267,14 @@
       </p:sp>
       <p:sp>
         <p:nvSpPr>
-          <p:cNvPr id="12" name="Text 10"/>
+          <p:cNvPr id="13" name="Text 11"/>
           <p:cNvSpPr/>
           <p:nvPr/>
         </p:nvSpPr>
         <p:spPr>
           <a:xfrm>
             <a:off x="8074152" y="1563624"/>
-            <a:ext cx="2825496" cy="201168"/>
+            <a:ext cx="2825496" cy="256032"/>
           </a:xfrm>
           <a:prstGeom prst="rect">
             <a:avLst/>
@@ -14058,7 +15290,7 @@
               <a:buNone/>
             </a:pPr>
             <a:r>
-              <a:rPr lang="en-US" sz="950" b="1" dirty="0">
+              <a:rPr lang="en-US" sz="1300" b="1" dirty="0">
                 <a:solidFill>
                   <a:srgbClr val="0068B7"/>
                 </a:solidFill>
@@ -14068,20 +15300,20 @@
               </a:rPr>
               <a:t>Key idea</a:t>
             </a:r>
-            <a:endParaRPr lang="en-US" sz="950" dirty="0"/>
-          </a:p>
-        </p:txBody>
-      </p:sp>
-      <p:sp>
-        <p:nvSpPr>
-          <p:cNvPr id="13" name="Text 11"/>
-          <p:cNvSpPr/>
-          <p:nvPr/>
-        </p:nvSpPr>
-        <p:spPr>
-          <a:xfrm>
-            <a:off x="8074152" y="1856232"/>
-            <a:ext cx="2825496" cy="1261872"/>
+            <a:endParaRPr lang="en-US" sz="1300" dirty="0"/>
+          </a:p>
+        </p:txBody>
+      </p:sp>
+      <p:sp>
+        <p:nvSpPr>
+          <p:cNvPr id="14" name="Text 12"/>
+          <p:cNvSpPr/>
+          <p:nvPr/>
+        </p:nvSpPr>
+        <p:spPr>
+          <a:xfrm>
+            <a:off x="8074152" y="1920240"/>
+            <a:ext cx="2825496" cy="1188720"/>
           </a:xfrm>
           <a:prstGeom prst="rect">
             <a:avLst/>
@@ -14099,7 +15331,7 @@
               <a:buNone/>
             </a:pPr>
             <a:r>
-              <a:rPr lang="en-US" sz="1250" dirty="0">
+              <a:rPr lang="en-US" sz="1550" dirty="0">
                 <a:solidFill>
                   <a:srgbClr val="17364A"/>
                 </a:solidFill>
@@ -14109,13 +15341,13 @@
               </a:rPr>
               <a:t>This module provides national-level training guidance for public health agencies and partners.</a:t>
             </a:r>
-            <a:endParaRPr lang="en-US" sz="1250" dirty="0"/>
-          </a:p>
-        </p:txBody>
-      </p:sp>
-      <p:sp>
-        <p:nvSpPr>
-          <p:cNvPr id="14" name="Shape 12"/>
+            <a:endParaRPr lang="en-US" sz="1550" dirty="0"/>
+          </a:p>
+        </p:txBody>
+      </p:sp>
+      <p:sp>
+        <p:nvSpPr>
+          <p:cNvPr id="15" name="Shape 13"/>
           <p:cNvSpPr/>
           <p:nvPr/>
         </p:nvSpPr>
@@ -14142,14 +15374,14 @@
       </p:sp>
       <p:sp>
         <p:nvSpPr>
-          <p:cNvPr id="15" name="Text 13"/>
+          <p:cNvPr id="16" name="Text 14"/>
           <p:cNvSpPr/>
           <p:nvPr/>
         </p:nvSpPr>
         <p:spPr>
           <a:xfrm>
             <a:off x="8074152" y="3666744"/>
-            <a:ext cx="2825496" cy="201168"/>
+            <a:ext cx="2825496" cy="256032"/>
           </a:xfrm>
           <a:prstGeom prst="rect">
             <a:avLst/>
@@ -14165,7 +15397,7 @@
               <a:buNone/>
             </a:pPr>
             <a:r>
-              <a:rPr lang="en-US" sz="950" b="1" dirty="0">
+              <a:rPr lang="en-US" sz="1300" b="1" dirty="0">
                 <a:solidFill>
                   <a:srgbClr val="0068B7"/>
                 </a:solidFill>
@@ -14175,20 +15407,20 @@
               </a:rPr>
               <a:t>Use this for</a:t>
             </a:r>
-            <a:endParaRPr lang="en-US" sz="950" dirty="0"/>
-          </a:p>
-        </p:txBody>
-      </p:sp>
-      <p:sp>
-        <p:nvSpPr>
-          <p:cNvPr id="16" name="Text 14"/>
-          <p:cNvSpPr/>
-          <p:nvPr/>
-        </p:nvSpPr>
-        <p:spPr>
-          <a:xfrm>
-            <a:off x="8074152" y="3959352"/>
-            <a:ext cx="2825496" cy="1170432"/>
+            <a:endParaRPr lang="en-US" sz="1300" dirty="0"/>
+          </a:p>
+        </p:txBody>
+      </p:sp>
+      <p:sp>
+        <p:nvSpPr>
+          <p:cNvPr id="17" name="Text 15"/>
+          <p:cNvSpPr/>
+          <p:nvPr/>
+        </p:nvSpPr>
+        <p:spPr>
+          <a:xfrm>
+            <a:off x="8074152" y="4023360"/>
+            <a:ext cx="2825496" cy="1097280"/>
           </a:xfrm>
           <a:prstGeom prst="rect">
             <a:avLst/>
@@ -14206,7 +15438,7 @@
               <a:buNone/>
             </a:pPr>
             <a:r>
-              <a:rPr lang="en-US" sz="1250" dirty="0">
+              <a:rPr lang="en-US" sz="1550" dirty="0">
                 <a:solidFill>
                   <a:srgbClr val="17364A"/>
                 </a:solidFill>
@@ -14216,7 +15448,7 @@
               </a:rPr>
               <a:t>Connect the concept to public health decisions, safeguards, documentation, or implementation work.</a:t>
             </a:r>
-            <a:endParaRPr lang="en-US" sz="1250" dirty="0"/>
+            <a:endParaRPr lang="en-US" sz="1550" dirty="0"/>
           </a:p>
         </p:txBody>
       </p:sp>
@@ -14413,7 +15645,7 @@
                 <a:ea typeface="Aptos" pitchFamily="34" charset="-122"/>
                 <a:cs typeface="Aptos" pitchFamily="34" charset="-120"/>
               </a:rPr>
-              <a:t>© Paula Soper</a:t>
+              <a:t>Â© Paula Soper</a:t>
             </a:r>
             <a:endParaRPr lang="en-US" sz="800" dirty="0"/>
           </a:p>
@@ -14421,7 +15653,46 @@
       </p:sp>
       <p:sp>
         <p:nvSpPr>
-          <p:cNvPr id="7" name="Shape 5"/>
+          <p:cNvPr id="7" name="Text 5"/>
+          <p:cNvSpPr/>
+          <p:nvPr/>
+        </p:nvSpPr>
+        <p:spPr>
+          <a:xfrm>
+            <a:off x="11137392" y="6510528"/>
+            <a:ext cx="411480" cy="201168"/>
+          </a:xfrm>
+          <a:prstGeom prst="rect">
+            <a:avLst/>
+          </a:prstGeom>
+          <a:noFill/>
+          <a:ln/>
+        </p:spPr>
+        <p:txBody>
+          <a:bodyPr wrap="square" lIns="0" tIns="0" rIns="0" bIns="0" rtlCol="0" anchor="ctr"/>
+          <a:lstStyle/>
+          <a:p>
+            <a:pPr algn="r" indent="0" marL="0">
+              <a:buNone/>
+            </a:pPr>
+            <a:r>
+              <a:rPr lang="en-US" sz="900" dirty="0">
+                <a:solidFill>
+                  <a:srgbClr val="5F7181"/>
+                </a:solidFill>
+                <a:latin typeface="Aptos" pitchFamily="34" charset="0"/>
+                <a:ea typeface="Aptos" pitchFamily="34" charset="-122"/>
+                <a:cs typeface="Aptos" pitchFamily="34" charset="-120"/>
+              </a:rPr>
+              <a:t>8</a:t>
+            </a:r>
+            <a:endParaRPr lang="en-US" sz="900" dirty="0"/>
+          </a:p>
+        </p:txBody>
+      </p:sp>
+      <p:sp>
+        <p:nvSpPr>
+          <p:cNvPr id="8" name="Shape 6"/>
           <p:cNvSpPr/>
           <p:nvPr/>
         </p:nvSpPr>
@@ -14446,7 +15717,7 @@
       </p:sp>
       <p:sp>
         <p:nvSpPr>
-          <p:cNvPr id="8" name="Text 6"/>
+          <p:cNvPr id="9" name="Text 7"/>
           <p:cNvSpPr/>
           <p:nvPr/>
         </p:nvSpPr>
@@ -14485,14 +15756,14 @@
       </p:sp>
       <p:sp>
         <p:nvSpPr>
-          <p:cNvPr id="9" name="Text 7"/>
+          <p:cNvPr id="10" name="Text 8"/>
           <p:cNvSpPr/>
           <p:nvPr/>
         </p:nvSpPr>
         <p:spPr>
           <a:xfrm>
             <a:off x="640080" y="621792"/>
-            <a:ext cx="10881360" cy="566928"/>
+            <a:ext cx="10881360" cy="713232"/>
           </a:xfrm>
           <a:prstGeom prst="rect">
             <a:avLst/>
@@ -14510,7 +15781,7 @@
               <a:buNone/>
             </a:pPr>
             <a:r>
-              <a:rPr lang="en-US" sz="2700" b="1" dirty="0">
+              <a:rPr lang="en-US" sz="3400" b="1" dirty="0">
                 <a:solidFill>
                   <a:srgbClr val="003A63"/>
                 </a:solidFill>
@@ -14520,20 +15791,20 @@
               </a:rPr>
               <a:t>Public Health Example</a:t>
             </a:r>
-            <a:endParaRPr lang="en-US" sz="2700" dirty="0"/>
-          </a:p>
-        </p:txBody>
-      </p:sp>
-      <p:sp>
-        <p:nvSpPr>
-          <p:cNvPr id="10" name="Text 8"/>
-          <p:cNvSpPr/>
-          <p:nvPr/>
-        </p:nvSpPr>
-        <p:spPr>
-          <a:xfrm>
-            <a:off x="868680" y="1417320"/>
-            <a:ext cx="6675120" cy="4434840"/>
+            <a:endParaRPr lang="en-US" sz="3400" dirty="0"/>
+          </a:p>
+        </p:txBody>
+      </p:sp>
+      <p:sp>
+        <p:nvSpPr>
+          <p:cNvPr id="11" name="Text 9"/>
+          <p:cNvSpPr/>
+          <p:nvPr/>
+        </p:nvSpPr>
+        <p:spPr>
+          <a:xfrm>
+            <a:off x="868680" y="1508760"/>
+            <a:ext cx="6537960" cy="4160520"/>
           </a:xfrm>
           <a:prstGeom prst="rect">
             <a:avLst/>
@@ -14548,7 +15819,7 @@
           <a:lstStyle/>
           <a:p>
             <a:r>
-              <a:rPr lang="en-US" sz="1700" dirty="0">
+              <a:rPr lang="en-US" sz="2100" dirty="0">
                 <a:solidFill>
                   <a:srgbClr val="17364A"/>
                 </a:solidFill>
@@ -14556,13 +15827,13 @@
                 <a:ea typeface="Aptos" pitchFamily="34" charset="-122"/>
                 <a:cs typeface="Aptos" pitchFamily="34" charset="-120"/>
               </a:rPr>
-              <a:t>A communicable disease program wants to use generative AI to summarize case investigation notes and identify missing.</a:t>
-            </a:r>
-            <a:endParaRPr lang="en-US" sz="1700" dirty="0"/>
-          </a:p>
-          <a:p>
-            <a:r>
-              <a:rPr lang="en-US" sz="1700" dirty="0">
+              <a:t>A communicable disease program wants to use generative AI to summarize case investigation notes and.</a:t>
+            </a:r>
+            <a:endParaRPr lang="en-US" sz="2100" dirty="0"/>
+          </a:p>
+          <a:p>
+            <a:r>
+              <a:rPr lang="en-US" sz="2100" dirty="0">
                 <a:solidFill>
                   <a:srgbClr val="17364A"/>
                 </a:solidFill>
@@ -14570,13 +15841,13 @@
                 <a:ea typeface="Aptos" pitchFamily="34" charset="-122"/>
                 <a:cs typeface="Aptos" pitchFamily="34" charset="-120"/>
               </a:rPr>
-              <a:t>Intake would document the workflow, the staff who would use the output, the source data, whether protected health.</a:t>
-            </a:r>
-            <a:endParaRPr lang="en-US" sz="1700" dirty="0"/>
-          </a:p>
-          <a:p>
-            <a:r>
-              <a:rPr lang="en-US" sz="1700" dirty="0">
+              <a:t>Intake would document the workflow, the staff who would use the output, the source data, whether.</a:t>
+            </a:r>
+            <a:endParaRPr lang="en-US" sz="2100" dirty="0"/>
+          </a:p>
+          <a:p>
+            <a:r>
+              <a:rPr lang="en-US" sz="2100" dirty="0">
                 <a:solidFill>
                   <a:srgbClr val="17364A"/>
                 </a:solidFill>
@@ -14584,15 +15855,15 @@
                 <a:ea typeface="Aptos" pitchFamily="34" charset="-122"/>
                 <a:cs typeface="Aptos" pitchFamily="34" charset="-120"/>
               </a:rPr>
-              <a:t>Triage would likely route the use case to privacy, legal, IT, epidemiology, equity, and governance review before any pilot.</a:t>
-            </a:r>
-            <a:endParaRPr lang="en-US" sz="1700" dirty="0"/>
-          </a:p>
-        </p:txBody>
-      </p:sp>
-      <p:sp>
-        <p:nvSpPr>
-          <p:cNvPr id="11" name="Shape 9"/>
+              <a:t>Triage would likely route the use case to privacy, legal, IT, epidemiology, equity, and governance.</a:t>
+            </a:r>
+            <a:endParaRPr lang="en-US" sz="2100" dirty="0"/>
+          </a:p>
+        </p:txBody>
+      </p:sp>
+      <p:sp>
+        <p:nvSpPr>
+          <p:cNvPr id="12" name="Shape 10"/>
           <p:cNvSpPr/>
           <p:nvPr/>
         </p:nvSpPr>
@@ -14619,14 +15890,14 @@
       </p:sp>
       <p:sp>
         <p:nvSpPr>
-          <p:cNvPr id="12" name="Text 10"/>
+          <p:cNvPr id="13" name="Text 11"/>
           <p:cNvSpPr/>
           <p:nvPr/>
         </p:nvSpPr>
         <p:spPr>
           <a:xfrm>
             <a:off x="8074152" y="1563624"/>
-            <a:ext cx="2825496" cy="201168"/>
+            <a:ext cx="2825496" cy="256032"/>
           </a:xfrm>
           <a:prstGeom prst="rect">
             <a:avLst/>
@@ -14642,7 +15913,7 @@
               <a:buNone/>
             </a:pPr>
             <a:r>
-              <a:rPr lang="en-US" sz="950" b="1" dirty="0">
+              <a:rPr lang="en-US" sz="1300" b="1" dirty="0">
                 <a:solidFill>
                   <a:srgbClr val="0068B7"/>
                 </a:solidFill>
@@ -14652,20 +15923,20 @@
               </a:rPr>
               <a:t>Key idea</a:t>
             </a:r>
-            <a:endParaRPr lang="en-US" sz="950" dirty="0"/>
-          </a:p>
-        </p:txBody>
-      </p:sp>
-      <p:sp>
-        <p:nvSpPr>
-          <p:cNvPr id="13" name="Text 11"/>
-          <p:cNvSpPr/>
-          <p:nvPr/>
-        </p:nvSpPr>
-        <p:spPr>
-          <a:xfrm>
-            <a:off x="8074152" y="1856232"/>
-            <a:ext cx="2825496" cy="1261872"/>
+            <a:endParaRPr lang="en-US" sz="1300" dirty="0"/>
+          </a:p>
+        </p:txBody>
+      </p:sp>
+      <p:sp>
+        <p:nvSpPr>
+          <p:cNvPr id="14" name="Text 12"/>
+          <p:cNvSpPr/>
+          <p:nvPr/>
+        </p:nvSpPr>
+        <p:spPr>
+          <a:xfrm>
+            <a:off x="8074152" y="1920240"/>
+            <a:ext cx="2825496" cy="1188720"/>
           </a:xfrm>
           <a:prstGeom prst="rect">
             <a:avLst/>
@@ -14683,7 +15954,7 @@
               <a:buNone/>
             </a:pPr>
             <a:r>
-              <a:rPr lang="en-US" sz="1250" dirty="0">
+              <a:rPr lang="en-US" sz="1550" dirty="0">
                 <a:solidFill>
                   <a:srgbClr val="17364A"/>
                 </a:solidFill>
@@ -14691,15 +15962,15 @@
                 <a:ea typeface="Aptos" pitchFamily="34" charset="-122"/>
                 <a:cs typeface="Aptos" pitchFamily="34" charset="-120"/>
               </a:rPr>
-              <a:t>A communicable disease program wants to use generative AI to summarize case investigation notes and identify missing.</a:t>
-            </a:r>
-            <a:endParaRPr lang="en-US" sz="1250" dirty="0"/>
-          </a:p>
-        </p:txBody>
-      </p:sp>
-      <p:sp>
-        <p:nvSpPr>
-          <p:cNvPr id="14" name="Shape 12"/>
+              <a:t>A communicable disease program wants to use generative AI to summarize case investigation notes and.</a:t>
+            </a:r>
+            <a:endParaRPr lang="en-US" sz="1550" dirty="0"/>
+          </a:p>
+        </p:txBody>
+      </p:sp>
+      <p:sp>
+        <p:nvSpPr>
+          <p:cNvPr id="15" name="Shape 13"/>
           <p:cNvSpPr/>
           <p:nvPr/>
         </p:nvSpPr>
@@ -14726,14 +15997,14 @@
       </p:sp>
       <p:sp>
         <p:nvSpPr>
-          <p:cNvPr id="15" name="Text 13"/>
+          <p:cNvPr id="16" name="Text 14"/>
           <p:cNvSpPr/>
           <p:nvPr/>
         </p:nvSpPr>
         <p:spPr>
           <a:xfrm>
             <a:off x="8074152" y="3666744"/>
-            <a:ext cx="2825496" cy="201168"/>
+            <a:ext cx="2825496" cy="256032"/>
           </a:xfrm>
           <a:prstGeom prst="rect">
             <a:avLst/>
@@ -14749,7 +16020,7 @@
               <a:buNone/>
             </a:pPr>
             <a:r>
-              <a:rPr lang="en-US" sz="950" b="1" dirty="0">
+              <a:rPr lang="en-US" sz="1300" b="1" dirty="0">
                 <a:solidFill>
                   <a:srgbClr val="0068B7"/>
                 </a:solidFill>
@@ -14759,20 +16030,20 @@
               </a:rPr>
               <a:t>Use this for</a:t>
             </a:r>
-            <a:endParaRPr lang="en-US" sz="950" dirty="0"/>
-          </a:p>
-        </p:txBody>
-      </p:sp>
-      <p:sp>
-        <p:nvSpPr>
-          <p:cNvPr id="16" name="Text 14"/>
-          <p:cNvSpPr/>
-          <p:nvPr/>
-        </p:nvSpPr>
-        <p:spPr>
-          <a:xfrm>
-            <a:off x="8074152" y="3959352"/>
-            <a:ext cx="2825496" cy="1170432"/>
+            <a:endParaRPr lang="en-US" sz="1300" dirty="0"/>
+          </a:p>
+        </p:txBody>
+      </p:sp>
+      <p:sp>
+        <p:nvSpPr>
+          <p:cNvPr id="17" name="Text 15"/>
+          <p:cNvSpPr/>
+          <p:nvPr/>
+        </p:nvSpPr>
+        <p:spPr>
+          <a:xfrm>
+            <a:off x="8074152" y="4023360"/>
+            <a:ext cx="2825496" cy="1097280"/>
           </a:xfrm>
           <a:prstGeom prst="rect">
             <a:avLst/>
@@ -14790,7 +16061,7 @@
               <a:buNone/>
             </a:pPr>
             <a:r>
-              <a:rPr lang="en-US" sz="1250" dirty="0">
+              <a:rPr lang="en-US" sz="1550" dirty="0">
                 <a:solidFill>
                   <a:srgbClr val="17364A"/>
                 </a:solidFill>
@@ -14800,7 +16071,7 @@
               </a:rPr>
               <a:t>Connect the concept to public health decisions, safeguards, documentation, or implementation work.</a:t>
             </a:r>
-            <a:endParaRPr lang="en-US" sz="1250" dirty="0"/>
+            <a:endParaRPr lang="en-US" sz="1550" dirty="0"/>
           </a:p>
         </p:txBody>
       </p:sp>
@@ -14997,7 +16268,7 @@
                 <a:ea typeface="Aptos" pitchFamily="34" charset="-122"/>
                 <a:cs typeface="Aptos" pitchFamily="34" charset="-120"/>
               </a:rPr>
-              <a:t>© Paula Soper</a:t>
+              <a:t>Â© Paula Soper</a:t>
             </a:r>
             <a:endParaRPr lang="en-US" sz="800" dirty="0"/>
           </a:p>
@@ -15005,7 +16276,46 @@
       </p:sp>
       <p:sp>
         <p:nvSpPr>
-          <p:cNvPr id="7" name="Shape 5"/>
+          <p:cNvPr id="7" name="Text 5"/>
+          <p:cNvSpPr/>
+          <p:nvPr/>
+        </p:nvSpPr>
+        <p:spPr>
+          <a:xfrm>
+            <a:off x="11137392" y="6510528"/>
+            <a:ext cx="411480" cy="201168"/>
+          </a:xfrm>
+          <a:prstGeom prst="rect">
+            <a:avLst/>
+          </a:prstGeom>
+          <a:noFill/>
+          <a:ln/>
+        </p:spPr>
+        <p:txBody>
+          <a:bodyPr wrap="square" lIns="0" tIns="0" rIns="0" bIns="0" rtlCol="0" anchor="ctr"/>
+          <a:lstStyle/>
+          <a:p>
+            <a:pPr algn="r" indent="0" marL="0">
+              <a:buNone/>
+            </a:pPr>
+            <a:r>
+              <a:rPr lang="en-US" sz="900" dirty="0">
+                <a:solidFill>
+                  <a:srgbClr val="5F7181"/>
+                </a:solidFill>
+                <a:latin typeface="Aptos" pitchFamily="34" charset="0"/>
+                <a:ea typeface="Aptos" pitchFamily="34" charset="-122"/>
+                <a:cs typeface="Aptos" pitchFamily="34" charset="-120"/>
+              </a:rPr>
+              <a:t>9</a:t>
+            </a:r>
+            <a:endParaRPr lang="en-US" sz="900" dirty="0"/>
+          </a:p>
+        </p:txBody>
+      </p:sp>
+      <p:sp>
+        <p:nvSpPr>
+          <p:cNvPr id="8" name="Shape 6"/>
           <p:cNvSpPr/>
           <p:nvPr/>
         </p:nvSpPr>
@@ -15030,7 +16340,7 @@
       </p:sp>
       <p:sp>
         <p:nvSpPr>
-          <p:cNvPr id="8" name="Text 6"/>
+          <p:cNvPr id="9" name="Text 7"/>
           <p:cNvSpPr/>
           <p:nvPr/>
         </p:nvSpPr>
@@ -15069,14 +16379,14 @@
       </p:sp>
       <p:sp>
         <p:nvSpPr>
-          <p:cNvPr id="9" name="Text 7"/>
+          <p:cNvPr id="10" name="Text 8"/>
           <p:cNvSpPr/>
           <p:nvPr/>
         </p:nvSpPr>
         <p:spPr>
           <a:xfrm>
             <a:off x="640080" y="621792"/>
-            <a:ext cx="10881360" cy="566928"/>
+            <a:ext cx="10881360" cy="713232"/>
           </a:xfrm>
           <a:prstGeom prst="rect">
             <a:avLst/>
@@ -15094,7 +16404,7 @@
               <a:buNone/>
             </a:pPr>
             <a:r>
-              <a:rPr lang="en-US" sz="2700" b="1" dirty="0">
+              <a:rPr lang="en-US" sz="3400" b="1" dirty="0">
                 <a:solidFill>
                   <a:srgbClr val="003A63"/>
                 </a:solidFill>
@@ -15104,20 +16414,20 @@
               </a:rPr>
               <a:t>Topic Deep Dive</a:t>
             </a:r>
-            <a:endParaRPr lang="en-US" sz="2700" dirty="0"/>
-          </a:p>
-        </p:txBody>
-      </p:sp>
-      <p:sp>
-        <p:nvSpPr>
-          <p:cNvPr id="10" name="Text 8"/>
-          <p:cNvSpPr/>
-          <p:nvPr/>
-        </p:nvSpPr>
-        <p:spPr>
-          <a:xfrm>
-            <a:off x="868680" y="1417320"/>
-            <a:ext cx="6675120" cy="4434840"/>
+            <a:endParaRPr lang="en-US" sz="3400" dirty="0"/>
+          </a:p>
+        </p:txBody>
+      </p:sp>
+      <p:sp>
+        <p:nvSpPr>
+          <p:cNvPr id="11" name="Text 9"/>
+          <p:cNvSpPr/>
+          <p:nvPr/>
+        </p:nvSpPr>
+        <p:spPr>
+          <a:xfrm>
+            <a:off x="868680" y="1508760"/>
+            <a:ext cx="6537960" cy="4160520"/>
           </a:xfrm>
           <a:prstGeom prst="rect">
             <a:avLst/>
@@ -15132,7 +16442,7 @@
           <a:lstStyle/>
           <a:p>
             <a:r>
-              <a:rPr lang="en-US" sz="1700" dirty="0">
+              <a:rPr lang="en-US" sz="2100" dirty="0">
                 <a:solidFill>
                   <a:srgbClr val="17364A"/>
                 </a:solidFill>
@@ -15142,11 +16452,11 @@
               </a:rPr>
               <a:t>An effective intake process begins by defining the problem before selecting the technology.</a:t>
             </a:r>
-            <a:endParaRPr lang="en-US" sz="1700" dirty="0"/>
-          </a:p>
-          <a:p>
-            <a:r>
-              <a:rPr lang="en-US" sz="1700" dirty="0">
+            <a:endParaRPr lang="en-US" sz="2100" dirty="0"/>
+          </a:p>
+          <a:p>
+            <a:r>
+              <a:rPr lang="en-US" sz="2100" dirty="0">
                 <a:solidFill>
                   <a:srgbClr val="17364A"/>
                 </a:solidFill>
@@ -15154,13 +16464,13 @@
                 <a:ea typeface="Aptos" pitchFamily="34" charset="-122"/>
                 <a:cs typeface="Aptos" pitchFamily="34" charset="-120"/>
               </a:rPr>
-              <a:t>Staff should describe the current workflow, the pain point, the people affected, the desired improvement, and the reason AI.</a:t>
-            </a:r>
-            <a:endParaRPr lang="en-US" sz="1700" dirty="0"/>
-          </a:p>
-          <a:p>
-            <a:r>
-              <a:rPr lang="en-US" sz="1700" dirty="0">
+              <a:t>Staff should describe the current workflow, the pain point, the people affected, the desired.</a:t>
+            </a:r>
+            <a:endParaRPr lang="en-US" sz="2100" dirty="0"/>
+          </a:p>
+          <a:p>
+            <a:r>
+              <a:rPr lang="en-US" sz="2100" dirty="0">
                 <a:solidFill>
                   <a:srgbClr val="17364A"/>
                 </a:solidFill>
@@ -15168,29 +16478,15 @@
                 <a:ea typeface="Aptos" pitchFamily="34" charset="-122"/>
                 <a:cs typeface="Aptos" pitchFamily="34" charset="-120"/>
               </a:rPr>
-              <a:t>This prevents technology-first proposals that begin with a tool and then search for a public health problem to justify it.</a:t>
-            </a:r>
-            <a:endParaRPr lang="en-US" sz="1700" dirty="0"/>
-          </a:p>
-          <a:p>
-            <a:r>
-              <a:rPr lang="en-US" sz="1700" dirty="0">
-                <a:solidFill>
-                  <a:srgbClr val="17364A"/>
-                </a:solidFill>
-                <a:latin typeface="Aptos" pitchFamily="34" charset="0"/>
-                <a:ea typeface="Aptos" pitchFamily="34" charset="-122"/>
-                <a:cs typeface="Aptos" pitchFamily="34" charset="-120"/>
-              </a:rPr>
-              <a:t>A clear problem statement also helps reviewers decide whether AI is needed or whether a simpler change, such as a template,.</a:t>
-            </a:r>
-            <a:endParaRPr lang="en-US" sz="1700" dirty="0"/>
-          </a:p>
-        </p:txBody>
-      </p:sp>
-      <p:sp>
-        <p:nvSpPr>
-          <p:cNvPr id="11" name="Shape 9"/>
+              <a:t>This prevents technology-first proposals that begin with a tool and then search for a public health.</a:t>
+            </a:r>
+            <a:endParaRPr lang="en-US" sz="2100" dirty="0"/>
+          </a:p>
+        </p:txBody>
+      </p:sp>
+      <p:sp>
+        <p:nvSpPr>
+          <p:cNvPr id="12" name="Shape 10"/>
           <p:cNvSpPr/>
           <p:nvPr/>
         </p:nvSpPr>
@@ -15217,14 +16513,14 @@
       </p:sp>
       <p:sp>
         <p:nvSpPr>
-          <p:cNvPr id="12" name="Text 10"/>
+          <p:cNvPr id="13" name="Text 11"/>
           <p:cNvSpPr/>
           <p:nvPr/>
         </p:nvSpPr>
         <p:spPr>
           <a:xfrm>
             <a:off x="8074152" y="1563624"/>
-            <a:ext cx="2825496" cy="201168"/>
+            <a:ext cx="2825496" cy="256032"/>
           </a:xfrm>
           <a:prstGeom prst="rect">
             <a:avLst/>
@@ -15240,7 +16536,7 @@
               <a:buNone/>
             </a:pPr>
             <a:r>
-              <a:rPr lang="en-US" sz="950" b="1" dirty="0">
+              <a:rPr lang="en-US" sz="1300" b="1" dirty="0">
                 <a:solidFill>
                   <a:srgbClr val="0068B7"/>
                 </a:solidFill>
@@ -15250,20 +16546,20 @@
               </a:rPr>
               <a:t>Key idea</a:t>
             </a:r>
-            <a:endParaRPr lang="en-US" sz="950" dirty="0"/>
-          </a:p>
-        </p:txBody>
-      </p:sp>
-      <p:sp>
-        <p:nvSpPr>
-          <p:cNvPr id="13" name="Text 11"/>
-          <p:cNvSpPr/>
-          <p:nvPr/>
-        </p:nvSpPr>
-        <p:spPr>
-          <a:xfrm>
-            <a:off x="8074152" y="1856232"/>
-            <a:ext cx="2825496" cy="1261872"/>
+            <a:endParaRPr lang="en-US" sz="1300" dirty="0"/>
+          </a:p>
+        </p:txBody>
+      </p:sp>
+      <p:sp>
+        <p:nvSpPr>
+          <p:cNvPr id="14" name="Text 12"/>
+          <p:cNvSpPr/>
+          <p:nvPr/>
+        </p:nvSpPr>
+        <p:spPr>
+          <a:xfrm>
+            <a:off x="8074152" y="1920240"/>
+            <a:ext cx="2825496" cy="1188720"/>
           </a:xfrm>
           <a:prstGeom prst="rect">
             <a:avLst/>
@@ -15281,7 +16577,7 @@
               <a:buNone/>
             </a:pPr>
             <a:r>
-              <a:rPr lang="en-US" sz="1250" dirty="0">
+              <a:rPr lang="en-US" sz="1550" dirty="0">
                 <a:solidFill>
                   <a:srgbClr val="17364A"/>
                 </a:solidFill>
@@ -15291,13 +16587,13 @@
               </a:rPr>
               <a:t>An effective intake process begins by defining the problem before selecting the technology.</a:t>
             </a:r>
-            <a:endParaRPr lang="en-US" sz="1250" dirty="0"/>
-          </a:p>
-        </p:txBody>
-      </p:sp>
-      <p:sp>
-        <p:nvSpPr>
-          <p:cNvPr id="14" name="Shape 12"/>
+            <a:endParaRPr lang="en-US" sz="1550" dirty="0"/>
+          </a:p>
+        </p:txBody>
+      </p:sp>
+      <p:sp>
+        <p:nvSpPr>
+          <p:cNvPr id="15" name="Shape 13"/>
           <p:cNvSpPr/>
           <p:nvPr/>
         </p:nvSpPr>
@@ -15324,14 +16620,14 @@
       </p:sp>
       <p:sp>
         <p:nvSpPr>
-          <p:cNvPr id="15" name="Text 13"/>
+          <p:cNvPr id="16" name="Text 14"/>
           <p:cNvSpPr/>
           <p:nvPr/>
         </p:nvSpPr>
         <p:spPr>
           <a:xfrm>
             <a:off x="8074152" y="3666744"/>
-            <a:ext cx="2825496" cy="201168"/>
+            <a:ext cx="2825496" cy="256032"/>
           </a:xfrm>
           <a:prstGeom prst="rect">
             <a:avLst/>
@@ -15347,7 +16643,7 @@
               <a:buNone/>
             </a:pPr>
             <a:r>
-              <a:rPr lang="en-US" sz="950" b="1" dirty="0">
+              <a:rPr lang="en-US" sz="1300" b="1" dirty="0">
                 <a:solidFill>
                   <a:srgbClr val="0068B7"/>
                 </a:solidFill>
@@ -15357,20 +16653,20 @@
               </a:rPr>
               <a:t>Use this for</a:t>
             </a:r>
-            <a:endParaRPr lang="en-US" sz="950" dirty="0"/>
-          </a:p>
-        </p:txBody>
-      </p:sp>
-      <p:sp>
-        <p:nvSpPr>
-          <p:cNvPr id="16" name="Text 14"/>
-          <p:cNvSpPr/>
-          <p:nvPr/>
-        </p:nvSpPr>
-        <p:spPr>
-          <a:xfrm>
-            <a:off x="8074152" y="3959352"/>
-            <a:ext cx="2825496" cy="1170432"/>
+            <a:endParaRPr lang="en-US" sz="1300" dirty="0"/>
+          </a:p>
+        </p:txBody>
+      </p:sp>
+      <p:sp>
+        <p:nvSpPr>
+          <p:cNvPr id="17" name="Text 15"/>
+          <p:cNvSpPr/>
+          <p:nvPr/>
+        </p:nvSpPr>
+        <p:spPr>
+          <a:xfrm>
+            <a:off x="8074152" y="4023360"/>
+            <a:ext cx="2825496" cy="1097280"/>
           </a:xfrm>
           <a:prstGeom prst="rect">
             <a:avLst/>
@@ -15388,7 +16684,7 @@
               <a:buNone/>
             </a:pPr>
             <a:r>
-              <a:rPr lang="en-US" sz="1250" dirty="0">
+              <a:rPr lang="en-US" sz="1550" dirty="0">
                 <a:solidFill>
                   <a:srgbClr val="17364A"/>
                 </a:solidFill>
@@ -15398,7 +16694,7 @@
               </a:rPr>
               <a:t>Connect the concept to public health decisions, safeguards, documentation, or implementation work.</a:t>
             </a:r>
-            <a:endParaRPr lang="en-US" sz="1250" dirty="0"/>
+            <a:endParaRPr lang="en-US" sz="1550" dirty="0"/>
           </a:p>
         </p:txBody>
       </p:sp>
